--- a/CS153_Pomodoro_Buddy_Slides.pptx
+++ b/CS153_Pomodoro_Buddy_Slides.pptx
@@ -15,9 +15,10 @@
     <p:sldId id="263" r:id="rId9"/>
     <p:sldId id="264" r:id="rId10"/>
     <p:sldId id="265" r:id="rId11"/>
+    <p:sldId id="266" r:id="rId12"/>
   </p:sldIdLst>
   <p:notesMasterIdLst>
-    <p:notesMasterId r:id="rId12"/>
+    <p:notesMasterId r:id="rId13"/>
   </p:notesMasterIdLst>
   <p:sldSz cx="9144000" cy="5143500"/>
   <p:notesSz cx="5143500" cy="9144000"/>
@@ -641,6 +642,94 @@
 </p:notes>
 </file>
 
+<file path=ppt/notesSlides/notesSlide11.xml><?xml version="1.0" encoding="utf-8"?>
+<p:notes xmlns:a="http://schemas.openxmlformats.org/drawingml/2006/main" xmlns:r="http://schemas.openxmlformats.org/officeDocument/2006/relationships" xmlns:p="http://schemas.openxmlformats.org/presentationml/2006/main">
+  <p:cSld>
+    <p:spTree>
+      <p:nvGrpSpPr>
+        <p:cNvPr id="1" name=""/>
+        <p:cNvGrpSpPr/>
+        <p:nvPr/>
+      </p:nvGrpSpPr>
+      <p:grpSpPr>
+        <a:xfrm>
+          <a:off x="0" y="0"/>
+          <a:ext cx="0" cy="0"/>
+          <a:chOff x="0" y="0"/>
+          <a:chExt cx="0" cy="0"/>
+        </a:xfrm>
+      </p:grpSpPr>
+      <p:sp>
+        <p:nvSpPr>
+          <p:cNvPr id="2" name="Slide Image Placeholder 1"/>
+          <p:cNvSpPr>
+            <a:spLocks noGrp="1" noRot="1" noChangeAspect="1"/>
+          </p:cNvSpPr>
+          <p:nvPr>
+            <p:ph type="sldImg"/>
+          </p:nvPr>
+        </p:nvSpPr>
+        <p:spPr/>
+      </p:sp>
+      <p:sp>
+        <p:nvSpPr>
+          <p:cNvPr id="3" name="Notes Placeholder 2"/>
+          <p:cNvSpPr>
+            <a:spLocks noGrp="1"/>
+          </p:cNvSpPr>
+          <p:nvPr>
+            <p:ph type="body" idx="1"/>
+          </p:nvPr>
+        </p:nvSpPr>
+        <p:spPr/>
+        <p:txBody>
+          <a:bodyPr/>
+          <a:lstStyle/>
+          <a:p>
+            <a:r>
+              <a:rPr lang="en-US" dirty="0"/>
+              <a:t/>
+            </a:r>
+            <a:endParaRPr lang="en-US" dirty="0"/>
+          </a:p>
+        </p:txBody>
+      </p:sp>
+      <p:sp>
+        <p:nvSpPr>
+          <p:cNvPr id="4" name="Slide Number Placeholder 3"/>
+          <p:cNvSpPr>
+            <a:spLocks noGrp="1"/>
+          </p:cNvSpPr>
+          <p:nvPr>
+            <p:ph type="sldNum" sz="quarter" idx="10"/>
+          </p:nvPr>
+        </p:nvSpPr>
+        <p:spPr/>
+        <p:txBody>
+          <a:bodyPr/>
+          <a:lstStyle/>
+          <a:p>
+            <a:fld id="{F7021451-1387-4CA6-816F-3879F97B5CBC}" type="slidenum">
+              <a:rPr lang="en-US"/>
+              <a:t>11</a:t>
+            </a:fld>
+            <a:endParaRPr lang="en-US"/>
+          </a:p>
+        </p:txBody>
+      </p:sp>
+    </p:spTree>
+    <p:extLst>
+      <p:ext uri="{BB962C8B-B14F-4D97-AF65-F5344CB8AC3E}">
+        <p14:creationId xmlns:p14="http://schemas.microsoft.com/office/powerpoint/2010/main" val="1024086991"/>
+      </p:ext>
+    </p:extLst>
+  </p:cSld>
+  <p:clrMapOvr>
+    <a:masterClrMapping/>
+  </p:clrMapOvr>
+</p:notes>
+</file>
+
 <file path=ppt/notesSlides/notesSlide2.xml><?xml version="1.0" encoding="utf-8"?>
 <p:notes xmlns:a="http://schemas.openxmlformats.org/drawingml/2006/main" xmlns:r="http://schemas.openxmlformats.org/officeDocument/2006/relationships" xmlns:p="http://schemas.openxmlformats.org/presentationml/2006/main">
   <p:cSld>
@@ -1684,16 +1773,278 @@
         </p:nvSpPr>
         <p:spPr>
           <a:xfrm>
-            <a:off x="8046720" y="-1097280"/>
-            <a:ext cx="3657600" cy="3657600"/>
-          </a:xfrm>
-          <a:prstGeom prst="ellipse">
-            <a:avLst/>
-          </a:prstGeom>
-          <a:solidFill>
-            <a:srgbClr val="7C3AED">
-              <a:alpha val="12000"/>
+            <a:off x="502920" y="438912"/>
+            <a:ext cx="2286000" cy="256032"/>
+          </a:xfrm>
+          <a:prstGeom prst="roundRect">
+            <a:avLst>
+              <a:gd name="adj" fmla="val 14286"/>
+            </a:avLst>
+          </a:prstGeom>
+          <a:solidFill>
+            <a:srgbClr val="06B6D4">
+              <a:alpha val="28000"/>
             </a:srgbClr>
+          </a:solidFill>
+          <a:ln w="12700">
+            <a:solidFill>
+              <a:srgbClr val="06B6D4"/>
+            </a:solidFill>
+            <a:prstDash val="solid"/>
+          </a:ln>
+        </p:spPr>
+      </p:sp>
+      <p:sp>
+        <p:nvSpPr>
+          <p:cNvPr id="3" name="Text 1"/>
+          <p:cNvSpPr/>
+          <p:nvPr/>
+        </p:nvSpPr>
+        <p:spPr>
+          <a:xfrm>
+            <a:off x="502920" y="438912"/>
+            <a:ext cx="2286000" cy="256032"/>
+          </a:xfrm>
+          <a:prstGeom prst="rect">
+            <a:avLst/>
+          </a:prstGeom>
+          <a:noFill/>
+          <a:ln/>
+        </p:spPr>
+        <p:txBody>
+          <a:bodyPr wrap="square" lIns="0" tIns="0" rIns="0" bIns="0" rtlCol="0" anchor="ctr"/>
+          <a:lstStyle/>
+          <a:p>
+            <a:pPr algn="ctr" indent="0" marL="0">
+              <a:buNone/>
+            </a:pPr>
+            <a:r>
+              <a:rPr lang="en-US" sz="850" b="1" dirty="0">
+                <a:solidFill>
+                  <a:srgbClr val="06B6D4"/>
+                </a:solidFill>
+              </a:rPr>
+              <a:t>CS 153 FINAL PROJECT</a:t>
+            </a:r>
+            <a:endParaRPr lang="en-US" sz="850" dirty="0"/>
+          </a:p>
+        </p:txBody>
+      </p:sp>
+      <p:sp>
+        <p:nvSpPr>
+          <p:cNvPr id="4" name="Text 2"/>
+          <p:cNvSpPr/>
+          <p:nvPr/>
+        </p:nvSpPr>
+        <p:spPr>
+          <a:xfrm>
+            <a:off x="502920" y="804672"/>
+            <a:ext cx="5349240" cy="1389888"/>
+          </a:xfrm>
+          <a:prstGeom prst="rect">
+            <a:avLst/>
+          </a:prstGeom>
+          <a:noFill/>
+          <a:ln/>
+        </p:spPr>
+        <p:txBody>
+          <a:bodyPr wrap="square" rtlCol="0" anchor="t"/>
+          <a:lstStyle/>
+          <a:p>
+            <a:pPr indent="0" marL="0">
+              <a:buNone/>
+            </a:pPr>
+            <a:r>
+              <a:rPr lang="en-US" sz="3000" b="1" dirty="0">
+                <a:solidFill>
+                  <a:srgbClr val="FFFFFF"/>
+                </a:solidFill>
+                <a:latin typeface="Arial Black" pitchFamily="34" charset="0"/>
+                <a:ea typeface="Arial Black" pitchFamily="34" charset="-122"/>
+                <a:cs typeface="Arial Black" pitchFamily="34" charset="-120"/>
+              </a:rPr>
+              <a:t>Adaptive Cognitive-State
+</a:t>
+            </a:r>
+            <a:pPr indent="0" marL="0">
+              <a:buNone/>
+            </a:pPr>
+            <a:r>
+              <a:rPr lang="en-US" sz="3000" b="1" dirty="0">
+                <a:solidFill>
+                  <a:srgbClr val="7C3AED"/>
+                </a:solidFill>
+                <a:latin typeface="Arial Black" pitchFamily="34" charset="0"/>
+                <a:ea typeface="Arial Black" pitchFamily="34" charset="-122"/>
+                <a:cs typeface="Arial Black" pitchFamily="34" charset="-120"/>
+              </a:rPr>
+              <a:t>Pomodoro Study Buddy</a:t>
+            </a:r>
+            <a:endParaRPr lang="en-US" sz="3000" dirty="0"/>
+          </a:p>
+        </p:txBody>
+      </p:sp>
+      <p:sp>
+        <p:nvSpPr>
+          <p:cNvPr id="5" name="Text 3"/>
+          <p:cNvSpPr/>
+          <p:nvPr/>
+        </p:nvSpPr>
+        <p:spPr>
+          <a:xfrm>
+            <a:off x="502920" y="2286000"/>
+            <a:ext cx="5303520" cy="749808"/>
+          </a:xfrm>
+          <a:prstGeom prst="rect">
+            <a:avLst/>
+          </a:prstGeom>
+          <a:noFill/>
+          <a:ln/>
+        </p:spPr>
+        <p:txBody>
+          <a:bodyPr wrap="square" rtlCol="0" anchor="ctr"/>
+          <a:lstStyle/>
+          <a:p>
+            <a:pPr indent="0" marL="0">
+              <a:buNone/>
+            </a:pPr>
+            <a:r>
+              <a:rPr lang="en-US" sz="1300" dirty="0">
+                <a:solidFill>
+                  <a:srgbClr val="94A3B8"/>
+                </a:solidFill>
+                <a:latin typeface="Calibri" pitchFamily="34" charset="0"/>
+                <a:ea typeface="Calibri" pitchFamily="34" charset="-122"/>
+                <a:cs typeface="Calibri" pitchFamily="34" charset="-120"/>
+              </a:rPr>
+              <a:t>A real-time AI system that senses your cognitive state</a:t>
+            </a:r>
+            <a:endParaRPr lang="en-US" sz="1300" dirty="0"/>
+          </a:p>
+          <a:p>
+            <a:pPr indent="0" marL="0">
+              <a:buNone/>
+            </a:pPr>
+            <a:r>
+              <a:rPr lang="en-US" sz="1300" dirty="0">
+                <a:solidFill>
+                  <a:srgbClr val="94A3B8"/>
+                </a:solidFill>
+                <a:latin typeface="Calibri" pitchFamily="34" charset="0"/>
+                <a:ea typeface="Calibri" pitchFamily="34" charset="-122"/>
+                <a:cs typeface="Calibri" pitchFamily="34" charset="-120"/>
+              </a:rPr>
+              <a:t>and dynamically adapts your Pomodoro study sessions.</a:t>
+            </a:r>
+            <a:endParaRPr lang="en-US" sz="1300" dirty="0"/>
+          </a:p>
+        </p:txBody>
+      </p:sp>
+      <p:sp>
+        <p:nvSpPr>
+          <p:cNvPr id="6" name="Text 4"/>
+          <p:cNvSpPr/>
+          <p:nvPr/>
+        </p:nvSpPr>
+        <p:spPr>
+          <a:xfrm>
+            <a:off x="502920" y="4526280"/>
+            <a:ext cx="5303520" cy="347472"/>
+          </a:xfrm>
+          <a:prstGeom prst="rect">
+            <a:avLst/>
+          </a:prstGeom>
+          <a:noFill/>
+          <a:ln/>
+        </p:spPr>
+        <p:txBody>
+          <a:bodyPr wrap="square" rtlCol="0" anchor="ctr"/>
+          <a:lstStyle/>
+          <a:p>
+            <a:pPr indent="0" marL="0">
+              <a:buNone/>
+            </a:pPr>
+            <a:r>
+              <a:rPr lang="en-US" sz="1100" dirty="0">
+                <a:solidFill>
+                  <a:srgbClr val="94A3B8"/>
+                </a:solidFill>
+                <a:latin typeface="Calibri" pitchFamily="34" charset="0"/>
+                <a:ea typeface="Calibri" pitchFamily="34" charset="-122"/>
+                <a:cs typeface="Calibri" pitchFamily="34" charset="-120"/>
+              </a:rPr>
+              <a:t>Safaa Hussain  ·  CS 153  ·  Spring 2026</a:t>
+            </a:r>
+            <a:endParaRPr lang="en-US" sz="1100" dirty="0"/>
+          </a:p>
+        </p:txBody>
+      </p:sp>
+      <p:sp>
+        <p:nvSpPr>
+          <p:cNvPr id="7" name="Shape 5"/>
+          <p:cNvSpPr/>
+          <p:nvPr/>
+        </p:nvSpPr>
+        <p:spPr>
+          <a:xfrm>
+            <a:off x="5989320" y="365760"/>
+            <a:ext cx="22860" cy="4389120"/>
+          </a:xfrm>
+          <a:prstGeom prst="rect">
+            <a:avLst/>
+          </a:prstGeom>
+          <a:solidFill>
+            <a:srgbClr val="1E1E40"/>
+          </a:solidFill>
+          <a:ln w="12700">
+            <a:solidFill>
+              <a:srgbClr val="1E1E40"/>
+            </a:solidFill>
+            <a:prstDash val="solid"/>
+          </a:ln>
+        </p:spPr>
+      </p:sp>
+      <p:sp>
+        <p:nvSpPr>
+          <p:cNvPr id="8" name="Shape 6"/>
+          <p:cNvSpPr/>
+          <p:nvPr/>
+        </p:nvSpPr>
+        <p:spPr>
+          <a:xfrm>
+            <a:off x="6126480" y="384048"/>
+            <a:ext cx="2743200" cy="804672"/>
+          </a:xfrm>
+          <a:prstGeom prst="rect">
+            <a:avLst/>
+          </a:prstGeom>
+          <a:solidFill>
+            <a:srgbClr val="13132A"/>
+          </a:solidFill>
+          <a:ln w="12700">
+            <a:solidFill>
+              <a:srgbClr val="1E1E40"/>
+            </a:solidFill>
+            <a:prstDash val="solid"/>
+          </a:ln>
+        </p:spPr>
+      </p:sp>
+      <p:sp>
+        <p:nvSpPr>
+          <p:cNvPr id="9" name="Shape 7"/>
+          <p:cNvSpPr/>
+          <p:nvPr/>
+        </p:nvSpPr>
+        <p:spPr>
+          <a:xfrm>
+            <a:off x="6126480" y="384048"/>
+            <a:ext cx="2743200" cy="45720"/>
+          </a:xfrm>
+          <a:prstGeom prst="rect">
+            <a:avLst/>
+          </a:prstGeom>
+          <a:solidFill>
+            <a:srgbClr val="7C3AED"/>
           </a:solidFill>
           <a:ln w="12700">
             <a:solidFill>
@@ -1705,22 +2056,84 @@
       </p:sp>
       <p:sp>
         <p:nvSpPr>
-          <p:cNvPr id="3" name="Shape 1"/>
-          <p:cNvSpPr/>
-          <p:nvPr/>
-        </p:nvSpPr>
-        <p:spPr>
-          <a:xfrm>
-            <a:off x="-1371600" y="3474720"/>
-            <a:ext cx="2743200" cy="2743200"/>
-          </a:xfrm>
-          <a:prstGeom prst="ellipse">
-            <a:avLst/>
-          </a:prstGeom>
-          <a:solidFill>
-            <a:srgbClr val="06B6D4">
-              <a:alpha val="10000"/>
-            </a:srgbClr>
+          <p:cNvPr id="10" name="Text 8"/>
+          <p:cNvSpPr/>
+          <p:nvPr/>
+        </p:nvSpPr>
+        <p:spPr>
+          <a:xfrm>
+            <a:off x="6126480" y="475488"/>
+            <a:ext cx="2743200" cy="621792"/>
+          </a:xfrm>
+          <a:prstGeom prst="rect">
+            <a:avLst/>
+          </a:prstGeom>
+          <a:noFill/>
+          <a:ln/>
+        </p:spPr>
+        <p:txBody>
+          <a:bodyPr wrap="square" rtlCol="0" anchor="ctr"/>
+          <a:lstStyle/>
+          <a:p>
+            <a:pPr algn="ctr" indent="0" marL="0">
+              <a:buNone/>
+            </a:pPr>
+            <a:r>
+              <a:rPr lang="en-US" sz="1250" dirty="0">
+                <a:solidFill>
+                  <a:srgbClr val="E2E8F0"/>
+                </a:solidFill>
+                <a:latin typeface="Calibri" pitchFamily="34" charset="0"/>
+                <a:ea typeface="Calibri" pitchFamily="34" charset="-122"/>
+                <a:cs typeface="Calibri" pitchFamily="34" charset="-120"/>
+              </a:rPr>
+              <a:t>👁  Gaze Tracking</a:t>
+            </a:r>
+            <a:endParaRPr lang="en-US" sz="1250" dirty="0"/>
+          </a:p>
+        </p:txBody>
+      </p:sp>
+      <p:sp>
+        <p:nvSpPr>
+          <p:cNvPr id="11" name="Shape 9"/>
+          <p:cNvSpPr/>
+          <p:nvPr/>
+        </p:nvSpPr>
+        <p:spPr>
+          <a:xfrm>
+            <a:off x="6126480" y="1316736"/>
+            <a:ext cx="2743200" cy="804672"/>
+          </a:xfrm>
+          <a:prstGeom prst="rect">
+            <a:avLst/>
+          </a:prstGeom>
+          <a:solidFill>
+            <a:srgbClr val="13132A"/>
+          </a:solidFill>
+          <a:ln w="12700">
+            <a:solidFill>
+              <a:srgbClr val="1E1E40"/>
+            </a:solidFill>
+            <a:prstDash val="solid"/>
+          </a:ln>
+        </p:spPr>
+      </p:sp>
+      <p:sp>
+        <p:nvSpPr>
+          <p:cNvPr id="12" name="Shape 10"/>
+          <p:cNvSpPr/>
+          <p:nvPr/>
+        </p:nvSpPr>
+        <p:spPr>
+          <a:xfrm>
+            <a:off x="6126480" y="1316736"/>
+            <a:ext cx="2743200" cy="45720"/>
+          </a:xfrm>
+          <a:prstGeom prst="rect">
+            <a:avLst/>
+          </a:prstGeom>
+          <a:solidFill>
+            <a:srgbClr val="06B6D4"/>
           </a:solidFill>
           <a:ln w="12700">
             <a:solidFill>
@@ -1732,235 +2145,53 @@
       </p:sp>
       <p:sp>
         <p:nvSpPr>
-          <p:cNvPr id="4" name="Shape 2"/>
-          <p:cNvSpPr/>
-          <p:nvPr/>
-        </p:nvSpPr>
-        <p:spPr>
-          <a:xfrm>
-            <a:off x="548640" y="502920"/>
-            <a:ext cx="2377440" cy="274320"/>
-          </a:xfrm>
-          <a:prstGeom prst="roundRect">
-            <a:avLst>
-              <a:gd name="adj" fmla="val 16667"/>
-            </a:avLst>
-          </a:prstGeom>
-          <a:solidFill>
-            <a:srgbClr val="06B6D4">
-              <a:alpha val="30000"/>
-            </a:srgbClr>
-          </a:solidFill>
-          <a:ln w="12700">
-            <a:solidFill>
-              <a:srgbClr val="06B6D4"/>
-            </a:solidFill>
-            <a:prstDash val="solid"/>
-          </a:ln>
-        </p:spPr>
-      </p:sp>
-      <p:sp>
-        <p:nvSpPr>
-          <p:cNvPr id="5" name="Text 3"/>
-          <p:cNvSpPr/>
-          <p:nvPr/>
-        </p:nvSpPr>
-        <p:spPr>
-          <a:xfrm>
-            <a:off x="548640" y="502920"/>
-            <a:ext cx="2377440" cy="274320"/>
-          </a:xfrm>
-          <a:prstGeom prst="rect">
-            <a:avLst/>
-          </a:prstGeom>
-          <a:noFill/>
-          <a:ln/>
-        </p:spPr>
-        <p:txBody>
-          <a:bodyPr wrap="square" lIns="0" tIns="0" rIns="0" bIns="0" rtlCol="0" anchor="ctr"/>
+          <p:cNvPr id="13" name="Text 11"/>
+          <p:cNvSpPr/>
+          <p:nvPr/>
+        </p:nvSpPr>
+        <p:spPr>
+          <a:xfrm>
+            <a:off x="6126480" y="1408176"/>
+            <a:ext cx="2743200" cy="621792"/>
+          </a:xfrm>
+          <a:prstGeom prst="rect">
+            <a:avLst/>
+          </a:prstGeom>
+          <a:noFill/>
+          <a:ln/>
+        </p:spPr>
+        <p:txBody>
+          <a:bodyPr wrap="square" rtlCol="0" anchor="ctr"/>
           <a:lstStyle/>
           <a:p>
             <a:pPr algn="ctr" indent="0" marL="0">
               <a:buNone/>
             </a:pPr>
             <a:r>
-              <a:rPr lang="en-US" sz="900" b="1" dirty="0">
-                <a:solidFill>
-                  <a:srgbClr val="06B6D4"/>
-                </a:solidFill>
-              </a:rPr>
-              <a:t>CS 153 FINAL PROJECT</a:t>
-            </a:r>
-            <a:endParaRPr lang="en-US" sz="900" dirty="0"/>
-          </a:p>
-        </p:txBody>
-      </p:sp>
-      <p:sp>
-        <p:nvSpPr>
-          <p:cNvPr id="6" name="Text 4"/>
-          <p:cNvSpPr/>
-          <p:nvPr/>
-        </p:nvSpPr>
-        <p:spPr>
-          <a:xfrm>
-            <a:off x="548640" y="868680"/>
-            <a:ext cx="6126480" cy="822960"/>
-          </a:xfrm>
-          <a:prstGeom prst="rect">
-            <a:avLst/>
-          </a:prstGeom>
-          <a:noFill/>
-          <a:ln/>
-        </p:spPr>
-        <p:txBody>
-          <a:bodyPr wrap="square" rtlCol="0" anchor="ctr"/>
-          <a:lstStyle/>
-          <a:p>
-            <a:pPr indent="0" marL="0">
-              <a:buNone/>
-            </a:pPr>
-            <a:r>
-              <a:rPr lang="en-US" sz="4000" b="1" dirty="0">
-                <a:solidFill>
-                  <a:srgbClr val="FFFFFF"/>
-                </a:solidFill>
-                <a:latin typeface="Arial Black" pitchFamily="34" charset="0"/>
-                <a:ea typeface="Arial Black" pitchFamily="34" charset="-122"/>
-                <a:cs typeface="Arial Black" pitchFamily="34" charset="-120"/>
-              </a:rPr>
-              <a:t>Adaptive Cognitive-State</a:t>
-            </a:r>
-            <a:endParaRPr lang="en-US" sz="4000" dirty="0"/>
-          </a:p>
-        </p:txBody>
-      </p:sp>
-      <p:sp>
-        <p:nvSpPr>
-          <p:cNvPr id="7" name="Text 5"/>
-          <p:cNvSpPr/>
-          <p:nvPr/>
-        </p:nvSpPr>
-        <p:spPr>
-          <a:xfrm>
-            <a:off x="548640" y="1600200"/>
-            <a:ext cx="6126480" cy="822960"/>
-          </a:xfrm>
-          <a:prstGeom prst="rect">
-            <a:avLst/>
-          </a:prstGeom>
-          <a:noFill/>
-          <a:ln/>
-        </p:spPr>
-        <p:txBody>
-          <a:bodyPr wrap="square" rtlCol="0" anchor="ctr"/>
-          <a:lstStyle/>
-          <a:p>
-            <a:pPr indent="0" marL="0">
-              <a:buNone/>
-            </a:pPr>
-            <a:r>
-              <a:rPr lang="en-US" sz="4000" b="1" dirty="0">
-                <a:solidFill>
-                  <a:srgbClr val="7C3AED"/>
-                </a:solidFill>
-                <a:latin typeface="Arial Black" pitchFamily="34" charset="0"/>
-                <a:ea typeface="Arial Black" pitchFamily="34" charset="-122"/>
-                <a:cs typeface="Arial Black" pitchFamily="34" charset="-120"/>
-              </a:rPr>
-              <a:t>Pomodoro Study Buddy</a:t>
-            </a:r>
-            <a:endParaRPr lang="en-US" sz="4000" dirty="0"/>
-          </a:p>
-        </p:txBody>
-      </p:sp>
-      <p:sp>
-        <p:nvSpPr>
-          <p:cNvPr id="8" name="Text 6"/>
-          <p:cNvSpPr/>
-          <p:nvPr/>
-        </p:nvSpPr>
-        <p:spPr>
-          <a:xfrm>
-            <a:off x="548640" y="2514600"/>
-            <a:ext cx="5943600" cy="822960"/>
-          </a:xfrm>
-          <a:prstGeom prst="rect">
-            <a:avLst/>
-          </a:prstGeom>
-          <a:noFill/>
-          <a:ln/>
-        </p:spPr>
-        <p:txBody>
-          <a:bodyPr wrap="square" rtlCol="0" anchor="ctr"/>
-          <a:lstStyle/>
-          <a:p>
-            <a:pPr indent="0" marL="0">
-              <a:buNone/>
-            </a:pPr>
-            <a:r>
-              <a:rPr lang="en-US" sz="1400" dirty="0">
-                <a:solidFill>
-                  <a:srgbClr val="94A3B8"/>
-                </a:solidFill>
-                <a:latin typeface="Calibri" pitchFamily="34" charset="0"/>
-                <a:ea typeface="Calibri" pitchFamily="34" charset="-122"/>
-                <a:cs typeface="Calibri" pitchFamily="34" charset="-120"/>
-              </a:rPr>
-              <a:t>A real-time AI system that senses your cognitive state and adapts your study sessions — so you work smarter, not harder.</a:t>
-            </a:r>
-            <a:endParaRPr lang="en-US" sz="1400" dirty="0"/>
-          </a:p>
-        </p:txBody>
-      </p:sp>
-      <p:sp>
-        <p:nvSpPr>
-          <p:cNvPr id="9" name="Text 7"/>
-          <p:cNvSpPr/>
-          <p:nvPr/>
-        </p:nvSpPr>
-        <p:spPr>
-          <a:xfrm>
-            <a:off x="548640" y="4434840"/>
-            <a:ext cx="5943600" cy="365760"/>
-          </a:xfrm>
-          <a:prstGeom prst="rect">
-            <a:avLst/>
-          </a:prstGeom>
-          <a:noFill/>
-          <a:ln/>
-        </p:spPr>
-        <p:txBody>
-          <a:bodyPr wrap="square" rtlCol="0" anchor="ctr"/>
-          <a:lstStyle/>
-          <a:p>
-            <a:pPr indent="0" marL="0">
-              <a:buNone/>
-            </a:pPr>
-            <a:r>
-              <a:rPr lang="en-US" sz="1200" dirty="0">
-                <a:solidFill>
-                  <a:srgbClr val="94A3B8"/>
-                </a:solidFill>
-                <a:latin typeface="Calibri" pitchFamily="34" charset="0"/>
-                <a:ea typeface="Calibri" pitchFamily="34" charset="-122"/>
-                <a:cs typeface="Calibri" pitchFamily="34" charset="-120"/>
-              </a:rPr>
-              <a:t>Safaa Hussain  ·  CS 153  ·  Spring 2026</a:t>
-            </a:r>
-            <a:endParaRPr lang="en-US" sz="1200" dirty="0"/>
-          </a:p>
-        </p:txBody>
-      </p:sp>
-      <p:sp>
-        <p:nvSpPr>
-          <p:cNvPr id="10" name="Shape 8"/>
-          <p:cNvSpPr/>
-          <p:nvPr/>
-        </p:nvSpPr>
-        <p:spPr>
-          <a:xfrm>
-            <a:off x="6858000" y="914400"/>
-            <a:ext cx="1920240" cy="713232"/>
+              <a:rPr lang="en-US" sz="1250" dirty="0">
+                <a:solidFill>
+                  <a:srgbClr val="E2E8F0"/>
+                </a:solidFill>
+                <a:latin typeface="Calibri" pitchFamily="34" charset="0"/>
+                <a:ea typeface="Calibri" pitchFamily="34" charset="-122"/>
+                <a:cs typeface="Calibri" pitchFamily="34" charset="-120"/>
+              </a:rPr>
+              <a:t>🧍 Posture Detection</a:t>
+            </a:r>
+            <a:endParaRPr lang="en-US" sz="1250" dirty="0"/>
+          </a:p>
+        </p:txBody>
+      </p:sp>
+      <p:sp>
+        <p:nvSpPr>
+          <p:cNvPr id="14" name="Shape 12"/>
+          <p:cNvSpPr/>
+          <p:nvPr/>
+        </p:nvSpPr>
+        <p:spPr>
+          <a:xfrm>
+            <a:off x="6126480" y="2249424"/>
+            <a:ext cx="2743200" cy="804672"/>
           </a:xfrm>
           <a:prstGeom prst="rect">
             <a:avLst/>
@@ -1978,24 +2209,24 @@
       </p:sp>
       <p:sp>
         <p:nvSpPr>
-          <p:cNvPr id="11" name="Shape 9"/>
-          <p:cNvSpPr/>
-          <p:nvPr/>
-        </p:nvSpPr>
-        <p:spPr>
-          <a:xfrm>
-            <a:off x="6858000" y="914400"/>
-            <a:ext cx="1920240" cy="45720"/>
-          </a:xfrm>
-          <a:prstGeom prst="rect">
-            <a:avLst/>
-          </a:prstGeom>
-          <a:solidFill>
-            <a:srgbClr val="7C3AED"/>
+          <p:cNvPr id="15" name="Shape 13"/>
+          <p:cNvSpPr/>
+          <p:nvPr/>
+        </p:nvSpPr>
+        <p:spPr>
+          <a:xfrm>
+            <a:off x="6126480" y="2249424"/>
+            <a:ext cx="2743200" cy="45720"/>
+          </a:xfrm>
+          <a:prstGeom prst="rect">
+            <a:avLst/>
+          </a:prstGeom>
+          <a:solidFill>
+            <a:srgbClr val="10B981"/>
           </a:solidFill>
           <a:ln w="12700">
             <a:solidFill>
-              <a:srgbClr val="7C3AED"/>
+              <a:srgbClr val="10B981"/>
             </a:solidFill>
             <a:prstDash val="solid"/>
           </a:ln>
@@ -2003,14 +2234,14 @@
       </p:sp>
       <p:sp>
         <p:nvSpPr>
-          <p:cNvPr id="12" name="Text 10"/>
-          <p:cNvSpPr/>
-          <p:nvPr/>
-        </p:nvSpPr>
-        <p:spPr>
-          <a:xfrm>
-            <a:off x="6858000" y="987552"/>
-            <a:ext cx="1920240" cy="566928"/>
+          <p:cNvPr id="16" name="Text 14"/>
+          <p:cNvSpPr/>
+          <p:nvPr/>
+        </p:nvSpPr>
+        <p:spPr>
+          <a:xfrm>
+            <a:off x="6126480" y="2340864"/>
+            <a:ext cx="2743200" cy="621792"/>
           </a:xfrm>
           <a:prstGeom prst="rect">
             <a:avLst/>
@@ -2026,7 +2257,7 @@
               <a:buNone/>
             </a:pPr>
             <a:r>
-              <a:rPr lang="en-US" sz="1200" dirty="0">
+              <a:rPr lang="en-US" sz="1250" dirty="0">
                 <a:solidFill>
                   <a:srgbClr val="E2E8F0"/>
                 </a:solidFill>
@@ -2034,22 +2265,22 @@
                 <a:ea typeface="Calibri" pitchFamily="34" charset="-122"/>
                 <a:cs typeface="Calibri" pitchFamily="34" charset="-120"/>
               </a:rPr>
-              <a:t>👁  Gaze Tracking</a:t>
-            </a:r>
-            <a:endParaRPr lang="en-US" sz="1200" dirty="0"/>
-          </a:p>
-        </p:txBody>
-      </p:sp>
-      <p:sp>
-        <p:nvSpPr>
-          <p:cNvPr id="13" name="Shape 11"/>
-          <p:cNvSpPr/>
-          <p:nvPr/>
-        </p:nvSpPr>
-        <p:spPr>
-          <a:xfrm>
-            <a:off x="6858000" y="1783080"/>
-            <a:ext cx="1920240" cy="713232"/>
+              <a:t>🎤 Ambient Noise</a:t>
+            </a:r>
+            <a:endParaRPr lang="en-US" sz="1250" dirty="0"/>
+          </a:p>
+        </p:txBody>
+      </p:sp>
+      <p:sp>
+        <p:nvSpPr>
+          <p:cNvPr id="17" name="Shape 15"/>
+          <p:cNvSpPr/>
+          <p:nvPr/>
+        </p:nvSpPr>
+        <p:spPr>
+          <a:xfrm>
+            <a:off x="6126480" y="3182112"/>
+            <a:ext cx="2743200" cy="804672"/>
           </a:xfrm>
           <a:prstGeom prst="rect">
             <a:avLst/>
@@ -2067,24 +2298,24 @@
       </p:sp>
       <p:sp>
         <p:nvSpPr>
-          <p:cNvPr id="14" name="Shape 12"/>
-          <p:cNvSpPr/>
-          <p:nvPr/>
-        </p:nvSpPr>
-        <p:spPr>
-          <a:xfrm>
-            <a:off x="6858000" y="1783080"/>
-            <a:ext cx="1920240" cy="45720"/>
-          </a:xfrm>
-          <a:prstGeom prst="rect">
-            <a:avLst/>
-          </a:prstGeom>
-          <a:solidFill>
-            <a:srgbClr val="06B6D4"/>
+          <p:cNvPr id="18" name="Shape 16"/>
+          <p:cNvSpPr/>
+          <p:nvPr/>
+        </p:nvSpPr>
+        <p:spPr>
+          <a:xfrm>
+            <a:off x="6126480" y="3182112"/>
+            <a:ext cx="2743200" cy="45720"/>
+          </a:xfrm>
+          <a:prstGeom prst="rect">
+            <a:avLst/>
+          </a:prstGeom>
+          <a:solidFill>
+            <a:srgbClr val="F59E0B"/>
           </a:solidFill>
           <a:ln w="12700">
             <a:solidFill>
-              <a:srgbClr val="06B6D4"/>
+              <a:srgbClr val="F59E0B"/>
             </a:solidFill>
             <a:prstDash val="solid"/>
           </a:ln>
@@ -2092,14 +2323,14 @@
       </p:sp>
       <p:sp>
         <p:nvSpPr>
-          <p:cNvPr id="15" name="Text 13"/>
-          <p:cNvSpPr/>
-          <p:nvPr/>
-        </p:nvSpPr>
-        <p:spPr>
-          <a:xfrm>
-            <a:off x="6858000" y="1856232"/>
-            <a:ext cx="1920240" cy="566928"/>
+          <p:cNvPr id="19" name="Text 17"/>
+          <p:cNvSpPr/>
+          <p:nvPr/>
+        </p:nvSpPr>
+        <p:spPr>
+          <a:xfrm>
+            <a:off x="6126480" y="3273552"/>
+            <a:ext cx="2743200" cy="621792"/>
           </a:xfrm>
           <a:prstGeom prst="rect">
             <a:avLst/>
@@ -2115,7 +2346,7 @@
               <a:buNone/>
             </a:pPr>
             <a:r>
-              <a:rPr lang="en-US" sz="1200" dirty="0">
+              <a:rPr lang="en-US" sz="1250" dirty="0">
                 <a:solidFill>
                   <a:srgbClr val="E2E8F0"/>
                 </a:solidFill>
@@ -2123,22 +2354,22 @@
                 <a:ea typeface="Calibri" pitchFamily="34" charset="-122"/>
                 <a:cs typeface="Calibri" pitchFamily="34" charset="-120"/>
               </a:rPr>
-              <a:t>🧍 Posture Detection</a:t>
-            </a:r>
-            <a:endParaRPr lang="en-US" sz="1200" dirty="0"/>
-          </a:p>
-        </p:txBody>
-      </p:sp>
-      <p:sp>
-        <p:nvSpPr>
-          <p:cNvPr id="16" name="Shape 14"/>
-          <p:cNvSpPr/>
-          <p:nvPr/>
-        </p:nvSpPr>
-        <p:spPr>
-          <a:xfrm>
-            <a:off x="6858000" y="2651760"/>
-            <a:ext cx="1920240" cy="713232"/>
+              <a:t>📱 Phone Detection</a:t>
+            </a:r>
+            <a:endParaRPr lang="en-US" sz="1250" dirty="0"/>
+          </a:p>
+        </p:txBody>
+      </p:sp>
+      <p:sp>
+        <p:nvSpPr>
+          <p:cNvPr id="20" name="Shape 18"/>
+          <p:cNvSpPr/>
+          <p:nvPr/>
+        </p:nvSpPr>
+        <p:spPr>
+          <a:xfrm>
+            <a:off x="6126480" y="4114800"/>
+            <a:ext cx="2743200" cy="804672"/>
           </a:xfrm>
           <a:prstGeom prst="rect">
             <a:avLst/>
@@ -2156,24 +2387,24 @@
       </p:sp>
       <p:sp>
         <p:nvSpPr>
-          <p:cNvPr id="17" name="Shape 15"/>
-          <p:cNvSpPr/>
-          <p:nvPr/>
-        </p:nvSpPr>
-        <p:spPr>
-          <a:xfrm>
-            <a:off x="6858000" y="2651760"/>
-            <a:ext cx="1920240" cy="45720"/>
-          </a:xfrm>
-          <a:prstGeom prst="rect">
-            <a:avLst/>
-          </a:prstGeom>
-          <a:solidFill>
-            <a:srgbClr val="10B981"/>
+          <p:cNvPr id="21" name="Shape 19"/>
+          <p:cNvSpPr/>
+          <p:nvPr/>
+        </p:nvSpPr>
+        <p:spPr>
+          <a:xfrm>
+            <a:off x="6126480" y="4114800"/>
+            <a:ext cx="2743200" cy="45720"/>
+          </a:xfrm>
+          <a:prstGeom prst="rect">
+            <a:avLst/>
+          </a:prstGeom>
+          <a:solidFill>
+            <a:srgbClr val="EF4444"/>
           </a:solidFill>
           <a:ln w="12700">
             <a:solidFill>
-              <a:srgbClr val="10B981"/>
+              <a:srgbClr val="EF4444"/>
             </a:solidFill>
             <a:prstDash val="solid"/>
           </a:ln>
@@ -2181,14 +2412,14 @@
       </p:sp>
       <p:sp>
         <p:nvSpPr>
-          <p:cNvPr id="18" name="Text 16"/>
-          <p:cNvSpPr/>
-          <p:nvPr/>
-        </p:nvSpPr>
-        <p:spPr>
-          <a:xfrm>
-            <a:off x="6858000" y="2724912"/>
-            <a:ext cx="1920240" cy="566928"/>
+          <p:cNvPr id="22" name="Text 20"/>
+          <p:cNvSpPr/>
+          <p:nvPr/>
+        </p:nvSpPr>
+        <p:spPr>
+          <a:xfrm>
+            <a:off x="6126480" y="4206240"/>
+            <a:ext cx="2743200" cy="621792"/>
           </a:xfrm>
           <a:prstGeom prst="rect">
             <a:avLst/>
@@ -2204,7 +2435,7 @@
               <a:buNone/>
             </a:pPr>
             <a:r>
-              <a:rPr lang="en-US" sz="1200" dirty="0">
+              <a:rPr lang="en-US" sz="1250" dirty="0">
                 <a:solidFill>
                   <a:srgbClr val="E2E8F0"/>
                 </a:solidFill>
@@ -2212,98 +2443,9 @@
                 <a:ea typeface="Calibri" pitchFamily="34" charset="-122"/>
                 <a:cs typeface="Calibri" pitchFamily="34" charset="-120"/>
               </a:rPr>
-              <a:t>🎤 Ambient Noise</a:t>
-            </a:r>
-            <a:endParaRPr lang="en-US" sz="1200" dirty="0"/>
-          </a:p>
-        </p:txBody>
-      </p:sp>
-      <p:sp>
-        <p:nvSpPr>
-          <p:cNvPr id="19" name="Shape 17"/>
-          <p:cNvSpPr/>
-          <p:nvPr/>
-        </p:nvSpPr>
-        <p:spPr>
-          <a:xfrm>
-            <a:off x="6858000" y="3520440"/>
-            <a:ext cx="1920240" cy="713232"/>
-          </a:xfrm>
-          <a:prstGeom prst="rect">
-            <a:avLst/>
-          </a:prstGeom>
-          <a:solidFill>
-            <a:srgbClr val="13132A"/>
-          </a:solidFill>
-          <a:ln w="12700">
-            <a:solidFill>
-              <a:srgbClr val="1E1E40"/>
-            </a:solidFill>
-            <a:prstDash val="solid"/>
-          </a:ln>
-        </p:spPr>
-      </p:sp>
-      <p:sp>
-        <p:nvSpPr>
-          <p:cNvPr id="20" name="Shape 18"/>
-          <p:cNvSpPr/>
-          <p:nvPr/>
-        </p:nvSpPr>
-        <p:spPr>
-          <a:xfrm>
-            <a:off x="6858000" y="3520440"/>
-            <a:ext cx="1920240" cy="45720"/>
-          </a:xfrm>
-          <a:prstGeom prst="rect">
-            <a:avLst/>
-          </a:prstGeom>
-          <a:solidFill>
-            <a:srgbClr val="F59E0B"/>
-          </a:solidFill>
-          <a:ln w="12700">
-            <a:solidFill>
-              <a:srgbClr val="F59E0B"/>
-            </a:solidFill>
-            <a:prstDash val="solid"/>
-          </a:ln>
-        </p:spPr>
-      </p:sp>
-      <p:sp>
-        <p:nvSpPr>
-          <p:cNvPr id="21" name="Text 19"/>
-          <p:cNvSpPr/>
-          <p:nvPr/>
-        </p:nvSpPr>
-        <p:spPr>
-          <a:xfrm>
-            <a:off x="6858000" y="3593592"/>
-            <a:ext cx="1920240" cy="566928"/>
-          </a:xfrm>
-          <a:prstGeom prst="rect">
-            <a:avLst/>
-          </a:prstGeom>
-          <a:noFill/>
-          <a:ln/>
-        </p:spPr>
-        <p:txBody>
-          <a:bodyPr wrap="square" rtlCol="0" anchor="ctr"/>
-          <a:lstStyle/>
-          <a:p>
-            <a:pPr algn="ctr" indent="0" marL="0">
-              <a:buNone/>
-            </a:pPr>
-            <a:r>
-              <a:rPr lang="en-US" sz="1200" dirty="0">
-                <a:solidFill>
-                  <a:srgbClr val="E2E8F0"/>
-                </a:solidFill>
-                <a:latin typeface="Calibri" pitchFamily="34" charset="0"/>
-                <a:ea typeface="Calibri" pitchFamily="34" charset="-122"/>
-                <a:cs typeface="Calibri" pitchFamily="34" charset="-120"/>
-              </a:rPr>
               <a:t>✦  Gemini AI Coach</a:t>
             </a:r>
-            <a:endParaRPr lang="en-US" sz="1200" dirty="0"/>
+            <a:endParaRPr lang="en-US" sz="1250" dirty="0"/>
           </a:p>
         </p:txBody>
       </p:sp>
@@ -2341,21 +2483,99 @@
       </p:grpSpPr>
       <p:sp>
         <p:nvSpPr>
-          <p:cNvPr id="2" name="Shape 0"/>
-          <p:cNvSpPr/>
-          <p:nvPr/>
-        </p:nvSpPr>
-        <p:spPr>
-          <a:xfrm>
-            <a:off x="-3200400" y="-1371600"/>
-            <a:ext cx="4114800" cy="4114800"/>
-          </a:xfrm>
-          <a:prstGeom prst="ellipse">
+          <p:cNvPr id="2" name="Text 0"/>
+          <p:cNvSpPr/>
+          <p:nvPr/>
+        </p:nvSpPr>
+        <p:spPr>
+          <a:xfrm>
+            <a:off x="457200" y="228600"/>
+            <a:ext cx="8229600" cy="502920"/>
+          </a:xfrm>
+          <a:prstGeom prst="rect">
+            <a:avLst/>
+          </a:prstGeom>
+          <a:noFill/>
+          <a:ln/>
+        </p:spPr>
+        <p:txBody>
+          <a:bodyPr wrap="square" rtlCol="0" anchor="ctr"/>
+          <a:lstStyle/>
+          <a:p>
+            <a:pPr indent="0" marL="0">
+              <a:buNone/>
+            </a:pPr>
+            <a:r>
+              <a:rPr lang="en-US" sz="3200" b="1" dirty="0">
+                <a:solidFill>
+                  <a:srgbClr val="FFFFFF"/>
+                </a:solidFill>
+                <a:latin typeface="Arial Black" pitchFamily="34" charset="0"/>
+                <a:ea typeface="Arial Black" pitchFamily="34" charset="-122"/>
+                <a:cs typeface="Arial Black" pitchFamily="34" charset="-120"/>
+              </a:rPr>
+              <a:t>Future Work</a:t>
+            </a:r>
+            <a:endParaRPr lang="en-US" sz="3200" dirty="0"/>
+          </a:p>
+        </p:txBody>
+      </p:sp>
+      <p:sp>
+        <p:nvSpPr>
+          <p:cNvPr id="3" name="Text 1"/>
+          <p:cNvSpPr/>
+          <p:nvPr/>
+        </p:nvSpPr>
+        <p:spPr>
+          <a:xfrm>
+            <a:off x="457200" y="758952"/>
+            <a:ext cx="8229600" cy="347472"/>
+          </a:xfrm>
+          <a:prstGeom prst="rect">
+            <a:avLst/>
+          </a:prstGeom>
+          <a:noFill/>
+          <a:ln/>
+        </p:spPr>
+        <p:txBody>
+          <a:bodyPr wrap="square" rtlCol="0" anchor="ctr"/>
+          <a:lstStyle/>
+          <a:p>
+            <a:pPr indent="0" marL="0">
+              <a:buNone/>
+            </a:pPr>
+            <a:r>
+              <a:rPr lang="en-US" sz="1300" dirty="0">
+                <a:solidFill>
+                  <a:srgbClr val="94A3B8"/>
+                </a:solidFill>
+                <a:latin typeface="Calibri" pitchFamily="34" charset="0"/>
+                <a:ea typeface="Calibri" pitchFamily="34" charset="-122"/>
+                <a:cs typeface="Calibri" pitchFamily="34" charset="-120"/>
+              </a:rPr>
+              <a:t>The foundation is built. Here is what comes next.</a:t>
+            </a:r>
+            <a:endParaRPr lang="en-US" sz="1300" dirty="0"/>
+          </a:p>
+        </p:txBody>
+      </p:sp>
+      <p:sp>
+        <p:nvSpPr>
+          <p:cNvPr id="4" name="Shape 2"/>
+          <p:cNvSpPr/>
+          <p:nvPr/>
+        </p:nvSpPr>
+        <p:spPr>
+          <a:xfrm>
+            <a:off x="457200" y="1234440"/>
+            <a:ext cx="457200" cy="530352"/>
+          </a:xfrm>
+          <a:prstGeom prst="rect">
             <a:avLst/>
           </a:prstGeom>
           <a:solidFill>
             <a:srgbClr val="7C3AED">
-              <a:alpha val="10000"/>
+              <a:alpha val="80000"/>
             </a:srgbClr>
           </a:solidFill>
           <a:ln w="12700">
@@ -2368,21 +2588,138 @@
       </p:sp>
       <p:sp>
         <p:nvSpPr>
-          <p:cNvPr id="3" name="Shape 1"/>
-          <p:cNvSpPr/>
-          <p:nvPr/>
-        </p:nvSpPr>
-        <p:spPr>
-          <a:xfrm>
-            <a:off x="8686800" y="4114800"/>
-            <a:ext cx="3657600" cy="3657600"/>
-          </a:xfrm>
-          <a:prstGeom prst="ellipse">
+          <p:cNvPr id="5" name="Text 3"/>
+          <p:cNvSpPr/>
+          <p:nvPr/>
+        </p:nvSpPr>
+        <p:spPr>
+          <a:xfrm>
+            <a:off x="457200" y="1252728"/>
+            <a:ext cx="457200" cy="502920"/>
+          </a:xfrm>
+          <a:prstGeom prst="rect">
+            <a:avLst/>
+          </a:prstGeom>
+          <a:noFill/>
+          <a:ln/>
+        </p:spPr>
+        <p:txBody>
+          <a:bodyPr wrap="square" rtlCol="0" anchor="ctr"/>
+          <a:lstStyle/>
+          <a:p>
+            <a:pPr algn="ctr" indent="0" marL="0">
+              <a:buNone/>
+            </a:pPr>
+            <a:r>
+              <a:rPr lang="en-US" sz="1200" b="1" dirty="0">
+                <a:solidFill>
+                  <a:srgbClr val="7C3AED"/>
+                </a:solidFill>
+                <a:latin typeface="Arial Black" pitchFamily="34" charset="0"/>
+                <a:ea typeface="Arial Black" pitchFamily="34" charset="-122"/>
+                <a:cs typeface="Arial Black" pitchFamily="34" charset="-120"/>
+              </a:rPr>
+              <a:t>01</a:t>
+            </a:r>
+            <a:endParaRPr lang="en-US" sz="1200" dirty="0"/>
+          </a:p>
+        </p:txBody>
+      </p:sp>
+      <p:sp>
+        <p:nvSpPr>
+          <p:cNvPr id="6" name="Text 4"/>
+          <p:cNvSpPr/>
+          <p:nvPr/>
+        </p:nvSpPr>
+        <p:spPr>
+          <a:xfrm>
+            <a:off x="1051560" y="1252728"/>
+            <a:ext cx="7635240" cy="246888"/>
+          </a:xfrm>
+          <a:prstGeom prst="rect">
+            <a:avLst/>
+          </a:prstGeom>
+          <a:noFill/>
+          <a:ln/>
+        </p:spPr>
+        <p:txBody>
+          <a:bodyPr wrap="square" lIns="0" tIns="0" rIns="0" bIns="0" rtlCol="0" anchor="ctr"/>
+          <a:lstStyle/>
+          <a:p>
+            <a:pPr indent="0" marL="0">
+              <a:buNone/>
+            </a:pPr>
+            <a:r>
+              <a:rPr lang="en-US" sz="1250" b="1" dirty="0">
+                <a:solidFill>
+                  <a:srgbClr val="E2E8F0"/>
+                </a:solidFill>
+                <a:latin typeface="Calibri" pitchFamily="34" charset="0"/>
+                <a:ea typeface="Calibri" pitchFamily="34" charset="-122"/>
+                <a:cs typeface="Calibri" pitchFamily="34" charset="-120"/>
+              </a:rPr>
+              <a:t>RL-Based Adaptive Policy</a:t>
+            </a:r>
+            <a:endParaRPr lang="en-US" sz="1250" dirty="0"/>
+          </a:p>
+        </p:txBody>
+      </p:sp>
+      <p:sp>
+        <p:nvSpPr>
+          <p:cNvPr id="7" name="Text 5"/>
+          <p:cNvSpPr/>
+          <p:nvPr/>
+        </p:nvSpPr>
+        <p:spPr>
+          <a:xfrm>
+            <a:off x="1051560" y="1508760"/>
+            <a:ext cx="7635240" cy="329184"/>
+          </a:xfrm>
+          <a:prstGeom prst="rect">
+            <a:avLst/>
+          </a:prstGeom>
+          <a:noFill/>
+          <a:ln/>
+        </p:spPr>
+        <p:txBody>
+          <a:bodyPr wrap="square" lIns="0" tIns="0" rIns="0" bIns="0" rtlCol="0" anchor="ctr"/>
+          <a:lstStyle/>
+          <a:p>
+            <a:pPr indent="0" marL="0">
+              <a:buNone/>
+            </a:pPr>
+            <a:r>
+              <a:rPr lang="en-US" sz="1000" dirty="0">
+                <a:solidFill>
+                  <a:srgbClr val="94A3B8"/>
+                </a:solidFill>
+                <a:latin typeface="Calibri" pitchFamily="34" charset="0"/>
+                <a:ea typeface="Calibri" pitchFamily="34" charset="-122"/>
+                <a:cs typeface="Calibri" pitchFamily="34" charset="-120"/>
+              </a:rPr>
+              <a:t>Replace rule-based logic with Q-learning. State: (focus, blink, noise, hour). Reward: sustained focus improvement across intervals.</a:t>
+            </a:r>
+            <a:endParaRPr lang="en-US" sz="1000" dirty="0"/>
+          </a:p>
+        </p:txBody>
+      </p:sp>
+      <p:sp>
+        <p:nvSpPr>
+          <p:cNvPr id="8" name="Shape 6"/>
+          <p:cNvSpPr/>
+          <p:nvPr/>
+        </p:nvSpPr>
+        <p:spPr>
+          <a:xfrm>
+            <a:off x="457200" y="1929384"/>
+            <a:ext cx="457200" cy="530352"/>
+          </a:xfrm>
+          <a:prstGeom prst="rect">
             <a:avLst/>
           </a:prstGeom>
           <a:solidFill>
             <a:srgbClr val="06B6D4">
-              <a:alpha val="10000"/>
+              <a:alpha val="80000"/>
             </a:srgbClr>
           </a:solidFill>
           <a:ln w="12700">
@@ -2395,14 +2732,14 @@
       </p:sp>
       <p:sp>
         <p:nvSpPr>
-          <p:cNvPr id="4" name="Text 2"/>
-          <p:cNvSpPr/>
-          <p:nvPr/>
-        </p:nvSpPr>
-        <p:spPr>
-          <a:xfrm>
-            <a:off x="914400" y="685800"/>
-            <a:ext cx="7772400" cy="777240"/>
+          <p:cNvPr id="9" name="Text 7"/>
+          <p:cNvSpPr/>
+          <p:nvPr/>
+        </p:nvSpPr>
+        <p:spPr>
+          <a:xfrm>
+            <a:off x="457200" y="1947672"/>
+            <a:ext cx="457200" cy="502920"/>
           </a:xfrm>
           <a:prstGeom prst="rect">
             <a:avLst/>
@@ -2418,30 +2755,135 @@
               <a:buNone/>
             </a:pPr>
             <a:r>
-              <a:rPr lang="en-US" sz="5000" b="1" dirty="0">
-                <a:solidFill>
-                  <a:srgbClr val="FFFFFF"/>
+              <a:rPr lang="en-US" sz="1200" b="1" dirty="0">
+                <a:solidFill>
+                  <a:srgbClr val="06B6D4"/>
                 </a:solidFill>
                 <a:latin typeface="Arial Black" pitchFamily="34" charset="0"/>
                 <a:ea typeface="Arial Black" pitchFamily="34" charset="-122"/>
                 <a:cs typeface="Arial Black" pitchFamily="34" charset="-120"/>
               </a:rPr>
-              <a:t>One Person.</a:t>
-            </a:r>
-            <a:endParaRPr lang="en-US" sz="5000" dirty="0"/>
-          </a:p>
-        </p:txBody>
-      </p:sp>
-      <p:sp>
-        <p:nvSpPr>
-          <p:cNvPr id="5" name="Text 3"/>
-          <p:cNvSpPr/>
-          <p:nvPr/>
-        </p:nvSpPr>
-        <p:spPr>
-          <a:xfrm>
-            <a:off x="914400" y="1417320"/>
-            <a:ext cx="7772400" cy="777240"/>
+              <a:t>02</a:t>
+            </a:r>
+            <a:endParaRPr lang="en-US" sz="1200" dirty="0"/>
+          </a:p>
+        </p:txBody>
+      </p:sp>
+      <p:sp>
+        <p:nvSpPr>
+          <p:cNvPr id="10" name="Text 8"/>
+          <p:cNvSpPr/>
+          <p:nvPr/>
+        </p:nvSpPr>
+        <p:spPr>
+          <a:xfrm>
+            <a:off x="1051560" y="1947672"/>
+            <a:ext cx="7635240" cy="246888"/>
+          </a:xfrm>
+          <a:prstGeom prst="rect">
+            <a:avLst/>
+          </a:prstGeom>
+          <a:noFill/>
+          <a:ln/>
+        </p:spPr>
+        <p:txBody>
+          <a:bodyPr wrap="square" lIns="0" tIns="0" rIns="0" bIns="0" rtlCol="0" anchor="ctr"/>
+          <a:lstStyle/>
+          <a:p>
+            <a:pPr indent="0" marL="0">
+              <a:buNone/>
+            </a:pPr>
+            <a:r>
+              <a:rPr lang="en-US" sz="1250" b="1" dirty="0">
+                <a:solidFill>
+                  <a:srgbClr val="E2E8F0"/>
+                </a:solidFill>
+                <a:latin typeface="Calibri" pitchFamily="34" charset="0"/>
+                <a:ea typeface="Calibri" pitchFamily="34" charset="-122"/>
+                <a:cs typeface="Calibri" pitchFamily="34" charset="-120"/>
+              </a:rPr>
+              <a:t>Ambient Noise Classification</a:t>
+            </a:r>
+            <a:endParaRPr lang="en-US" sz="1250" dirty="0"/>
+          </a:p>
+        </p:txBody>
+      </p:sp>
+      <p:sp>
+        <p:nvSpPr>
+          <p:cNvPr id="11" name="Text 9"/>
+          <p:cNvSpPr/>
+          <p:nvPr/>
+        </p:nvSpPr>
+        <p:spPr>
+          <a:xfrm>
+            <a:off x="1051560" y="2203704"/>
+            <a:ext cx="7635240" cy="329184"/>
+          </a:xfrm>
+          <a:prstGeom prst="rect">
+            <a:avLst/>
+          </a:prstGeom>
+          <a:noFill/>
+          <a:ln/>
+        </p:spPr>
+        <p:txBody>
+          <a:bodyPr wrap="square" lIns="0" tIns="0" rIns="0" bIns="0" rtlCol="0" anchor="ctr"/>
+          <a:lstStyle/>
+          <a:p>
+            <a:pPr indent="0" marL="0">
+              <a:buNone/>
+            </a:pPr>
+            <a:r>
+              <a:rPr lang="en-US" sz="1000" dirty="0">
+                <a:solidFill>
+                  <a:srgbClr val="94A3B8"/>
+                </a:solidFill>
+                <a:latin typeface="Calibri" pitchFamily="34" charset="0"/>
+                <a:ea typeface="Calibri" pitchFamily="34" charset="-122"/>
+                <a:cs typeface="Calibri" pitchFamily="34" charset="-120"/>
+              </a:rPr>
+              <a:t>Distinguish speech vs. music vs. background hum with a lightweight audio CNN — smarter than raw dB alone.</a:t>
+            </a:r>
+            <a:endParaRPr lang="en-US" sz="1000" dirty="0"/>
+          </a:p>
+        </p:txBody>
+      </p:sp>
+      <p:sp>
+        <p:nvSpPr>
+          <p:cNvPr id="12" name="Shape 10"/>
+          <p:cNvSpPr/>
+          <p:nvPr/>
+        </p:nvSpPr>
+        <p:spPr>
+          <a:xfrm>
+            <a:off x="457200" y="2624328"/>
+            <a:ext cx="457200" cy="530352"/>
+          </a:xfrm>
+          <a:prstGeom prst="rect">
+            <a:avLst/>
+          </a:prstGeom>
+          <a:solidFill>
+            <a:srgbClr val="10B981">
+              <a:alpha val="80000"/>
+            </a:srgbClr>
+          </a:solidFill>
+          <a:ln w="12700">
+            <a:solidFill>
+              <a:srgbClr val="10B981"/>
+            </a:solidFill>
+            <a:prstDash val="solid"/>
+          </a:ln>
+        </p:spPr>
+      </p:sp>
+      <p:sp>
+        <p:nvSpPr>
+          <p:cNvPr id="13" name="Text 11"/>
+          <p:cNvSpPr/>
+          <p:nvPr/>
+        </p:nvSpPr>
+        <p:spPr>
+          <a:xfrm>
+            <a:off x="457200" y="2642616"/>
+            <a:ext cx="457200" cy="502920"/>
           </a:xfrm>
           <a:prstGeom prst="rect">
             <a:avLst/>
@@ -2457,46 +2899,85 @@
               <a:buNone/>
             </a:pPr>
             <a:r>
-              <a:rPr lang="en-US" sz="3200" b="1" dirty="0">
-                <a:solidFill>
-                  <a:srgbClr val="7C3AED"/>
+              <a:rPr lang="en-US" sz="1200" b="1" dirty="0">
+                <a:solidFill>
+                  <a:srgbClr val="10B981"/>
                 </a:solidFill>
                 <a:latin typeface="Arial Black" pitchFamily="34" charset="0"/>
                 <a:ea typeface="Arial Black" pitchFamily="34" charset="-122"/>
                 <a:cs typeface="Arial Black" pitchFamily="34" charset="-120"/>
               </a:rPr>
-              <a:t>Full-Stack AI Productivity Research.</a:t>
-            </a:r>
-            <a:endParaRPr lang="en-US" sz="3200" dirty="0"/>
-          </a:p>
-        </p:txBody>
-      </p:sp>
-      <p:sp>
-        <p:nvSpPr>
-          <p:cNvPr id="6" name="Text 4"/>
-          <p:cNvSpPr/>
-          <p:nvPr/>
-        </p:nvSpPr>
-        <p:spPr>
-          <a:xfrm>
-            <a:off x="914400" y="2377440"/>
-            <a:ext cx="7772400" cy="411480"/>
-          </a:xfrm>
-          <a:prstGeom prst="rect">
-            <a:avLst/>
-          </a:prstGeom>
-          <a:noFill/>
-          <a:ln/>
-        </p:spPr>
-        <p:txBody>
-          <a:bodyPr wrap="square" rtlCol="0" anchor="ctr"/>
-          <a:lstStyle/>
-          <a:p>
-            <a:pPr algn="ctr" indent="0" marL="0">
-              <a:buNone/>
-            </a:pPr>
-            <a:r>
-              <a:rPr lang="en-US" sz="1400" dirty="0">
+              <a:t>03</a:t>
+            </a:r>
+            <a:endParaRPr lang="en-US" sz="1200" dirty="0"/>
+          </a:p>
+        </p:txBody>
+      </p:sp>
+      <p:sp>
+        <p:nvSpPr>
+          <p:cNvPr id="14" name="Text 12"/>
+          <p:cNvSpPr/>
+          <p:nvPr/>
+        </p:nvSpPr>
+        <p:spPr>
+          <a:xfrm>
+            <a:off x="1051560" y="2642616"/>
+            <a:ext cx="7635240" cy="246888"/>
+          </a:xfrm>
+          <a:prstGeom prst="rect">
+            <a:avLst/>
+          </a:prstGeom>
+          <a:noFill/>
+          <a:ln/>
+        </p:spPr>
+        <p:txBody>
+          <a:bodyPr wrap="square" lIns="0" tIns="0" rIns="0" bIns="0" rtlCol="0" anchor="ctr"/>
+          <a:lstStyle/>
+          <a:p>
+            <a:pPr indent="0" marL="0">
+              <a:buNone/>
+            </a:pPr>
+            <a:r>
+              <a:rPr lang="en-US" sz="1250" b="1" dirty="0">
+                <a:solidFill>
+                  <a:srgbClr val="E2E8F0"/>
+                </a:solidFill>
+                <a:latin typeface="Calibri" pitchFamily="34" charset="0"/>
+                <a:ea typeface="Calibri" pitchFamily="34" charset="-122"/>
+                <a:cs typeface="Calibri" pitchFamily="34" charset="-120"/>
+              </a:rPr>
+              <a:t>Baseline A/B Comparison</a:t>
+            </a:r>
+            <a:endParaRPr lang="en-US" sz="1250" dirty="0"/>
+          </a:p>
+        </p:txBody>
+      </p:sp>
+      <p:sp>
+        <p:nvSpPr>
+          <p:cNvPr id="15" name="Text 13"/>
+          <p:cNvSpPr/>
+          <p:nvPr/>
+        </p:nvSpPr>
+        <p:spPr>
+          <a:xfrm>
+            <a:off x="1051560" y="2898648"/>
+            <a:ext cx="7635240" cy="329184"/>
+          </a:xfrm>
+          <a:prstGeom prst="rect">
+            <a:avLst/>
+          </a:prstGeom>
+          <a:noFill/>
+          <a:ln/>
+        </p:spPr>
+        <p:txBody>
+          <a:bodyPr wrap="square" lIns="0" tIns="0" rIns="0" bIns="0" rtlCol="0" anchor="ctr"/>
+          <a:lstStyle/>
+          <a:p>
+            <a:pPr indent="0" marL="0">
+              <a:buNone/>
+            </a:pPr>
+            <a:r>
+              <a:rPr lang="en-US" sz="1000" dirty="0">
                 <a:solidFill>
                   <a:srgbClr val="94A3B8"/>
                 </a:solidFill>
@@ -2504,36 +2985,34 @@
                 <a:ea typeface="Calibri" pitchFamily="34" charset="-122"/>
                 <a:cs typeface="Calibri" pitchFamily="34" charset="-120"/>
               </a:rPr>
-              <a:t>5 sensors  ·  real-time adaptive timer  ·  Gemini AI coach  ·  long-term analytics dashboard</a:t>
-            </a:r>
-            <a:endParaRPr lang="en-US" sz="1400" dirty="0"/>
-          </a:p>
-        </p:txBody>
-      </p:sp>
-      <p:sp>
-        <p:nvSpPr>
-          <p:cNvPr id="7" name="Shape 5"/>
-          <p:cNvSpPr/>
-          <p:nvPr/>
-        </p:nvSpPr>
-        <p:spPr>
-          <a:xfrm>
-            <a:off x="475488" y="3063240"/>
-            <a:ext cx="1271016" cy="274320"/>
-          </a:xfrm>
-          <a:prstGeom prst="roundRect">
-            <a:avLst>
-              <a:gd name="adj" fmla="val 16667"/>
-            </a:avLst>
-          </a:prstGeom>
-          <a:solidFill>
-            <a:srgbClr val="06B6D4">
-              <a:alpha val="30000"/>
+              <a:t>Fixed 25/5 mode vs. adaptive mode, same user, same conditions. Dashboard shows which produces higher focus statistically.</a:t>
+            </a:r>
+            <a:endParaRPr lang="en-US" sz="1000" dirty="0"/>
+          </a:p>
+        </p:txBody>
+      </p:sp>
+      <p:sp>
+        <p:nvSpPr>
+          <p:cNvPr id="16" name="Shape 14"/>
+          <p:cNvSpPr/>
+          <p:nvPr/>
+        </p:nvSpPr>
+        <p:spPr>
+          <a:xfrm>
+            <a:off x="457200" y="3319272"/>
+            <a:ext cx="457200" cy="530352"/>
+          </a:xfrm>
+          <a:prstGeom prst="rect">
+            <a:avLst/>
+          </a:prstGeom>
+          <a:solidFill>
+            <a:srgbClr val="F59E0B">
+              <a:alpha val="80000"/>
             </a:srgbClr>
           </a:solidFill>
           <a:ln w="12700">
             <a:solidFill>
-              <a:srgbClr val="06B6D4"/>
+              <a:srgbClr val="F59E0B"/>
             </a:solidFill>
             <a:prstDash val="solid"/>
           </a:ln>
@@ -2541,14 +3020,53 @@
       </p:sp>
       <p:sp>
         <p:nvSpPr>
-          <p:cNvPr id="8" name="Text 6"/>
-          <p:cNvSpPr/>
-          <p:nvPr/>
-        </p:nvSpPr>
-        <p:spPr>
-          <a:xfrm>
-            <a:off x="475488" y="3063240"/>
-            <a:ext cx="1271016" cy="274320"/>
+          <p:cNvPr id="17" name="Text 15"/>
+          <p:cNvSpPr/>
+          <p:nvPr/>
+        </p:nvSpPr>
+        <p:spPr>
+          <a:xfrm>
+            <a:off x="457200" y="3337560"/>
+            <a:ext cx="457200" cy="502920"/>
+          </a:xfrm>
+          <a:prstGeom prst="rect">
+            <a:avLst/>
+          </a:prstGeom>
+          <a:noFill/>
+          <a:ln/>
+        </p:spPr>
+        <p:txBody>
+          <a:bodyPr wrap="square" rtlCol="0" anchor="ctr"/>
+          <a:lstStyle/>
+          <a:p>
+            <a:pPr algn="ctr" indent="0" marL="0">
+              <a:buNone/>
+            </a:pPr>
+            <a:r>
+              <a:rPr lang="en-US" sz="1200" b="1" dirty="0">
+                <a:solidFill>
+                  <a:srgbClr val="F59E0B"/>
+                </a:solidFill>
+                <a:latin typeface="Arial Black" pitchFamily="34" charset="0"/>
+                <a:ea typeface="Arial Black" pitchFamily="34" charset="-122"/>
+                <a:cs typeface="Arial Black" pitchFamily="34" charset="-120"/>
+              </a:rPr>
+              <a:t>04</a:t>
+            </a:r>
+            <a:endParaRPr lang="en-US" sz="1200" dirty="0"/>
+          </a:p>
+        </p:txBody>
+      </p:sp>
+      <p:sp>
+        <p:nvSpPr>
+          <p:cNvPr id="18" name="Text 16"/>
+          <p:cNvSpPr/>
+          <p:nvPr/>
+        </p:nvSpPr>
+        <p:spPr>
+          <a:xfrm>
+            <a:off x="1051560" y="3337560"/>
+            <a:ext cx="7635240" cy="246888"/>
           </a:xfrm>
           <a:prstGeom prst="rect">
             <a:avLst/>
@@ -2560,45 +3078,85 @@
           <a:bodyPr wrap="square" lIns="0" tIns="0" rIns="0" bIns="0" rtlCol="0" anchor="ctr"/>
           <a:lstStyle/>
           <a:p>
-            <a:pPr algn="ctr" indent="0" marL="0">
-              <a:buNone/>
-            </a:pPr>
-            <a:r>
-              <a:rPr lang="en-US" sz="900" b="1" dirty="0">
-                <a:solidFill>
-                  <a:srgbClr val="06B6D4"/>
-                </a:solidFill>
-              </a:rPr>
-              <a:t>MediaPipe</a:t>
-            </a:r>
-            <a:endParaRPr lang="en-US" sz="900" dirty="0"/>
-          </a:p>
-        </p:txBody>
-      </p:sp>
-      <p:sp>
-        <p:nvSpPr>
-          <p:cNvPr id="9" name="Shape 7"/>
-          <p:cNvSpPr/>
-          <p:nvPr/>
-        </p:nvSpPr>
-        <p:spPr>
-          <a:xfrm>
-            <a:off x="1645920" y="3063240"/>
-            <a:ext cx="969264" cy="274320"/>
-          </a:xfrm>
-          <a:prstGeom prst="roundRect">
-            <a:avLst>
-              <a:gd name="adj" fmla="val 16667"/>
-            </a:avLst>
-          </a:prstGeom>
-          <a:solidFill>
-            <a:srgbClr val="06B6D4">
-              <a:alpha val="30000"/>
+            <a:pPr indent="0" marL="0">
+              <a:buNone/>
+            </a:pPr>
+            <a:r>
+              <a:rPr lang="en-US" sz="1250" b="1" dirty="0">
+                <a:solidFill>
+                  <a:srgbClr val="E2E8F0"/>
+                </a:solidFill>
+                <a:latin typeface="Calibri" pitchFamily="34" charset="0"/>
+                <a:ea typeface="Calibri" pitchFamily="34" charset="-122"/>
+                <a:cs typeface="Calibri" pitchFamily="34" charset="-120"/>
+              </a:rPr>
+              <a:t>Pre-Session Goal + Post-Review</a:t>
+            </a:r>
+            <a:endParaRPr lang="en-US" sz="1250" dirty="0"/>
+          </a:p>
+        </p:txBody>
+      </p:sp>
+      <p:sp>
+        <p:nvSpPr>
+          <p:cNvPr id="19" name="Text 17"/>
+          <p:cNvSpPr/>
+          <p:nvPr/>
+        </p:nvSpPr>
+        <p:spPr>
+          <a:xfrm>
+            <a:off x="1051560" y="3593592"/>
+            <a:ext cx="7635240" cy="329184"/>
+          </a:xfrm>
+          <a:prstGeom prst="rect">
+            <a:avLst/>
+          </a:prstGeom>
+          <a:noFill/>
+          <a:ln/>
+        </p:spPr>
+        <p:txBody>
+          <a:bodyPr wrap="square" lIns="0" tIns="0" rIns="0" bIns="0" rtlCol="0" anchor="ctr"/>
+          <a:lstStyle/>
+          <a:p>
+            <a:pPr indent="0" marL="0">
+              <a:buNone/>
+            </a:pPr>
+            <a:r>
+              <a:rPr lang="en-US" sz="1000" dirty="0">
+                <a:solidFill>
+                  <a:srgbClr val="94A3B8"/>
+                </a:solidFill>
+                <a:latin typeface="Calibri" pitchFamily="34" charset="0"/>
+                <a:ea typeface="Calibri" pitchFamily="34" charset="-122"/>
+                <a:cs typeface="Calibri" pitchFamily="34" charset="-120"/>
+              </a:rPr>
+              <a:t>"What do you want to finish?" stored at start. LLM checks completion at end. Builds accountability loop.</a:t>
+            </a:r>
+            <a:endParaRPr lang="en-US" sz="1000" dirty="0"/>
+          </a:p>
+        </p:txBody>
+      </p:sp>
+      <p:sp>
+        <p:nvSpPr>
+          <p:cNvPr id="20" name="Shape 18"/>
+          <p:cNvSpPr/>
+          <p:nvPr/>
+        </p:nvSpPr>
+        <p:spPr>
+          <a:xfrm>
+            <a:off x="457200" y="4014216"/>
+            <a:ext cx="457200" cy="530352"/>
+          </a:xfrm>
+          <a:prstGeom prst="rect">
+            <a:avLst/>
+          </a:prstGeom>
+          <a:solidFill>
+            <a:srgbClr val="EF4444">
+              <a:alpha val="80000"/>
             </a:srgbClr>
           </a:solidFill>
           <a:ln w="12700">
             <a:solidFill>
-              <a:srgbClr val="06B6D4"/>
+              <a:srgbClr val="EF4444"/>
             </a:solidFill>
             <a:prstDash val="solid"/>
           </a:ln>
@@ -2606,14 +3164,53 @@
       </p:sp>
       <p:sp>
         <p:nvSpPr>
-          <p:cNvPr id="10" name="Text 8"/>
-          <p:cNvSpPr/>
-          <p:nvPr/>
-        </p:nvSpPr>
-        <p:spPr>
-          <a:xfrm>
-            <a:off x="1645920" y="3063240"/>
-            <a:ext cx="969264" cy="274320"/>
+          <p:cNvPr id="21" name="Text 19"/>
+          <p:cNvSpPr/>
+          <p:nvPr/>
+        </p:nvSpPr>
+        <p:spPr>
+          <a:xfrm>
+            <a:off x="457200" y="4032504"/>
+            <a:ext cx="457200" cy="502920"/>
+          </a:xfrm>
+          <a:prstGeom prst="rect">
+            <a:avLst/>
+          </a:prstGeom>
+          <a:noFill/>
+          <a:ln/>
+        </p:spPr>
+        <p:txBody>
+          <a:bodyPr wrap="square" rtlCol="0" anchor="ctr"/>
+          <a:lstStyle/>
+          <a:p>
+            <a:pPr algn="ctr" indent="0" marL="0">
+              <a:buNone/>
+            </a:pPr>
+            <a:r>
+              <a:rPr lang="en-US" sz="1200" b="1" dirty="0">
+                <a:solidFill>
+                  <a:srgbClr val="EF4444"/>
+                </a:solidFill>
+                <a:latin typeface="Arial Black" pitchFamily="34" charset="0"/>
+                <a:ea typeface="Arial Black" pitchFamily="34" charset="-122"/>
+                <a:cs typeface="Arial Black" pitchFamily="34" charset="-120"/>
+              </a:rPr>
+              <a:t>05</a:t>
+            </a:r>
+            <a:endParaRPr lang="en-US" sz="1200" dirty="0"/>
+          </a:p>
+        </p:txBody>
+      </p:sp>
+      <p:sp>
+        <p:nvSpPr>
+          <p:cNvPr id="22" name="Text 20"/>
+          <p:cNvSpPr/>
+          <p:nvPr/>
+        </p:nvSpPr>
+        <p:spPr>
+          <a:xfrm>
+            <a:off x="1051560" y="4032504"/>
+            <a:ext cx="7635240" cy="246888"/>
           </a:xfrm>
           <a:prstGeom prst="rect">
             <a:avLst/>
@@ -2625,45 +3222,115 @@
           <a:bodyPr wrap="square" lIns="0" tIns="0" rIns="0" bIns="0" rtlCol="0" anchor="ctr"/>
           <a:lstStyle/>
           <a:p>
-            <a:pPr algn="ctr" indent="0" marL="0">
-              <a:buNone/>
-            </a:pPr>
-            <a:r>
-              <a:rPr lang="en-US" sz="900" b="1" dirty="0">
-                <a:solidFill>
-                  <a:srgbClr val="06B6D4"/>
-                </a:solidFill>
-              </a:rPr>
-              <a:t>OpenCV</a:t>
-            </a:r>
-            <a:endParaRPr lang="en-US" sz="900" dirty="0"/>
-          </a:p>
-        </p:txBody>
-      </p:sp>
-      <p:sp>
-        <p:nvSpPr>
-          <p:cNvPr id="11" name="Shape 9"/>
-          <p:cNvSpPr/>
-          <p:nvPr/>
-        </p:nvSpPr>
-        <p:spPr>
-          <a:xfrm>
-            <a:off x="2816352" y="3063240"/>
-            <a:ext cx="1975104" cy="274320"/>
-          </a:xfrm>
-          <a:prstGeom prst="roundRect">
-            <a:avLst>
-              <a:gd name="adj" fmla="val 16667"/>
-            </a:avLst>
-          </a:prstGeom>
-          <a:solidFill>
-            <a:srgbClr val="06B6D4">
-              <a:alpha val="30000"/>
-            </a:srgbClr>
+            <a:pPr indent="0" marL="0">
+              <a:buNone/>
+            </a:pPr>
+            <a:r>
+              <a:rPr lang="en-US" sz="1250" b="1" dirty="0">
+                <a:solidFill>
+                  <a:srgbClr val="E2E8F0"/>
+                </a:solidFill>
+                <a:latin typeface="Calibri" pitchFamily="34" charset="0"/>
+                <a:ea typeface="Calibri" pitchFamily="34" charset="-122"/>
+                <a:cs typeface="Calibri" pitchFamily="34" charset="-120"/>
+              </a:rPr>
+              <a:t>Streak &amp; Gamification Layer</a:t>
+            </a:r>
+            <a:endParaRPr lang="en-US" sz="1250" dirty="0"/>
+          </a:p>
+        </p:txBody>
+      </p:sp>
+      <p:sp>
+        <p:nvSpPr>
+          <p:cNvPr id="23" name="Text 21"/>
+          <p:cNvSpPr/>
+          <p:nvPr/>
+        </p:nvSpPr>
+        <p:spPr>
+          <a:xfrm>
+            <a:off x="1051560" y="4288536"/>
+            <a:ext cx="7635240" cy="329184"/>
+          </a:xfrm>
+          <a:prstGeom prst="rect">
+            <a:avLst/>
+          </a:prstGeom>
+          <a:noFill/>
+          <a:ln/>
+        </p:spPr>
+        <p:txBody>
+          <a:bodyPr wrap="square" lIns="0" tIns="0" rIns="0" bIns="0" rtlCol="0" anchor="ctr"/>
+          <a:lstStyle/>
+          <a:p>
+            <a:pPr indent="0" marL="0">
+              <a:buNone/>
+            </a:pPr>
+            <a:r>
+              <a:rPr lang="en-US" sz="1000" dirty="0">
+                <a:solidFill>
+                  <a:srgbClr val="94A3B8"/>
+                </a:solidFill>
+                <a:latin typeface="Calibri" pitchFamily="34" charset="0"/>
+                <a:ea typeface="Calibri" pitchFamily="34" charset="-122"/>
+                <a:cs typeface="Calibri" pitchFamily="34" charset="-120"/>
+              </a:rPr>
+              <a:t>Focus streaks, personal records, weekly digests. Behavioral nudges to make consistent studying a habit.</a:t>
+            </a:r>
+            <a:endParaRPr lang="en-US" sz="1000" dirty="0"/>
+          </a:p>
+        </p:txBody>
+      </p:sp>
+    </p:spTree>
+  </p:cSld>
+  <p:clrMapOvr>
+    <a:masterClrMapping/>
+  </p:clrMapOvr>
+</p:sld>
+</file>
+
+<file path=ppt/slides/slide11.xml><?xml version="1.0" encoding="utf-8"?>
+<p:sld xmlns:a="http://schemas.openxmlformats.org/drawingml/2006/main" xmlns:r="http://schemas.openxmlformats.org/officeDocument/2006/relationships" xmlns:p="http://schemas.openxmlformats.org/presentationml/2006/main">
+  <p:cSld name="Slide 11">
+    <p:bg>
+      <p:bgPr>
+        <a:solidFill>
+          <a:srgbClr val="0D0D1A"/>
+        </a:solidFill>
+      </p:bgPr>
+    </p:bg>
+    <p:spTree>
+      <p:nvGrpSpPr>
+        <p:cNvPr id="1" name=""/>
+        <p:cNvGrpSpPr/>
+        <p:nvPr/>
+      </p:nvGrpSpPr>
+      <p:grpSpPr>
+        <a:xfrm>
+          <a:off x="0" y="0"/>
+          <a:ext cx="0" cy="0"/>
+          <a:chOff x="0" y="0"/>
+          <a:chExt cx="0" cy="0"/>
+        </a:xfrm>
+      </p:grpSpPr>
+      <p:sp>
+        <p:nvSpPr>
+          <p:cNvPr id="2" name="Shape 0"/>
+          <p:cNvSpPr/>
+          <p:nvPr/>
+        </p:nvSpPr>
+        <p:spPr>
+          <a:xfrm>
+            <a:off x="0" y="2240280"/>
+            <a:ext cx="9144000" cy="27432"/>
+          </a:xfrm>
+          <a:prstGeom prst="rect">
+            <a:avLst/>
+          </a:prstGeom>
+          <a:solidFill>
+            <a:srgbClr val="7C3AED"/>
           </a:solidFill>
           <a:ln w="12700">
             <a:solidFill>
-              <a:srgbClr val="06B6D4"/>
+              <a:srgbClr val="7C3AED"/>
             </a:solidFill>
             <a:prstDash val="solid"/>
           </a:ln>
@@ -2671,325 +3338,185 @@
       </p:sp>
       <p:sp>
         <p:nvSpPr>
-          <p:cNvPr id="12" name="Text 10"/>
-          <p:cNvSpPr/>
-          <p:nvPr/>
-        </p:nvSpPr>
-        <p:spPr>
-          <a:xfrm>
-            <a:off x="2816352" y="3063240"/>
-            <a:ext cx="1975104" cy="274320"/>
-          </a:xfrm>
-          <a:prstGeom prst="rect">
-            <a:avLst/>
-          </a:prstGeom>
-          <a:noFill/>
-          <a:ln/>
-        </p:spPr>
-        <p:txBody>
-          <a:bodyPr wrap="square" lIns="0" tIns="0" rIns="0" bIns="0" rtlCol="0" anchor="ctr"/>
+          <p:cNvPr id="3" name="Text 1"/>
+          <p:cNvSpPr/>
+          <p:nvPr/>
+        </p:nvSpPr>
+        <p:spPr>
+          <a:xfrm>
+            <a:off x="457200" y="502920"/>
+            <a:ext cx="8229600" cy="804672"/>
+          </a:xfrm>
+          <a:prstGeom prst="rect">
+            <a:avLst/>
+          </a:prstGeom>
+          <a:noFill/>
+          <a:ln/>
+        </p:spPr>
+        <p:txBody>
+          <a:bodyPr wrap="square" rtlCol="0" anchor="ctr"/>
           <a:lstStyle/>
           <a:p>
             <a:pPr algn="ctr" indent="0" marL="0">
               <a:buNone/>
             </a:pPr>
             <a:r>
-              <a:rPr lang="en-US" sz="900" b="1" dirty="0">
-                <a:solidFill>
-                  <a:srgbClr val="06B6D4"/>
-                </a:solidFill>
-              </a:rPr>
-              <a:t>Flask + Chart.js</a:t>
-            </a:r>
-            <a:endParaRPr lang="en-US" sz="900" dirty="0"/>
-          </a:p>
-        </p:txBody>
-      </p:sp>
-      <p:sp>
-        <p:nvSpPr>
-          <p:cNvPr id="13" name="Shape 11"/>
-          <p:cNvSpPr/>
-          <p:nvPr/>
-        </p:nvSpPr>
-        <p:spPr>
-          <a:xfrm>
-            <a:off x="3986784" y="3063240"/>
-            <a:ext cx="1975104" cy="274320"/>
-          </a:xfrm>
-          <a:prstGeom prst="roundRect">
-            <a:avLst>
-              <a:gd name="adj" fmla="val 16667"/>
-            </a:avLst>
-          </a:prstGeom>
-          <a:solidFill>
-            <a:srgbClr val="06B6D4">
-              <a:alpha val="30000"/>
-            </a:srgbClr>
-          </a:solidFill>
-          <a:ln w="12700">
-            <a:solidFill>
-              <a:srgbClr val="06B6D4"/>
-            </a:solidFill>
-            <a:prstDash val="solid"/>
-          </a:ln>
-        </p:spPr>
-      </p:sp>
-      <p:sp>
-        <p:nvSpPr>
-          <p:cNvPr id="14" name="Text 12"/>
-          <p:cNvSpPr/>
-          <p:nvPr/>
-        </p:nvSpPr>
-        <p:spPr>
-          <a:xfrm>
-            <a:off x="3986784" y="3063240"/>
-            <a:ext cx="1975104" cy="274320"/>
-          </a:xfrm>
-          <a:prstGeom prst="rect">
-            <a:avLst/>
-          </a:prstGeom>
-          <a:noFill/>
-          <a:ln/>
-        </p:spPr>
-        <p:txBody>
-          <a:bodyPr wrap="square" lIns="0" tIns="0" rIns="0" bIns="0" rtlCol="0" anchor="ctr"/>
+              <a:rPr lang="en-US" sz="5400" b="1" dirty="0">
+                <a:solidFill>
+                  <a:srgbClr val="FFFFFF"/>
+                </a:solidFill>
+                <a:latin typeface="Arial Black" pitchFamily="34" charset="0"/>
+                <a:ea typeface="Arial Black" pitchFamily="34" charset="-122"/>
+                <a:cs typeface="Arial Black" pitchFamily="34" charset="-120"/>
+              </a:rPr>
+              <a:t>One Person.</a:t>
+            </a:r>
+            <a:endParaRPr lang="en-US" sz="5400" dirty="0"/>
+          </a:p>
+        </p:txBody>
+      </p:sp>
+      <p:sp>
+        <p:nvSpPr>
+          <p:cNvPr id="4" name="Text 2"/>
+          <p:cNvSpPr/>
+          <p:nvPr/>
+        </p:nvSpPr>
+        <p:spPr>
+          <a:xfrm>
+            <a:off x="457200" y="1261872"/>
+            <a:ext cx="8229600" cy="713232"/>
+          </a:xfrm>
+          <a:prstGeom prst="rect">
+            <a:avLst/>
+          </a:prstGeom>
+          <a:noFill/>
+          <a:ln/>
+        </p:spPr>
+        <p:txBody>
+          <a:bodyPr wrap="square" rtlCol="0" anchor="ctr"/>
           <a:lstStyle/>
           <a:p>
             <a:pPr algn="ctr" indent="0" marL="0">
               <a:buNone/>
             </a:pPr>
             <a:r>
-              <a:rPr lang="en-US" sz="900" b="1" dirty="0">
-                <a:solidFill>
-                  <a:srgbClr val="06B6D4"/>
-                </a:solidFill>
-              </a:rPr>
-              <a:t>Gemini 2.5 Flash</a:t>
-            </a:r>
-            <a:endParaRPr lang="en-US" sz="900" dirty="0"/>
-          </a:p>
-        </p:txBody>
-      </p:sp>
-      <p:sp>
-        <p:nvSpPr>
-          <p:cNvPr id="15" name="Shape 13"/>
-          <p:cNvSpPr/>
-          <p:nvPr/>
-        </p:nvSpPr>
-        <p:spPr>
-          <a:xfrm>
-            <a:off x="5157216" y="3063240"/>
-            <a:ext cx="1472184" cy="274320"/>
-          </a:xfrm>
-          <a:prstGeom prst="roundRect">
-            <a:avLst>
-              <a:gd name="adj" fmla="val 16667"/>
-            </a:avLst>
-          </a:prstGeom>
-          <a:solidFill>
-            <a:srgbClr val="06B6D4">
-              <a:alpha val="30000"/>
-            </a:srgbClr>
-          </a:solidFill>
-          <a:ln w="12700">
-            <a:solidFill>
-              <a:srgbClr val="06B6D4"/>
-            </a:solidFill>
-            <a:prstDash val="solid"/>
-          </a:ln>
-        </p:spPr>
-      </p:sp>
-      <p:sp>
-        <p:nvSpPr>
-          <p:cNvPr id="16" name="Text 14"/>
-          <p:cNvSpPr/>
-          <p:nvPr/>
-        </p:nvSpPr>
-        <p:spPr>
-          <a:xfrm>
-            <a:off x="5157216" y="3063240"/>
-            <a:ext cx="1472184" cy="274320"/>
-          </a:xfrm>
-          <a:prstGeom prst="rect">
-            <a:avLst/>
-          </a:prstGeom>
-          <a:noFill/>
-          <a:ln/>
-        </p:spPr>
-        <p:txBody>
-          <a:bodyPr wrap="square" lIns="0" tIns="0" rIns="0" bIns="0" rtlCol="0" anchor="ctr"/>
+              <a:rPr lang="en-US" sz="3000" b="1" dirty="0">
+                <a:solidFill>
+                  <a:srgbClr val="7C3AED"/>
+                </a:solidFill>
+                <a:latin typeface="Arial Black" pitchFamily="34" charset="0"/>
+                <a:ea typeface="Arial Black" pitchFamily="34" charset="-122"/>
+                <a:cs typeface="Arial Black" pitchFamily="34" charset="-120"/>
+              </a:rPr>
+              <a:t>Full-Stack AI Productivity Research.</a:t>
+            </a:r>
+            <a:endParaRPr lang="en-US" sz="3000" dirty="0"/>
+          </a:p>
+        </p:txBody>
+      </p:sp>
+      <p:sp>
+        <p:nvSpPr>
+          <p:cNvPr id="5" name="Text 3"/>
+          <p:cNvSpPr/>
+          <p:nvPr/>
+        </p:nvSpPr>
+        <p:spPr>
+          <a:xfrm>
+            <a:off x="457200" y="2423160"/>
+            <a:ext cx="8229600" cy="384048"/>
+          </a:xfrm>
+          <a:prstGeom prst="rect">
+            <a:avLst/>
+          </a:prstGeom>
+          <a:noFill/>
+          <a:ln/>
+        </p:spPr>
+        <p:txBody>
+          <a:bodyPr wrap="square" rtlCol="0" anchor="ctr"/>
           <a:lstStyle/>
           <a:p>
             <a:pPr algn="ctr" indent="0" marL="0">
               <a:buNone/>
             </a:pPr>
             <a:r>
-              <a:rPr lang="en-US" sz="900" b="1" dirty="0">
-                <a:solidFill>
-                  <a:srgbClr val="06B6D4"/>
-                </a:solidFill>
-              </a:rPr>
-              <a:t>sounddevice</a:t>
-            </a:r>
-            <a:endParaRPr lang="en-US" sz="900" dirty="0"/>
-          </a:p>
-        </p:txBody>
-      </p:sp>
-      <p:sp>
-        <p:nvSpPr>
-          <p:cNvPr id="17" name="Shape 15"/>
-          <p:cNvSpPr/>
-          <p:nvPr/>
-        </p:nvSpPr>
-        <p:spPr>
-          <a:xfrm>
-            <a:off x="6327648" y="3063240"/>
-            <a:ext cx="969264" cy="274320"/>
-          </a:xfrm>
-          <a:prstGeom prst="roundRect">
-            <a:avLst>
-              <a:gd name="adj" fmla="val 16667"/>
-            </a:avLst>
-          </a:prstGeom>
-          <a:solidFill>
-            <a:srgbClr val="06B6D4">
-              <a:alpha val="30000"/>
-            </a:srgbClr>
-          </a:solidFill>
-          <a:ln w="12700">
-            <a:solidFill>
-              <a:srgbClr val="06B6D4"/>
-            </a:solidFill>
-            <a:prstDash val="solid"/>
-          </a:ln>
-        </p:spPr>
-      </p:sp>
-      <p:sp>
-        <p:nvSpPr>
-          <p:cNvPr id="18" name="Text 16"/>
-          <p:cNvSpPr/>
-          <p:nvPr/>
-        </p:nvSpPr>
-        <p:spPr>
-          <a:xfrm>
-            <a:off x="6327648" y="3063240"/>
-            <a:ext cx="969264" cy="274320"/>
-          </a:xfrm>
-          <a:prstGeom prst="rect">
-            <a:avLst/>
-          </a:prstGeom>
-          <a:noFill/>
-          <a:ln/>
-        </p:spPr>
-        <p:txBody>
-          <a:bodyPr wrap="square" lIns="0" tIns="0" rIns="0" bIns="0" rtlCol="0" anchor="ctr"/>
+              <a:rPr lang="en-US" sz="1350" dirty="0">
+                <a:solidFill>
+                  <a:srgbClr val="94A3B8"/>
+                </a:solidFill>
+                <a:latin typeface="Calibri" pitchFamily="34" charset="0"/>
+                <a:ea typeface="Calibri" pitchFamily="34" charset="-122"/>
+                <a:cs typeface="Calibri" pitchFamily="34" charset="-120"/>
+              </a:rPr>
+              <a:t>5 sensors  ·  real-time adaptive timer  ·  Gemini AI coach  ·  long-term analytics dashboard</a:t>
+            </a:r>
+            <a:endParaRPr lang="en-US" sz="1350" dirty="0"/>
+          </a:p>
+        </p:txBody>
+      </p:sp>
+      <p:sp>
+        <p:nvSpPr>
+          <p:cNvPr id="6" name="Text 4"/>
+          <p:cNvSpPr/>
+          <p:nvPr/>
+        </p:nvSpPr>
+        <p:spPr>
+          <a:xfrm>
+            <a:off x="457200" y="2971800"/>
+            <a:ext cx="8229600" cy="347472"/>
+          </a:xfrm>
+          <a:prstGeom prst="rect">
+            <a:avLst/>
+          </a:prstGeom>
+          <a:noFill/>
+          <a:ln/>
+        </p:spPr>
+        <p:txBody>
+          <a:bodyPr wrap="square" rtlCol="0" anchor="ctr"/>
           <a:lstStyle/>
           <a:p>
             <a:pPr algn="ctr" indent="0" marL="0">
               <a:buNone/>
             </a:pPr>
             <a:r>
-              <a:rPr lang="en-US" sz="900" b="1" dirty="0">
-                <a:solidFill>
-                  <a:srgbClr val="06B6D4"/>
-                </a:solidFill>
-              </a:rPr>
-              <a:t>AppKit</a:t>
-            </a:r>
-            <a:endParaRPr lang="en-US" sz="900" dirty="0"/>
-          </a:p>
-        </p:txBody>
-      </p:sp>
-      <p:sp>
-        <p:nvSpPr>
-          <p:cNvPr id="19" name="Shape 17"/>
-          <p:cNvSpPr/>
-          <p:nvPr/>
-        </p:nvSpPr>
-        <p:spPr>
-          <a:xfrm>
-            <a:off x="7498080" y="3063240"/>
-            <a:ext cx="1069848" cy="274320"/>
-          </a:xfrm>
-          <a:prstGeom prst="roundRect">
-            <a:avLst>
-              <a:gd name="adj" fmla="val 16667"/>
-            </a:avLst>
-          </a:prstGeom>
-          <a:solidFill>
-            <a:srgbClr val="06B6D4">
-              <a:alpha val="30000"/>
-            </a:srgbClr>
-          </a:solidFill>
-          <a:ln w="12700">
-            <a:solidFill>
-              <a:srgbClr val="06B6D4"/>
-            </a:solidFill>
-            <a:prstDash val="solid"/>
-          </a:ln>
-        </p:spPr>
-      </p:sp>
-      <p:sp>
-        <p:nvSpPr>
-          <p:cNvPr id="20" name="Text 18"/>
-          <p:cNvSpPr/>
-          <p:nvPr/>
-        </p:nvSpPr>
-        <p:spPr>
-          <a:xfrm>
-            <a:off x="7498080" y="3063240"/>
-            <a:ext cx="1069848" cy="274320"/>
-          </a:xfrm>
-          <a:prstGeom prst="rect">
-            <a:avLst/>
-          </a:prstGeom>
-          <a:noFill/>
-          <a:ln/>
-        </p:spPr>
-        <p:txBody>
-          <a:bodyPr wrap="square" lIns="0" tIns="0" rIns="0" bIns="0" rtlCol="0" anchor="ctr"/>
+              <a:rPr lang="en-US" sz="1100" dirty="0">
+                <a:solidFill>
+                  <a:srgbClr val="4B5563"/>
+                </a:solidFill>
+                <a:latin typeface="Calibri" pitchFamily="34" charset="0"/>
+                <a:ea typeface="Calibri" pitchFamily="34" charset="-122"/>
+                <a:cs typeface="Calibri" pitchFamily="34" charset="-120"/>
+              </a:rPr>
+              <a:t>MediaPipe  ·  OpenCV  ·  Flask + Chart.js  ·  Gemini 2.5 Flash  ·  sounddevice  ·  AppKit</a:t>
+            </a:r>
+            <a:endParaRPr lang="en-US" sz="1100" dirty="0"/>
+          </a:p>
+        </p:txBody>
+      </p:sp>
+      <p:sp>
+        <p:nvSpPr>
+          <p:cNvPr id="7" name="Text 5"/>
+          <p:cNvSpPr/>
+          <p:nvPr/>
+        </p:nvSpPr>
+        <p:spPr>
+          <a:xfrm>
+            <a:off x="457200" y="3493008"/>
+            <a:ext cx="8229600" cy="347472"/>
+          </a:xfrm>
+          <a:prstGeom prst="rect">
+            <a:avLst/>
+          </a:prstGeom>
+          <a:noFill/>
+          <a:ln/>
+        </p:spPr>
+        <p:txBody>
+          <a:bodyPr wrap="square" rtlCol="0" anchor="ctr"/>
           <a:lstStyle/>
           <a:p>
             <a:pPr algn="ctr" indent="0" marL="0">
               <a:buNone/>
             </a:pPr>
             <a:r>
-              <a:rPr lang="en-US" sz="900" b="1" dirty="0">
-                <a:solidFill>
-                  <a:srgbClr val="06B6D4"/>
-                </a:solidFill>
-              </a:rPr>
-              <a:t>tkinter</a:t>
-            </a:r>
-            <a:endParaRPr lang="en-US" sz="900" dirty="0"/>
-          </a:p>
-        </p:txBody>
-      </p:sp>
-      <p:sp>
-        <p:nvSpPr>
-          <p:cNvPr id="21" name="Text 19"/>
-          <p:cNvSpPr/>
-          <p:nvPr/>
-        </p:nvSpPr>
-        <p:spPr>
-          <a:xfrm>
-            <a:off x="914400" y="3703320"/>
-            <a:ext cx="7772400" cy="347472"/>
-          </a:xfrm>
-          <a:prstGeom prst="rect">
-            <a:avLst/>
-          </a:prstGeom>
-          <a:noFill/>
-          <a:ln/>
-        </p:spPr>
-        <p:txBody>
-          <a:bodyPr wrap="square" rtlCol="0" anchor="ctr"/>
-          <a:lstStyle/>
-          <a:p>
-            <a:pPr algn="ctr" indent="0" marL="0">
-              <a:buNone/>
-            </a:pPr>
-            <a:r>
               <a:rPr lang="en-US" sz="1300" dirty="0">
                 <a:solidFill>
                   <a:srgbClr val="7C3AED"/>
@@ -3006,14 +3533,14 @@
       </p:sp>
       <p:sp>
         <p:nvSpPr>
-          <p:cNvPr id="22" name="Text 20"/>
-          <p:cNvSpPr/>
-          <p:nvPr/>
-        </p:nvSpPr>
-        <p:spPr>
-          <a:xfrm>
-            <a:off x="914400" y="4617720"/>
-            <a:ext cx="7772400" cy="274320"/>
+          <p:cNvPr id="8" name="Text 6"/>
+          <p:cNvSpPr/>
+          <p:nvPr/>
+        </p:nvSpPr>
+        <p:spPr>
+          <a:xfrm>
+            <a:off x="457200" y="4160520"/>
+            <a:ext cx="8229600" cy="320040"/>
           </a:xfrm>
           <a:prstGeom prst="rect">
             <a:avLst/>
@@ -3083,8 +3610,8 @@
         </p:nvSpPr>
         <p:spPr>
           <a:xfrm>
-            <a:off x="457200" y="274320"/>
-            <a:ext cx="8229600" cy="548640"/>
+            <a:off x="457200" y="256032"/>
+            <a:ext cx="8229600" cy="530352"/>
           </a:xfrm>
           <a:prstGeom prst="rect">
             <a:avLst/>
@@ -3122,8 +3649,8 @@
         </p:nvSpPr>
         <p:spPr>
           <a:xfrm>
-            <a:off x="457200" y="841248"/>
-            <a:ext cx="8229600" cy="457200"/>
+            <a:off x="457200" y="804672"/>
+            <a:ext cx="8229600" cy="384048"/>
           </a:xfrm>
           <a:prstGeom prst="rect">
             <a:avLst/>
@@ -3139,7 +3666,7 @@
               <a:buNone/>
             </a:pPr>
             <a:r>
-              <a:rPr lang="en-US" sz="1400" dirty="0">
+              <a:rPr lang="en-US" sz="1300" dirty="0">
                 <a:solidFill>
                   <a:srgbClr val="94A3B8"/>
                 </a:solidFill>
@@ -3147,9 +3674,9 @@
                 <a:ea typeface="Calibri" pitchFamily="34" charset="-122"/>
                 <a:cs typeface="Calibri" pitchFamily="34" charset="-120"/>
               </a:rPr>
-              <a:t>Traditional Pomodoro timers are rigid, impersonal, and completely unaware of how you actually feel.</a:t>
-            </a:r>
-            <a:endParaRPr lang="en-US" sz="1400" dirty="0"/>
+              <a:t>Traditional Pomodoro timers are rigid, impersonal, and blind to how you actually feel.</a:t>
+            </a:r>
+            <a:endParaRPr lang="en-US" sz="1300" dirty="0"/>
           </a:p>
         </p:txBody>
       </p:sp>
@@ -3161,8 +3688,8 @@
         </p:nvSpPr>
         <p:spPr>
           <a:xfrm>
-            <a:off x="457200" y="1508760"/>
-            <a:ext cx="3931920" cy="1417320"/>
+            <a:off x="457200" y="1417320"/>
+            <a:ext cx="3977640" cy="1481328"/>
           </a:xfrm>
           <a:prstGeom prst="rect">
             <a:avLst/>
@@ -3186,8 +3713,8 @@
         </p:nvSpPr>
         <p:spPr>
           <a:xfrm>
-            <a:off x="457200" y="1508760"/>
-            <a:ext cx="3931920" cy="45720"/>
+            <a:off x="457200" y="1417320"/>
+            <a:ext cx="3977640" cy="45720"/>
           </a:xfrm>
           <a:prstGeom prst="rect">
             <a:avLst/>
@@ -3211,8 +3738,8 @@
         </p:nvSpPr>
         <p:spPr>
           <a:xfrm>
-            <a:off x="621792" y="1691640"/>
-            <a:ext cx="3566160" cy="384048"/>
+            <a:off x="621792" y="1581912"/>
+            <a:ext cx="3611880" cy="365760"/>
           </a:xfrm>
           <a:prstGeom prst="rect">
             <a:avLst/>
@@ -3228,7 +3755,7 @@
               <a:buNone/>
             </a:pPr>
             <a:r>
-              <a:rPr lang="en-US" sz="1500" b="1" dirty="0">
+              <a:rPr lang="en-US" sz="1400" b="1" dirty="0">
                 <a:solidFill>
                   <a:srgbClr val="EF4444"/>
                 </a:solidFill>
@@ -3238,7 +3765,7 @@
               </a:rPr>
               <a:t>⏱  One-Size Timer</a:t>
             </a:r>
-            <a:endParaRPr lang="en-US" sz="1500" dirty="0"/>
+            <a:endParaRPr lang="en-US" sz="1400" dirty="0"/>
           </a:p>
         </p:txBody>
       </p:sp>
@@ -3250,8 +3777,8 @@
         </p:nvSpPr>
         <p:spPr>
           <a:xfrm>
-            <a:off x="621792" y="2057400"/>
-            <a:ext cx="3566160" cy="640080"/>
+            <a:off x="621792" y="1965960"/>
+            <a:ext cx="3611880" cy="804672"/>
           </a:xfrm>
           <a:prstGeom prst="rect">
             <a:avLst/>
@@ -3267,7 +3794,7 @@
               <a:buNone/>
             </a:pPr>
             <a:r>
-              <a:rPr lang="en-US" sz="1200" dirty="0">
+              <a:rPr lang="en-US" sz="1150" dirty="0">
                 <a:solidFill>
                   <a:srgbClr val="94A3B8"/>
                 </a:solidFill>
@@ -3275,9 +3802,9 @@
                 <a:ea typeface="Calibri" pitchFamily="34" charset="-122"/>
                 <a:cs typeface="Calibri" pitchFamily="34" charset="-120"/>
               </a:rPr>
-              <a:t>25/5 split regardless of your focus level, fatigue, or flow state.</a:t>
-            </a:r>
-            <a:endParaRPr lang="en-US" sz="1200" dirty="0"/>
+              <a:t>25/5 split for everyone, every day. No awareness of your actual energy or flow state.</a:t>
+            </a:r>
+            <a:endParaRPr lang="en-US" sz="1150" dirty="0"/>
           </a:p>
         </p:txBody>
       </p:sp>
@@ -3289,8 +3816,8 @@
         </p:nvSpPr>
         <p:spPr>
           <a:xfrm>
-            <a:off x="4754880" y="1508760"/>
-            <a:ext cx="3931920" cy="1417320"/>
+            <a:off x="4800600" y="1417320"/>
+            <a:ext cx="3977640" cy="1481328"/>
           </a:xfrm>
           <a:prstGeom prst="rect">
             <a:avLst/>
@@ -3314,8 +3841,8 @@
         </p:nvSpPr>
         <p:spPr>
           <a:xfrm>
-            <a:off x="4754880" y="1508760"/>
-            <a:ext cx="3931920" cy="45720"/>
+            <a:off x="4800600" y="1417320"/>
+            <a:ext cx="3977640" cy="45720"/>
           </a:xfrm>
           <a:prstGeom prst="rect">
             <a:avLst/>
@@ -3339,8 +3866,8 @@
         </p:nvSpPr>
         <p:spPr>
           <a:xfrm>
-            <a:off x="4919472" y="1691640"/>
-            <a:ext cx="3566160" cy="384048"/>
+            <a:off x="4965192" y="1581912"/>
+            <a:ext cx="3611880" cy="365760"/>
           </a:xfrm>
           <a:prstGeom prst="rect">
             <a:avLst/>
@@ -3356,7 +3883,7 @@
               <a:buNone/>
             </a:pPr>
             <a:r>
-              <a:rPr lang="en-US" sz="1500" b="1" dirty="0">
+              <a:rPr lang="en-US" sz="1400" b="1" dirty="0">
                 <a:solidFill>
                   <a:srgbClr val="F59E0B"/>
                 </a:solidFill>
@@ -3366,7 +3893,7 @@
               </a:rPr>
               <a:t>🙈  Zero Sensing</a:t>
             </a:r>
-            <a:endParaRPr lang="en-US" sz="1500" dirty="0"/>
+            <a:endParaRPr lang="en-US" sz="1400" dirty="0"/>
           </a:p>
         </p:txBody>
       </p:sp>
@@ -3378,8 +3905,8 @@
         </p:nvSpPr>
         <p:spPr>
           <a:xfrm>
-            <a:off x="4919472" y="2057400"/>
-            <a:ext cx="3566160" cy="640080"/>
+            <a:off x="4965192" y="1965960"/>
+            <a:ext cx="3611880" cy="804672"/>
           </a:xfrm>
           <a:prstGeom prst="rect">
             <a:avLst/>
@@ -3395,7 +3922,7 @@
               <a:buNone/>
             </a:pPr>
             <a:r>
-              <a:rPr lang="en-US" sz="1200" dirty="0">
+              <a:rPr lang="en-US" sz="1150" dirty="0">
                 <a:solidFill>
                   <a:srgbClr val="94A3B8"/>
                 </a:solidFill>
@@ -3403,9 +3930,9 @@
                 <a:ea typeface="Calibri" pitchFamily="34" charset="-122"/>
                 <a:cs typeface="Calibri" pitchFamily="34" charset="-120"/>
               </a:rPr>
-              <a:t>No awareness of your posture, gaze, environment, or phone use.</a:t>
-            </a:r>
-            <a:endParaRPr lang="en-US" sz="1200" dirty="0"/>
+              <a:t>Ignores your posture, gaze, phone usage, and environment entirely.</a:t>
+            </a:r>
+            <a:endParaRPr lang="en-US" sz="1150" dirty="0"/>
           </a:p>
         </p:txBody>
       </p:sp>
@@ -3417,8 +3944,8 @@
         </p:nvSpPr>
         <p:spPr>
           <a:xfrm>
-            <a:off x="457200" y="3108960"/>
-            <a:ext cx="3931920" cy="1417320"/>
+            <a:off x="457200" y="3081528"/>
+            <a:ext cx="3977640" cy="1481328"/>
           </a:xfrm>
           <a:prstGeom prst="rect">
             <a:avLst/>
@@ -3442,8 +3969,8 @@
         </p:nvSpPr>
         <p:spPr>
           <a:xfrm>
-            <a:off x="457200" y="3108960"/>
-            <a:ext cx="3931920" cy="45720"/>
+            <a:off x="457200" y="3081528"/>
+            <a:ext cx="3977640" cy="45720"/>
           </a:xfrm>
           <a:prstGeom prst="rect">
             <a:avLst/>
@@ -3467,8 +3994,8 @@
         </p:nvSpPr>
         <p:spPr>
           <a:xfrm>
-            <a:off x="621792" y="3291840"/>
-            <a:ext cx="3566160" cy="384048"/>
+            <a:off x="621792" y="3246120"/>
+            <a:ext cx="3611880" cy="365760"/>
           </a:xfrm>
           <a:prstGeom prst="rect">
             <a:avLst/>
@@ -3484,7 +4011,7 @@
               <a:buNone/>
             </a:pPr>
             <a:r>
-              <a:rPr lang="en-US" sz="1500" b="1" dirty="0">
+              <a:rPr lang="en-US" sz="1400" b="1" dirty="0">
                 <a:solidFill>
                   <a:srgbClr val="7C3AED"/>
                 </a:solidFill>
@@ -3494,7 +4021,7 @@
               </a:rPr>
               <a:t>🤖  No Learning</a:t>
             </a:r>
-            <a:endParaRPr lang="en-US" sz="1500" dirty="0"/>
+            <a:endParaRPr lang="en-US" sz="1400" dirty="0"/>
           </a:p>
         </p:txBody>
       </p:sp>
@@ -3506,8 +4033,8 @@
         </p:nvSpPr>
         <p:spPr>
           <a:xfrm>
-            <a:off x="621792" y="3657600"/>
-            <a:ext cx="3566160" cy="640080"/>
+            <a:off x="621792" y="3630168"/>
+            <a:ext cx="3611880" cy="804672"/>
           </a:xfrm>
           <a:prstGeom prst="rect">
             <a:avLst/>
@@ -3523,7 +4050,7 @@
               <a:buNone/>
             </a:pPr>
             <a:r>
-              <a:rPr lang="en-US" sz="1200" dirty="0">
+              <a:rPr lang="en-US" sz="1150" dirty="0">
                 <a:solidFill>
                   <a:srgbClr val="94A3B8"/>
                 </a:solidFill>
@@ -3531,9 +4058,9 @@
                 <a:ea typeface="Calibri" pitchFamily="34" charset="-122"/>
                 <a:cs typeface="Calibri" pitchFamily="34" charset="-120"/>
               </a:rPr>
-              <a:t>Doesn't remember yesterday's patterns or improve its recommendations.</a:t>
-            </a:r>
-            <a:endParaRPr lang="en-US" sz="1200" dirty="0"/>
+              <a:t>Doesn't remember that you focus best at 5 PM or that loud noise tanks your attention.</a:t>
+            </a:r>
+            <a:endParaRPr lang="en-US" sz="1150" dirty="0"/>
           </a:p>
         </p:txBody>
       </p:sp>
@@ -3545,8 +4072,8 @@
         </p:nvSpPr>
         <p:spPr>
           <a:xfrm>
-            <a:off x="4754880" y="3108960"/>
-            <a:ext cx="3931920" cy="1417320"/>
+            <a:off x="4800600" y="3081528"/>
+            <a:ext cx="3977640" cy="1481328"/>
           </a:xfrm>
           <a:prstGeom prst="rect">
             <a:avLst/>
@@ -3570,8 +4097,8 @@
         </p:nvSpPr>
         <p:spPr>
           <a:xfrm>
-            <a:off x="4754880" y="3108960"/>
-            <a:ext cx="3931920" cy="45720"/>
+            <a:off x="4800600" y="3081528"/>
+            <a:ext cx="3977640" cy="45720"/>
           </a:xfrm>
           <a:prstGeom prst="rect">
             <a:avLst/>
@@ -3595,8 +4122,8 @@
         </p:nvSpPr>
         <p:spPr>
           <a:xfrm>
-            <a:off x="4919472" y="3291840"/>
-            <a:ext cx="3566160" cy="384048"/>
+            <a:off x="4965192" y="3246120"/>
+            <a:ext cx="3611880" cy="365760"/>
           </a:xfrm>
           <a:prstGeom prst="rect">
             <a:avLst/>
@@ -3612,7 +4139,7 @@
               <a:buNone/>
             </a:pPr>
             <a:r>
-              <a:rPr lang="en-US" sz="1500" b="1" dirty="0">
+              <a:rPr lang="en-US" sz="1400" b="1" dirty="0">
                 <a:solidFill>
                   <a:srgbClr val="06B6D4"/>
                 </a:solidFill>
@@ -3622,7 +4149,7 @@
               </a:rPr>
               <a:t>📉  No Intervention</a:t>
             </a:r>
-            <a:endParaRPr lang="en-US" sz="1500" dirty="0"/>
+            <a:endParaRPr lang="en-US" sz="1400" dirty="0"/>
           </a:p>
         </p:txBody>
       </p:sp>
@@ -3634,8 +4161,8 @@
         </p:nvSpPr>
         <p:spPr>
           <a:xfrm>
-            <a:off x="4919472" y="3657600"/>
-            <a:ext cx="3566160" cy="640080"/>
+            <a:off x="4965192" y="3630168"/>
+            <a:ext cx="3611880" cy="804672"/>
           </a:xfrm>
           <a:prstGeom prst="rect">
             <a:avLst/>
@@ -3651,7 +4178,7 @@
               <a:buNone/>
             </a:pPr>
             <a:r>
-              <a:rPr lang="en-US" sz="1200" dirty="0">
+              <a:rPr lang="en-US" sz="1150" dirty="0">
                 <a:solidFill>
                   <a:srgbClr val="94A3B8"/>
                 </a:solidFill>
@@ -3659,9 +4186,9 @@
                 <a:ea typeface="Calibri" pitchFamily="34" charset="-122"/>
                 <a:cs typeface="Calibri" pitchFamily="34" charset="-120"/>
               </a:rPr>
-              <a:t>Can't tell you to take a break when you've been zoned out for 10 minutes.</a:t>
-            </a:r>
-            <a:endParaRPr lang="en-US" sz="1200" dirty="0"/>
+              <a:t>Won't shorten a session when you've been distracted for 10 minutes — or extend one when you're in flow.</a:t>
+            </a:r>
+            <a:endParaRPr lang="en-US" sz="1150" dirty="0"/>
           </a:p>
         </p:txBody>
       </p:sp>
@@ -3673,8 +4200,8 @@
         </p:nvSpPr>
         <p:spPr>
           <a:xfrm>
-            <a:off x="457200" y="4663440"/>
-            <a:ext cx="8229600" cy="320040"/>
+            <a:off x="457200" y="4727448"/>
+            <a:ext cx="8229600" cy="274320"/>
           </a:xfrm>
           <a:prstGeom prst="rect">
             <a:avLst/>
@@ -3690,7 +4217,7 @@
               <a:buNone/>
             </a:pPr>
             <a:r>
-              <a:rPr lang="en-US" sz="1100" i="1" dirty="0">
+              <a:rPr lang="en-US" sz="1050" i="1" dirty="0">
                 <a:solidFill>
                   <a:srgbClr val="4B5563"/>
                 </a:solidFill>
@@ -3698,9 +4225,9 @@
                 <a:ea typeface="Calibri" pitchFamily="34" charset="-122"/>
                 <a:cs typeface="Calibri" pitchFamily="34" charset="-120"/>
               </a:rPr>
-              <a:t>Research shows cognitive performance varies by up to 40% based on time of day and environment — yet timers ignore this entirely.</a:t>
-            </a:r>
-            <a:endParaRPr lang="en-US" sz="1100" dirty="0"/>
+              <a:t>Motivation: I lost hours to fake studying — sitting at my desk but mentally checked out. No tool noticed.</a:t>
+            </a:r>
+            <a:endParaRPr lang="en-US" sz="1050" dirty="0"/>
           </a:p>
         </p:txBody>
       </p:sp>
@@ -3744,8 +4271,8 @@
         </p:nvSpPr>
         <p:spPr>
           <a:xfrm>
-            <a:off x="457200" y="274320"/>
-            <a:ext cx="8229600" cy="548640"/>
+            <a:off x="457200" y="256032"/>
+            <a:ext cx="8229600" cy="502920"/>
           </a:xfrm>
           <a:prstGeom prst="rect">
             <a:avLst/>
@@ -3783,8 +4310,8 @@
         </p:nvSpPr>
         <p:spPr>
           <a:xfrm>
-            <a:off x="457200" y="841248"/>
-            <a:ext cx="8229600" cy="411480"/>
+            <a:off x="457200" y="786384"/>
+            <a:ext cx="8229600" cy="384048"/>
           </a:xfrm>
           <a:prstGeom prst="rect">
             <a:avLst/>
@@ -3800,7 +4327,7 @@
               <a:buNone/>
             </a:pPr>
             <a:r>
-              <a:rPr lang="en-US" sz="1400" dirty="0">
+              <a:rPr lang="en-US" sz="1300" dirty="0">
                 <a:solidFill>
                   <a:srgbClr val="94A3B8"/>
                 </a:solidFill>
@@ -3810,7 +4337,7 @@
               </a:rPr>
               <a:t>A closed-loop system that continuously senses, scores, and responds to your cognitive state.</a:t>
             </a:r>
-            <a:endParaRPr lang="en-US" sz="1400" dirty="0"/>
+            <a:endParaRPr lang="en-US" sz="1300" dirty="0"/>
           </a:p>
         </p:txBody>
       </p:sp>
@@ -3822,8 +4349,8 @@
         </p:nvSpPr>
         <p:spPr>
           <a:xfrm>
-            <a:off x="457200" y="1417320"/>
-            <a:ext cx="1920240" cy="3337560"/>
+            <a:off x="457200" y="1371600"/>
+            <a:ext cx="1993392" cy="3401568"/>
           </a:xfrm>
           <a:prstGeom prst="rect">
             <a:avLst/>
@@ -3847,8 +4374,8 @@
         </p:nvSpPr>
         <p:spPr>
           <a:xfrm>
-            <a:off x="457200" y="1417320"/>
-            <a:ext cx="1920240" cy="45720"/>
+            <a:off x="457200" y="1371600"/>
+            <a:ext cx="1993392" cy="45720"/>
           </a:xfrm>
           <a:prstGeom prst="rect">
             <a:avLst/>
@@ -3872,8 +4399,8 @@
         </p:nvSpPr>
         <p:spPr>
           <a:xfrm>
-            <a:off x="594360" y="1572768"/>
-            <a:ext cx="1645920" cy="411480"/>
+            <a:off x="594360" y="1508760"/>
+            <a:ext cx="1737360" cy="438912"/>
           </a:xfrm>
           <a:prstGeom prst="rect">
             <a:avLst/>
@@ -3911,8 +4438,8 @@
         </p:nvSpPr>
         <p:spPr>
           <a:xfrm>
-            <a:off x="594360" y="1938528"/>
-            <a:ext cx="1645920" cy="320040"/>
+            <a:off x="594360" y="1920240"/>
+            <a:ext cx="1737360" cy="292608"/>
           </a:xfrm>
           <a:prstGeom prst="rect">
             <a:avLst/>
@@ -3928,7 +4455,7 @@
               <a:buNone/>
             </a:pPr>
             <a:r>
-              <a:rPr lang="en-US" sz="1300" b="1" spc="300" kern="0" dirty="0">
+              <a:rPr lang="en-US" sz="1200" b="1" spc="300" kern="0" dirty="0">
                 <a:solidFill>
                   <a:srgbClr val="FFFFFF"/>
                 </a:solidFill>
@@ -3938,118 +4465,95 @@
               </a:rPr>
               <a:t>SENSE</a:t>
             </a:r>
+            <a:endParaRPr lang="en-US" sz="1200" dirty="0"/>
+          </a:p>
+        </p:txBody>
+      </p:sp>
+      <p:sp>
+        <p:nvSpPr>
+          <p:cNvPr id="8" name="Text 6"/>
+          <p:cNvSpPr/>
+          <p:nvPr/>
+        </p:nvSpPr>
+        <p:spPr>
+          <a:xfrm>
+            <a:off x="594360" y="2249424"/>
+            <a:ext cx="1755648" cy="2359152"/>
+          </a:xfrm>
+          <a:prstGeom prst="rect">
+            <a:avLst/>
+          </a:prstGeom>
+          <a:noFill/>
+          <a:ln/>
+        </p:spPr>
+        <p:txBody>
+          <a:bodyPr wrap="square" rtlCol="0" anchor="t"/>
+          <a:lstStyle/>
+          <a:p>
+            <a:pPr indent="0" marL="0">
+              <a:buNone/>
+            </a:pPr>
+            <a:r>
+              <a:rPr lang="en-US" sz="1050" dirty="0">
+                <a:solidFill>
+                  <a:srgbClr val="94A3B8"/>
+                </a:solidFill>
+                <a:latin typeface="Calibri" pitchFamily="34" charset="0"/>
+                <a:ea typeface="Calibri" pitchFamily="34" charset="-122"/>
+                <a:cs typeface="Calibri" pitchFamily="34" charset="-120"/>
+              </a:rPr>
+              <a:t>Camera + mic sampled at 30 fps. MediaPipe extracts gaze direction, blink EAR, shoulder alignment, and hand presence. sounddevice measures ambient dB.</a:t>
+            </a:r>
+            <a:endParaRPr lang="en-US" sz="1050" dirty="0"/>
+          </a:p>
+        </p:txBody>
+      </p:sp>
+      <p:sp>
+        <p:nvSpPr>
+          <p:cNvPr id="9" name="Text 7"/>
+          <p:cNvSpPr/>
+          <p:nvPr/>
+        </p:nvSpPr>
+        <p:spPr>
+          <a:xfrm>
+            <a:off x="2432304" y="2907792"/>
+            <a:ext cx="182880" cy="256032"/>
+          </a:xfrm>
+          <a:prstGeom prst="rect">
+            <a:avLst/>
+          </a:prstGeom>
+          <a:noFill/>
+          <a:ln/>
+        </p:spPr>
+        <p:txBody>
+          <a:bodyPr wrap="square" rtlCol="0" anchor="ctr"/>
+          <a:lstStyle/>
+          <a:p>
+            <a:pPr algn="ctr" indent="0" marL="0">
+              <a:buNone/>
+            </a:pPr>
+            <a:r>
+              <a:rPr lang="en-US" sz="1300" b="1" dirty="0">
+                <a:solidFill>
+                  <a:srgbClr val="2D2D5A"/>
+                </a:solidFill>
+              </a:rPr>
+              <a:t>→</a:t>
+            </a:r>
             <a:endParaRPr lang="en-US" sz="1300" dirty="0"/>
           </a:p>
         </p:txBody>
       </p:sp>
       <p:sp>
         <p:nvSpPr>
-          <p:cNvPr id="8" name="Text 6"/>
-          <p:cNvSpPr/>
-          <p:nvPr/>
-        </p:nvSpPr>
-        <p:spPr>
-          <a:xfrm>
-            <a:off x="594360" y="2304288"/>
-            <a:ext cx="1664208" cy="2286000"/>
-          </a:xfrm>
-          <a:prstGeom prst="rect">
-            <a:avLst/>
-          </a:prstGeom>
-          <a:noFill/>
-          <a:ln/>
-        </p:spPr>
-        <p:txBody>
-          <a:bodyPr wrap="square" rtlCol="0" anchor="t"/>
-          <a:lstStyle/>
-          <a:p>
-            <a:pPr indent="0" marL="0">
-              <a:buNone/>
-            </a:pPr>
-            <a:r>
-              <a:rPr lang="en-US" sz="1050" dirty="0">
-                <a:solidFill>
-                  <a:srgbClr val="94A3B8"/>
-                </a:solidFill>
-                <a:latin typeface="Calibri" pitchFamily="34" charset="0"/>
-                <a:ea typeface="Calibri" pitchFamily="34" charset="-122"/>
-                <a:cs typeface="Calibri" pitchFamily="34" charset="-120"/>
-              </a:rPr>
-              <a:t>Camera + microphone stream captured at 30 fps. MediaPipe extracts gaze, blink rate, posture. Sounddevice measures ambient dB.</a:t>
-            </a:r>
-            <a:endParaRPr lang="en-US" sz="1050" dirty="0"/>
-          </a:p>
-        </p:txBody>
-      </p:sp>
-      <p:sp>
-        <p:nvSpPr>
-          <p:cNvPr id="9" name="Shape 7"/>
-          <p:cNvSpPr/>
-          <p:nvPr/>
-        </p:nvSpPr>
-        <p:spPr>
-          <a:xfrm>
-            <a:off x="2423160" y="3063240"/>
-            <a:ext cx="137160" cy="0"/>
-          </a:xfrm>
-          <a:prstGeom prst="line">
-            <a:avLst/>
-          </a:prstGeom>
-          <a:noFill/>
-          <a:ln w="25400">
-            <a:solidFill>
-              <a:srgbClr val="2D2D5A"/>
-            </a:solidFill>
-            <a:prstDash val="solid"/>
-          </a:ln>
-        </p:spPr>
-      </p:sp>
-      <p:sp>
-        <p:nvSpPr>
-          <p:cNvPr id="10" name="Text 8"/>
-          <p:cNvSpPr/>
-          <p:nvPr/>
-        </p:nvSpPr>
-        <p:spPr>
-          <a:xfrm>
-            <a:off x="2377440" y="2926080"/>
-            <a:ext cx="201168" cy="256032"/>
-          </a:xfrm>
-          <a:prstGeom prst="rect">
-            <a:avLst/>
-          </a:prstGeom>
-          <a:noFill/>
-          <a:ln/>
-        </p:spPr>
-        <p:txBody>
-          <a:bodyPr wrap="square" rtlCol="0" anchor="ctr"/>
-          <a:lstStyle/>
-          <a:p>
-            <a:pPr algn="ctr" indent="0" marL="0">
-              <a:buNone/>
-            </a:pPr>
-            <a:r>
-              <a:rPr lang="en-US" sz="1300" b="1" dirty="0">
-                <a:solidFill>
-                  <a:srgbClr val="2D2D5A"/>
-                </a:solidFill>
-              </a:rPr>
-              <a:t>→</a:t>
-            </a:r>
-            <a:endParaRPr lang="en-US" sz="1300" dirty="0"/>
-          </a:p>
-        </p:txBody>
-      </p:sp>
-      <p:sp>
-        <p:nvSpPr>
-          <p:cNvPr id="11" name="Shape 9"/>
-          <p:cNvSpPr/>
-          <p:nvPr/>
-        </p:nvSpPr>
-        <p:spPr>
-          <a:xfrm>
-            <a:off x="2542032" y="1417320"/>
-            <a:ext cx="1920240" cy="3337560"/>
+          <p:cNvPr id="10" name="Shape 8"/>
+          <p:cNvSpPr/>
+          <p:nvPr/>
+        </p:nvSpPr>
+        <p:spPr>
+          <a:xfrm>
+            <a:off x="2578608" y="1371600"/>
+            <a:ext cx="1993392" cy="3401568"/>
           </a:xfrm>
           <a:prstGeom prst="rect">
             <a:avLst/>
@@ -4067,14 +4571,14 @@
       </p:sp>
       <p:sp>
         <p:nvSpPr>
-          <p:cNvPr id="12" name="Shape 10"/>
-          <p:cNvSpPr/>
-          <p:nvPr/>
-        </p:nvSpPr>
-        <p:spPr>
-          <a:xfrm>
-            <a:off x="2542032" y="1417320"/>
-            <a:ext cx="1920240" cy="45720"/>
+          <p:cNvPr id="11" name="Shape 9"/>
+          <p:cNvSpPr/>
+          <p:nvPr/>
+        </p:nvSpPr>
+        <p:spPr>
+          <a:xfrm>
+            <a:off x="2578608" y="1371600"/>
+            <a:ext cx="1993392" cy="45720"/>
           </a:xfrm>
           <a:prstGeom prst="rect">
             <a:avLst/>
@@ -4092,14 +4596,14 @@
       </p:sp>
       <p:sp>
         <p:nvSpPr>
-          <p:cNvPr id="13" name="Text 11"/>
-          <p:cNvSpPr/>
-          <p:nvPr/>
-        </p:nvSpPr>
-        <p:spPr>
-          <a:xfrm>
-            <a:off x="2679192" y="1572768"/>
-            <a:ext cx="1645920" cy="411480"/>
+          <p:cNvPr id="12" name="Text 10"/>
+          <p:cNvSpPr/>
+          <p:nvPr/>
+        </p:nvSpPr>
+        <p:spPr>
+          <a:xfrm>
+            <a:off x="2715768" y="1508760"/>
+            <a:ext cx="1737360" cy="438912"/>
           </a:xfrm>
           <a:prstGeom prst="rect">
             <a:avLst/>
@@ -4131,14 +4635,14 @@
       </p:sp>
       <p:sp>
         <p:nvSpPr>
-          <p:cNvPr id="14" name="Text 12"/>
-          <p:cNvSpPr/>
-          <p:nvPr/>
-        </p:nvSpPr>
-        <p:spPr>
-          <a:xfrm>
-            <a:off x="2679192" y="1938528"/>
-            <a:ext cx="1645920" cy="320040"/>
+          <p:cNvPr id="13" name="Text 11"/>
+          <p:cNvSpPr/>
+          <p:nvPr/>
+        </p:nvSpPr>
+        <p:spPr>
+          <a:xfrm>
+            <a:off x="2715768" y="1920240"/>
+            <a:ext cx="1737360" cy="292608"/>
           </a:xfrm>
           <a:prstGeom prst="rect">
             <a:avLst/>
@@ -4154,7 +4658,7 @@
               <a:buNone/>
             </a:pPr>
             <a:r>
-              <a:rPr lang="en-US" sz="1300" b="1" spc="300" kern="0" dirty="0">
+              <a:rPr lang="en-US" sz="1200" b="1" spc="300" kern="0" dirty="0">
                 <a:solidFill>
                   <a:srgbClr val="FFFFFF"/>
                 </a:solidFill>
@@ -4164,118 +4668,95 @@
               </a:rPr>
               <a:t>SCORE</a:t>
             </a:r>
+            <a:endParaRPr lang="en-US" sz="1200" dirty="0"/>
+          </a:p>
+        </p:txBody>
+      </p:sp>
+      <p:sp>
+        <p:nvSpPr>
+          <p:cNvPr id="14" name="Text 12"/>
+          <p:cNvSpPr/>
+          <p:nvPr/>
+        </p:nvSpPr>
+        <p:spPr>
+          <a:xfrm>
+            <a:off x="2715768" y="2249424"/>
+            <a:ext cx="1755648" cy="2359152"/>
+          </a:xfrm>
+          <a:prstGeom prst="rect">
+            <a:avLst/>
+          </a:prstGeom>
+          <a:noFill/>
+          <a:ln/>
+        </p:spPr>
+        <p:txBody>
+          <a:bodyPr wrap="square" rtlCol="0" anchor="t"/>
+          <a:lstStyle/>
+          <a:p>
+            <a:pPr indent="0" marL="0">
+              <a:buNone/>
+            </a:pPr>
+            <a:r>
+              <a:rPr lang="en-US" sz="1050" dirty="0">
+                <a:solidFill>
+                  <a:srgbClr val="94A3B8"/>
+                </a:solidFill>
+                <a:latin typeface="Calibri" pitchFamily="34" charset="0"/>
+                <a:ea typeface="Calibri" pitchFamily="34" charset="-122"/>
+                <a:cs typeface="Calibri" pitchFamily="34" charset="-120"/>
+              </a:rPr>
+              <a:t>Per-second weighted focus score: gaze on screen × productive app active = 100%. Gaze on screen but unknown app = 60%. Gaze away = 0%.</a:t>
+            </a:r>
+            <a:endParaRPr lang="en-US" sz="1050" dirty="0"/>
+          </a:p>
+        </p:txBody>
+      </p:sp>
+      <p:sp>
+        <p:nvSpPr>
+          <p:cNvPr id="15" name="Text 13"/>
+          <p:cNvSpPr/>
+          <p:nvPr/>
+        </p:nvSpPr>
+        <p:spPr>
+          <a:xfrm>
+            <a:off x="4553712" y="2907792"/>
+            <a:ext cx="182880" cy="256032"/>
+          </a:xfrm>
+          <a:prstGeom prst="rect">
+            <a:avLst/>
+          </a:prstGeom>
+          <a:noFill/>
+          <a:ln/>
+        </p:spPr>
+        <p:txBody>
+          <a:bodyPr wrap="square" rtlCol="0" anchor="ctr"/>
+          <a:lstStyle/>
+          <a:p>
+            <a:pPr algn="ctr" indent="0" marL="0">
+              <a:buNone/>
+            </a:pPr>
+            <a:r>
+              <a:rPr lang="en-US" sz="1300" b="1" dirty="0">
+                <a:solidFill>
+                  <a:srgbClr val="2D2D5A"/>
+                </a:solidFill>
+              </a:rPr>
+              <a:t>→</a:t>
+            </a:r>
             <a:endParaRPr lang="en-US" sz="1300" dirty="0"/>
           </a:p>
         </p:txBody>
       </p:sp>
       <p:sp>
         <p:nvSpPr>
-          <p:cNvPr id="15" name="Text 13"/>
-          <p:cNvSpPr/>
-          <p:nvPr/>
-        </p:nvSpPr>
-        <p:spPr>
-          <a:xfrm>
-            <a:off x="2679192" y="2304288"/>
-            <a:ext cx="1664208" cy="2286000"/>
-          </a:xfrm>
-          <a:prstGeom prst="rect">
-            <a:avLst/>
-          </a:prstGeom>
-          <a:noFill/>
-          <a:ln/>
-        </p:spPr>
-        <p:txBody>
-          <a:bodyPr wrap="square" rtlCol="0" anchor="t"/>
-          <a:lstStyle/>
-          <a:p>
-            <a:pPr indent="0" marL="0">
-              <a:buNone/>
-            </a:pPr>
-            <a:r>
-              <a:rPr lang="en-US" sz="1050" dirty="0">
-                <a:solidFill>
-                  <a:srgbClr val="94A3B8"/>
-                </a:solidFill>
-                <a:latin typeface="Calibri" pitchFamily="34" charset="0"/>
-                <a:ea typeface="Calibri" pitchFamily="34" charset="-122"/>
-                <a:cs typeface="Calibri" pitchFamily="34" charset="-120"/>
-              </a:rPr>
-              <a:t>Per-second composite focus score: gaze direction × app productivity × posture alignment.</a:t>
-            </a:r>
-            <a:endParaRPr lang="en-US" sz="1050" dirty="0"/>
-          </a:p>
-        </p:txBody>
-      </p:sp>
-      <p:sp>
-        <p:nvSpPr>
           <p:cNvPr id="16" name="Shape 14"/>
           <p:cNvSpPr/>
           <p:nvPr/>
         </p:nvSpPr>
         <p:spPr>
           <a:xfrm>
-            <a:off x="4507992" y="3063240"/>
-            <a:ext cx="137160" cy="0"/>
-          </a:xfrm>
-          <a:prstGeom prst="line">
-            <a:avLst/>
-          </a:prstGeom>
-          <a:noFill/>
-          <a:ln w="25400">
-            <a:solidFill>
-              <a:srgbClr val="2D2D5A"/>
-            </a:solidFill>
-            <a:prstDash val="solid"/>
-          </a:ln>
-        </p:spPr>
-      </p:sp>
-      <p:sp>
-        <p:nvSpPr>
-          <p:cNvPr id="17" name="Text 15"/>
-          <p:cNvSpPr/>
-          <p:nvPr/>
-        </p:nvSpPr>
-        <p:spPr>
-          <a:xfrm>
-            <a:off x="4462272" y="2926080"/>
-            <a:ext cx="201168" cy="256032"/>
-          </a:xfrm>
-          <a:prstGeom prst="rect">
-            <a:avLst/>
-          </a:prstGeom>
-          <a:noFill/>
-          <a:ln/>
-        </p:spPr>
-        <p:txBody>
-          <a:bodyPr wrap="square" rtlCol="0" anchor="ctr"/>
-          <a:lstStyle/>
-          <a:p>
-            <a:pPr algn="ctr" indent="0" marL="0">
-              <a:buNone/>
-            </a:pPr>
-            <a:r>
-              <a:rPr lang="en-US" sz="1300" b="1" dirty="0">
-                <a:solidFill>
-                  <a:srgbClr val="2D2D5A"/>
-                </a:solidFill>
-              </a:rPr>
-              <a:t>→</a:t>
-            </a:r>
-            <a:endParaRPr lang="en-US" sz="1300" dirty="0"/>
-          </a:p>
-        </p:txBody>
-      </p:sp>
-      <p:sp>
-        <p:nvSpPr>
-          <p:cNvPr id="18" name="Shape 16"/>
-          <p:cNvSpPr/>
-          <p:nvPr/>
-        </p:nvSpPr>
-        <p:spPr>
-          <a:xfrm>
-            <a:off x="4626864" y="1417320"/>
-            <a:ext cx="1920240" cy="3337560"/>
+            <a:off x="4700016" y="1371600"/>
+            <a:ext cx="1993392" cy="3401568"/>
           </a:xfrm>
           <a:prstGeom prst="rect">
             <a:avLst/>
@@ -4293,14 +4774,14 @@
       </p:sp>
       <p:sp>
         <p:nvSpPr>
-          <p:cNvPr id="19" name="Shape 17"/>
-          <p:cNvSpPr/>
-          <p:nvPr/>
-        </p:nvSpPr>
-        <p:spPr>
-          <a:xfrm>
-            <a:off x="4626864" y="1417320"/>
-            <a:ext cx="1920240" cy="45720"/>
+          <p:cNvPr id="17" name="Shape 15"/>
+          <p:cNvSpPr/>
+          <p:nvPr/>
+        </p:nvSpPr>
+        <p:spPr>
+          <a:xfrm>
+            <a:off x="4700016" y="1371600"/>
+            <a:ext cx="1993392" cy="45720"/>
           </a:xfrm>
           <a:prstGeom prst="rect">
             <a:avLst/>
@@ -4318,14 +4799,14 @@
       </p:sp>
       <p:sp>
         <p:nvSpPr>
-          <p:cNvPr id="20" name="Text 18"/>
-          <p:cNvSpPr/>
-          <p:nvPr/>
-        </p:nvSpPr>
-        <p:spPr>
-          <a:xfrm>
-            <a:off x="4764024" y="1572768"/>
-            <a:ext cx="1645920" cy="411480"/>
+          <p:cNvPr id="18" name="Text 16"/>
+          <p:cNvSpPr/>
+          <p:nvPr/>
+        </p:nvSpPr>
+        <p:spPr>
+          <a:xfrm>
+            <a:off x="4837176" y="1508760"/>
+            <a:ext cx="1737360" cy="438912"/>
           </a:xfrm>
           <a:prstGeom prst="rect">
             <a:avLst/>
@@ -4357,14 +4838,14 @@
       </p:sp>
       <p:sp>
         <p:nvSpPr>
-          <p:cNvPr id="21" name="Text 19"/>
-          <p:cNvSpPr/>
-          <p:nvPr/>
-        </p:nvSpPr>
-        <p:spPr>
-          <a:xfrm>
-            <a:off x="4764024" y="1938528"/>
-            <a:ext cx="1645920" cy="320040"/>
+          <p:cNvPr id="19" name="Text 17"/>
+          <p:cNvSpPr/>
+          <p:nvPr/>
+        </p:nvSpPr>
+        <p:spPr>
+          <a:xfrm>
+            <a:off x="4837176" y="1920240"/>
+            <a:ext cx="1737360" cy="292608"/>
           </a:xfrm>
           <a:prstGeom prst="rect">
             <a:avLst/>
@@ -4380,7 +4861,7 @@
               <a:buNone/>
             </a:pPr>
             <a:r>
-              <a:rPr lang="en-US" sz="1300" b="1" spc="300" kern="0" dirty="0">
+              <a:rPr lang="en-US" sz="1200" b="1" spc="300" kern="0" dirty="0">
                 <a:solidFill>
                   <a:srgbClr val="FFFFFF"/>
                 </a:solidFill>
@@ -4390,118 +4871,95 @@
               </a:rPr>
               <a:t>ADAPT</a:t>
             </a:r>
+            <a:endParaRPr lang="en-US" sz="1200" dirty="0"/>
+          </a:p>
+        </p:txBody>
+      </p:sp>
+      <p:sp>
+        <p:nvSpPr>
+          <p:cNvPr id="20" name="Text 18"/>
+          <p:cNvSpPr/>
+          <p:nvPr/>
+        </p:nvSpPr>
+        <p:spPr>
+          <a:xfrm>
+            <a:off x="4837176" y="2249424"/>
+            <a:ext cx="1755648" cy="2359152"/>
+          </a:xfrm>
+          <a:prstGeom prst="rect">
+            <a:avLst/>
+          </a:prstGeom>
+          <a:noFill/>
+          <a:ln/>
+        </p:spPr>
+        <p:txBody>
+          <a:bodyPr wrap="square" rtlCol="0" anchor="t"/>
+          <a:lstStyle/>
+          <a:p>
+            <a:pPr indent="0" marL="0">
+              <a:buNone/>
+            </a:pPr>
+            <a:r>
+              <a:rPr lang="en-US" sz="1050" dirty="0">
+                <a:solidFill>
+                  <a:srgbClr val="94A3B8"/>
+                </a:solidFill>
+                <a:latin typeface="Calibri" pitchFamily="34" charset="0"/>
+                <a:ea typeface="Calibri" pitchFamily="34" charset="-122"/>
+                <a:cs typeface="Calibri" pitchFamily="34" charset="-120"/>
+              </a:rPr>
+              <a:t>Rule engine fires every 3 seconds. Triggers early breaks, flow extensions, posture nudges, and phone alerts based on real-time thresholds.</a:t>
+            </a:r>
+            <a:endParaRPr lang="en-US" sz="1050" dirty="0"/>
+          </a:p>
+        </p:txBody>
+      </p:sp>
+      <p:sp>
+        <p:nvSpPr>
+          <p:cNvPr id="21" name="Text 19"/>
+          <p:cNvSpPr/>
+          <p:nvPr/>
+        </p:nvSpPr>
+        <p:spPr>
+          <a:xfrm>
+            <a:off x="6675120" y="2907792"/>
+            <a:ext cx="182880" cy="256032"/>
+          </a:xfrm>
+          <a:prstGeom prst="rect">
+            <a:avLst/>
+          </a:prstGeom>
+          <a:noFill/>
+          <a:ln/>
+        </p:spPr>
+        <p:txBody>
+          <a:bodyPr wrap="square" rtlCol="0" anchor="ctr"/>
+          <a:lstStyle/>
+          <a:p>
+            <a:pPr algn="ctr" indent="0" marL="0">
+              <a:buNone/>
+            </a:pPr>
+            <a:r>
+              <a:rPr lang="en-US" sz="1300" b="1" dirty="0">
+                <a:solidFill>
+                  <a:srgbClr val="2D2D5A"/>
+                </a:solidFill>
+              </a:rPr>
+              <a:t>→</a:t>
+            </a:r>
             <a:endParaRPr lang="en-US" sz="1300" dirty="0"/>
           </a:p>
         </p:txBody>
       </p:sp>
       <p:sp>
         <p:nvSpPr>
-          <p:cNvPr id="22" name="Text 20"/>
-          <p:cNvSpPr/>
-          <p:nvPr/>
-        </p:nvSpPr>
-        <p:spPr>
-          <a:xfrm>
-            <a:off x="4764024" y="2304288"/>
-            <a:ext cx="1664208" cy="2286000"/>
-          </a:xfrm>
-          <a:prstGeom prst="rect">
-            <a:avLst/>
-          </a:prstGeom>
-          <a:noFill/>
-          <a:ln/>
-        </p:spPr>
-        <p:txBody>
-          <a:bodyPr wrap="square" rtlCol="0" anchor="t"/>
-          <a:lstStyle/>
-          <a:p>
-            <a:pPr indent="0" marL="0">
-              <a:buNone/>
-            </a:pPr>
-            <a:r>
-              <a:rPr lang="en-US" sz="1050" dirty="0">
-                <a:solidFill>
-                  <a:srgbClr val="94A3B8"/>
-                </a:solidFill>
-                <a:latin typeface="Calibri" pitchFamily="34" charset="0"/>
-                <a:ea typeface="Calibri" pitchFamily="34" charset="-122"/>
-                <a:cs typeface="Calibri" pitchFamily="34" charset="-120"/>
-              </a:rPr>
-              <a:t>Rule engine triggers early breaks (focus &lt; 35%), flow extensions (focus &gt; 80%), and posture nudges — all with logged reasons.</a:t>
-            </a:r>
-            <a:endParaRPr lang="en-US" sz="1050" dirty="0"/>
-          </a:p>
-        </p:txBody>
-      </p:sp>
-      <p:sp>
-        <p:nvSpPr>
-          <p:cNvPr id="23" name="Shape 21"/>
-          <p:cNvSpPr/>
-          <p:nvPr/>
-        </p:nvSpPr>
-        <p:spPr>
-          <a:xfrm>
-            <a:off x="6592824" y="3063240"/>
-            <a:ext cx="137160" cy="0"/>
-          </a:xfrm>
-          <a:prstGeom prst="line">
-            <a:avLst/>
-          </a:prstGeom>
-          <a:noFill/>
-          <a:ln w="25400">
-            <a:solidFill>
-              <a:srgbClr val="2D2D5A"/>
-            </a:solidFill>
-            <a:prstDash val="solid"/>
-          </a:ln>
-        </p:spPr>
-      </p:sp>
-      <p:sp>
-        <p:nvSpPr>
-          <p:cNvPr id="24" name="Text 22"/>
-          <p:cNvSpPr/>
-          <p:nvPr/>
-        </p:nvSpPr>
-        <p:spPr>
-          <a:xfrm>
-            <a:off x="6547104" y="2926080"/>
-            <a:ext cx="201168" cy="256032"/>
-          </a:xfrm>
-          <a:prstGeom prst="rect">
-            <a:avLst/>
-          </a:prstGeom>
-          <a:noFill/>
-          <a:ln/>
-        </p:spPr>
-        <p:txBody>
-          <a:bodyPr wrap="square" rtlCol="0" anchor="ctr"/>
-          <a:lstStyle/>
-          <a:p>
-            <a:pPr algn="ctr" indent="0" marL="0">
-              <a:buNone/>
-            </a:pPr>
-            <a:r>
-              <a:rPr lang="en-US" sz="1300" b="1" dirty="0">
-                <a:solidFill>
-                  <a:srgbClr val="2D2D5A"/>
-                </a:solidFill>
-              </a:rPr>
-              <a:t>→</a:t>
-            </a:r>
-            <a:endParaRPr lang="en-US" sz="1300" dirty="0"/>
-          </a:p>
-        </p:txBody>
-      </p:sp>
-      <p:sp>
-        <p:nvSpPr>
-          <p:cNvPr id="25" name="Shape 23"/>
-          <p:cNvSpPr/>
-          <p:nvPr/>
-        </p:nvSpPr>
-        <p:spPr>
-          <a:xfrm>
-            <a:off x="6711696" y="1417320"/>
-            <a:ext cx="1920240" cy="3337560"/>
+          <p:cNvPr id="22" name="Shape 20"/>
+          <p:cNvSpPr/>
+          <p:nvPr/>
+        </p:nvSpPr>
+        <p:spPr>
+          <a:xfrm>
+            <a:off x="6821424" y="1371600"/>
+            <a:ext cx="1993392" cy="3401568"/>
           </a:xfrm>
           <a:prstGeom prst="rect">
             <a:avLst/>
@@ -4519,14 +4977,14 @@
       </p:sp>
       <p:sp>
         <p:nvSpPr>
-          <p:cNvPr id="26" name="Shape 24"/>
-          <p:cNvSpPr/>
-          <p:nvPr/>
-        </p:nvSpPr>
-        <p:spPr>
-          <a:xfrm>
-            <a:off x="6711696" y="1417320"/>
-            <a:ext cx="1920240" cy="45720"/>
+          <p:cNvPr id="23" name="Shape 21"/>
+          <p:cNvSpPr/>
+          <p:nvPr/>
+        </p:nvSpPr>
+        <p:spPr>
+          <a:xfrm>
+            <a:off x="6821424" y="1371600"/>
+            <a:ext cx="1993392" cy="45720"/>
           </a:xfrm>
           <a:prstGeom prst="rect">
             <a:avLst/>
@@ -4544,14 +5002,14 @@
       </p:sp>
       <p:sp>
         <p:nvSpPr>
-          <p:cNvPr id="27" name="Text 25"/>
-          <p:cNvSpPr/>
-          <p:nvPr/>
-        </p:nvSpPr>
-        <p:spPr>
-          <a:xfrm>
-            <a:off x="6848856" y="1572768"/>
-            <a:ext cx="1645920" cy="411480"/>
+          <p:cNvPr id="24" name="Text 22"/>
+          <p:cNvSpPr/>
+          <p:nvPr/>
+        </p:nvSpPr>
+        <p:spPr>
+          <a:xfrm>
+            <a:off x="6958584" y="1508760"/>
+            <a:ext cx="1737360" cy="438912"/>
           </a:xfrm>
           <a:prstGeom prst="rect">
             <a:avLst/>
@@ -4583,14 +5041,14 @@
       </p:sp>
       <p:sp>
         <p:nvSpPr>
-          <p:cNvPr id="28" name="Text 26"/>
-          <p:cNvSpPr/>
-          <p:nvPr/>
-        </p:nvSpPr>
-        <p:spPr>
-          <a:xfrm>
-            <a:off x="6848856" y="1938528"/>
-            <a:ext cx="1645920" cy="320040"/>
+          <p:cNvPr id="25" name="Text 23"/>
+          <p:cNvSpPr/>
+          <p:nvPr/>
+        </p:nvSpPr>
+        <p:spPr>
+          <a:xfrm>
+            <a:off x="6958584" y="1920240"/>
+            <a:ext cx="1737360" cy="292608"/>
           </a:xfrm>
           <a:prstGeom prst="rect">
             <a:avLst/>
@@ -4606,7 +5064,7 @@
               <a:buNone/>
             </a:pPr>
             <a:r>
-              <a:rPr lang="en-US" sz="1300" b="1" spc="300" kern="0" dirty="0">
+              <a:rPr lang="en-US" sz="1200" b="1" spc="300" kern="0" dirty="0">
                 <a:solidFill>
                   <a:srgbClr val="FFFFFF"/>
                 </a:solidFill>
@@ -4616,20 +5074,20 @@
               </a:rPr>
               <a:t>COACH</a:t>
             </a:r>
-            <a:endParaRPr lang="en-US" sz="1300" dirty="0"/>
-          </a:p>
-        </p:txBody>
-      </p:sp>
-      <p:sp>
-        <p:nvSpPr>
-          <p:cNvPr id="29" name="Text 27"/>
-          <p:cNvSpPr/>
-          <p:nvPr/>
-        </p:nvSpPr>
-        <p:spPr>
-          <a:xfrm>
-            <a:off x="6848856" y="2304288"/>
-            <a:ext cx="1664208" cy="2286000"/>
+            <a:endParaRPr lang="en-US" sz="1200" dirty="0"/>
+          </a:p>
+        </p:txBody>
+      </p:sp>
+      <p:sp>
+        <p:nvSpPr>
+          <p:cNvPr id="26" name="Text 24"/>
+          <p:cNvSpPr/>
+          <p:nvPr/>
+        </p:nvSpPr>
+        <p:spPr>
+          <a:xfrm>
+            <a:off x="6958584" y="2249424"/>
+            <a:ext cx="1755648" cy="2359152"/>
           </a:xfrm>
           <a:prstGeom prst="rect">
             <a:avLst/>
@@ -4653,48 +5111,9 @@
                 <a:ea typeface="Calibri" pitchFamily="34" charset="-122"/>
                 <a:cs typeface="Calibri" pitchFamily="34" charset="-120"/>
               </a:rPr>
-              <a:t>Gemini 2.5 Flash generates personalized 2-bullet coaching messages async. Fires as macOS notification + camera overlay.</a:t>
+              <a:t>Gemini 2.5 Flash generates 2-bullet personalized coaching messages in async daemon threads. Fires as camera overlay + macOS notification.</a:t>
             </a:r>
             <a:endParaRPr lang="en-US" sz="1050" dirty="0"/>
-          </a:p>
-        </p:txBody>
-      </p:sp>
-      <p:sp>
-        <p:nvSpPr>
-          <p:cNvPr id="30" name="Text 28"/>
-          <p:cNvSpPr/>
-          <p:nvPr/>
-        </p:nvSpPr>
-        <p:spPr>
-          <a:xfrm>
-            <a:off x="457200" y="4754880"/>
-            <a:ext cx="8229600" cy="256032"/>
-          </a:xfrm>
-          <a:prstGeom prst="rect">
-            <a:avLst/>
-          </a:prstGeom>
-          <a:noFill/>
-          <a:ln/>
-        </p:spPr>
-        <p:txBody>
-          <a:bodyPr wrap="square" rtlCol="0" anchor="ctr"/>
-          <a:lstStyle/>
-          <a:p>
-            <a:pPr algn="ctr" indent="0" marL="0">
-              <a:buNone/>
-            </a:pPr>
-            <a:r>
-              <a:rPr lang="en-US" sz="1100" i="1" dirty="0">
-                <a:solidFill>
-                  <a:srgbClr val="4B5563"/>
-                </a:solidFill>
-                <a:latin typeface="Calibri" pitchFamily="34" charset="0"/>
-                <a:ea typeface="Calibri" pitchFamily="34" charset="-122"/>
-                <a:cs typeface="Calibri" pitchFamily="34" charset="-120"/>
-              </a:rPr>
-              <a:t>Feedback loop runs continuously — every 3 seconds during work blocks</a:t>
-            </a:r>
-            <a:endParaRPr lang="en-US" sz="1100" dirty="0"/>
           </a:p>
         </p:txBody>
       </p:sp>
@@ -4738,8 +5157,8 @@
         </p:nvSpPr>
         <p:spPr>
           <a:xfrm>
-            <a:off x="457200" y="274320"/>
-            <a:ext cx="8229600" cy="548640"/>
+            <a:off x="457200" y="256032"/>
+            <a:ext cx="8229600" cy="502920"/>
           </a:xfrm>
           <a:prstGeom prst="rect">
             <a:avLst/>
@@ -4755,7 +5174,7 @@
               <a:buNone/>
             </a:pPr>
             <a:r>
-              <a:rPr lang="en-US" sz="3200" b="1" dirty="0">
+              <a:rPr lang="en-US" sz="3000" b="1" dirty="0">
                 <a:solidFill>
                   <a:srgbClr val="FFFFFF"/>
                 </a:solidFill>
@@ -4765,7 +5184,7 @@
               </a:rPr>
               <a:t>Technical Architecture</a:t>
             </a:r>
-            <a:endParaRPr lang="en-US" sz="3200" dirty="0"/>
+            <a:endParaRPr lang="en-US" sz="3000" dirty="0"/>
           </a:p>
         </p:txBody>
       </p:sp>
@@ -4777,8 +5196,8 @@
         </p:nvSpPr>
         <p:spPr>
           <a:xfrm>
-            <a:off x="457200" y="960120"/>
-            <a:ext cx="2377440" cy="320040"/>
+            <a:off x="457200" y="932688"/>
+            <a:ext cx="2560320" cy="292608"/>
           </a:xfrm>
           <a:prstGeom prst="rect">
             <a:avLst/>
@@ -4794,7 +5213,7 @@
               <a:buNone/>
             </a:pPr>
             <a:r>
-              <a:rPr lang="en-US" sz="1100" b="1" spc="300" kern="0" dirty="0">
+              <a:rPr lang="en-US" sz="1000" b="1" spc="300" kern="0" dirty="0">
                 <a:solidFill>
                   <a:srgbClr val="06B6D4"/>
                 </a:solidFill>
@@ -4804,7 +5223,7 @@
               </a:rPr>
               <a:t>INPUTS</a:t>
             </a:r>
-            <a:endParaRPr lang="en-US" sz="1100" dirty="0"/>
+            <a:endParaRPr lang="en-US" sz="1000" dirty="0"/>
           </a:p>
         </p:txBody>
       </p:sp>
@@ -4816,8 +5235,8 @@
         </p:nvSpPr>
         <p:spPr>
           <a:xfrm>
-            <a:off x="457200" y="1325880"/>
-            <a:ext cx="2560320" cy="576072"/>
+            <a:off x="457200" y="1280160"/>
+            <a:ext cx="2606040" cy="566928"/>
           </a:xfrm>
           <a:prstGeom prst="rect">
             <a:avLst/>
@@ -4841,8 +5260,8 @@
         </p:nvSpPr>
         <p:spPr>
           <a:xfrm>
-            <a:off x="457200" y="1325880"/>
-            <a:ext cx="2560320" cy="45720"/>
+            <a:off x="457200" y="1280160"/>
+            <a:ext cx="2606040" cy="45720"/>
           </a:xfrm>
           <a:prstGeom prst="rect">
             <a:avLst/>
@@ -4866,8 +5285,8 @@
         </p:nvSpPr>
         <p:spPr>
           <a:xfrm>
-            <a:off x="594360" y="1389888"/>
-            <a:ext cx="2286000" cy="256032"/>
+            <a:off x="585216" y="1344168"/>
+            <a:ext cx="2331720" cy="246888"/>
           </a:xfrm>
           <a:prstGeom prst="rect">
             <a:avLst/>
@@ -4883,7 +5302,7 @@
               <a:buNone/>
             </a:pPr>
             <a:r>
-              <a:rPr lang="en-US" sz="1100" b="1" dirty="0">
+              <a:rPr lang="en-US" sz="1050" b="1" dirty="0">
                 <a:solidFill>
                   <a:srgbClr val="E2E8F0"/>
                 </a:solidFill>
@@ -4893,7 +5312,7 @@
               </a:rPr>
               <a:t>MediaPipe FaceMesh</a:t>
             </a:r>
-            <a:endParaRPr lang="en-US" sz="1100" dirty="0"/>
+            <a:endParaRPr lang="en-US" sz="1050" dirty="0"/>
           </a:p>
         </p:txBody>
       </p:sp>
@@ -4905,8 +5324,8 @@
         </p:nvSpPr>
         <p:spPr>
           <a:xfrm>
-            <a:off x="594360" y="1636776"/>
-            <a:ext cx="2286000" cy="201168"/>
+            <a:off x="585216" y="1581912"/>
+            <a:ext cx="2331720" cy="201168"/>
           </a:xfrm>
           <a:prstGeom prst="rect">
             <a:avLst/>
@@ -4930,7 +5349,7 @@
                 <a:ea typeface="Calibri" pitchFamily="34" charset="-122"/>
                 <a:cs typeface="Calibri" pitchFamily="34" charset="-120"/>
               </a:rPr>
-              <a:t>478 landmarks → iris position, blink EAR</a:t>
+              <a:t>478 landmarks → iris x, blink EAR ratio</a:t>
             </a:r>
             <a:endParaRPr lang="en-US" sz="900" dirty="0"/>
           </a:p>
@@ -4944,8 +5363,8 @@
         </p:nvSpPr>
         <p:spPr>
           <a:xfrm>
-            <a:off x="457200" y="1993392"/>
-            <a:ext cx="2560320" cy="576072"/>
+            <a:off x="457200" y="1938528"/>
+            <a:ext cx="2606040" cy="566928"/>
           </a:xfrm>
           <a:prstGeom prst="rect">
             <a:avLst/>
@@ -4969,8 +5388,8 @@
         </p:nvSpPr>
         <p:spPr>
           <a:xfrm>
-            <a:off x="457200" y="1993392"/>
-            <a:ext cx="2560320" cy="45720"/>
+            <a:off x="457200" y="1938528"/>
+            <a:ext cx="2606040" cy="45720"/>
           </a:xfrm>
           <a:prstGeom prst="rect">
             <a:avLst/>
@@ -4994,8 +5413,8 @@
         </p:nvSpPr>
         <p:spPr>
           <a:xfrm>
-            <a:off x="594360" y="2057400"/>
-            <a:ext cx="2286000" cy="256032"/>
+            <a:off x="585216" y="2002536"/>
+            <a:ext cx="2331720" cy="246888"/>
           </a:xfrm>
           <a:prstGeom prst="rect">
             <a:avLst/>
@@ -5011,7 +5430,7 @@
               <a:buNone/>
             </a:pPr>
             <a:r>
-              <a:rPr lang="en-US" sz="1100" b="1" dirty="0">
+              <a:rPr lang="en-US" sz="1050" b="1" dirty="0">
                 <a:solidFill>
                   <a:srgbClr val="E2E8F0"/>
                 </a:solidFill>
@@ -5021,7 +5440,7 @@
               </a:rPr>
               <a:t>MediaPipe Pose</a:t>
             </a:r>
-            <a:endParaRPr lang="en-US" sz="1100" dirty="0"/>
+            <a:endParaRPr lang="en-US" sz="1050" dirty="0"/>
           </a:p>
         </p:txBody>
       </p:sp>
@@ -5033,8 +5452,8 @@
         </p:nvSpPr>
         <p:spPr>
           <a:xfrm>
-            <a:off x="594360" y="2304288"/>
-            <a:ext cx="2286000" cy="201168"/>
+            <a:off x="585216" y="2240280"/>
+            <a:ext cx="2331720" cy="201168"/>
           </a:xfrm>
           <a:prstGeom prst="rect">
             <a:avLst/>
@@ -5058,7 +5477,7 @@
                 <a:ea typeface="Calibri" pitchFamily="34" charset="-122"/>
                 <a:cs typeface="Calibri" pitchFamily="34" charset="-120"/>
               </a:rPr>
-              <a:t>Shoulder Y-delta vs calibrated baseline</a:t>
+              <a:t>Shoulder Y vs calibrated baseline</a:t>
             </a:r>
             <a:endParaRPr lang="en-US" sz="900" dirty="0"/>
           </a:p>
@@ -5072,8 +5491,8 @@
         </p:nvSpPr>
         <p:spPr>
           <a:xfrm>
-            <a:off x="457200" y="2660904"/>
-            <a:ext cx="2560320" cy="576072"/>
+            <a:off x="457200" y="2596896"/>
+            <a:ext cx="2606040" cy="566928"/>
           </a:xfrm>
           <a:prstGeom prst="rect">
             <a:avLst/>
@@ -5097,8 +5516,8 @@
         </p:nvSpPr>
         <p:spPr>
           <a:xfrm>
-            <a:off x="457200" y="2660904"/>
-            <a:ext cx="2560320" cy="45720"/>
+            <a:off x="457200" y="2596896"/>
+            <a:ext cx="2606040" cy="45720"/>
           </a:xfrm>
           <a:prstGeom prst="rect">
             <a:avLst/>
@@ -5122,8 +5541,8 @@
         </p:nvSpPr>
         <p:spPr>
           <a:xfrm>
-            <a:off x="594360" y="2724912"/>
-            <a:ext cx="2286000" cy="256032"/>
+            <a:off x="585216" y="2660904"/>
+            <a:ext cx="2331720" cy="246888"/>
           </a:xfrm>
           <a:prstGeom prst="rect">
             <a:avLst/>
@@ -5139,7 +5558,7 @@
               <a:buNone/>
             </a:pPr>
             <a:r>
-              <a:rPr lang="en-US" sz="1100" b="1" dirty="0">
+              <a:rPr lang="en-US" sz="1050" b="1" dirty="0">
                 <a:solidFill>
                   <a:srgbClr val="E2E8F0"/>
                 </a:solidFill>
@@ -5149,7 +5568,7 @@
               </a:rPr>
               <a:t>MediaPipe Hands</a:t>
             </a:r>
-            <a:endParaRPr lang="en-US" sz="1100" dirty="0"/>
+            <a:endParaRPr lang="en-US" sz="1050" dirty="0"/>
           </a:p>
         </p:txBody>
       </p:sp>
@@ -5161,8 +5580,8 @@
         </p:nvSpPr>
         <p:spPr>
           <a:xfrm>
-            <a:off x="594360" y="2971800"/>
-            <a:ext cx="2286000" cy="201168"/>
+            <a:off x="585216" y="2898648"/>
+            <a:ext cx="2331720" cy="201168"/>
           </a:xfrm>
           <a:prstGeom prst="rect">
             <a:avLst/>
@@ -5186,7 +5605,7 @@
                 <a:ea typeface="Calibri" pitchFamily="34" charset="-122"/>
                 <a:cs typeface="Calibri" pitchFamily="34" charset="-120"/>
               </a:rPr>
-              <a:t>3s sustained visibility = phone detected</a:t>
+              <a:t>3s sustained = phone detected</a:t>
             </a:r>
             <a:endParaRPr lang="en-US" sz="900" dirty="0"/>
           </a:p>
@@ -5200,8 +5619,8 @@
         </p:nvSpPr>
         <p:spPr>
           <a:xfrm>
-            <a:off x="457200" y="3328416"/>
-            <a:ext cx="2560320" cy="576072"/>
+            <a:off x="457200" y="3255264"/>
+            <a:ext cx="2606040" cy="566928"/>
           </a:xfrm>
           <a:prstGeom prst="rect">
             <a:avLst/>
@@ -5225,8 +5644,8 @@
         </p:nvSpPr>
         <p:spPr>
           <a:xfrm>
-            <a:off x="457200" y="3328416"/>
-            <a:ext cx="2560320" cy="45720"/>
+            <a:off x="457200" y="3255264"/>
+            <a:ext cx="2606040" cy="45720"/>
           </a:xfrm>
           <a:prstGeom prst="rect">
             <a:avLst/>
@@ -5250,8 +5669,8 @@
         </p:nvSpPr>
         <p:spPr>
           <a:xfrm>
-            <a:off x="594360" y="3392424"/>
-            <a:ext cx="2286000" cy="256032"/>
+            <a:off x="585216" y="3319272"/>
+            <a:ext cx="2331720" cy="246888"/>
           </a:xfrm>
           <a:prstGeom prst="rect">
             <a:avLst/>
@@ -5267,7 +5686,7 @@
               <a:buNone/>
             </a:pPr>
             <a:r>
-              <a:rPr lang="en-US" sz="1100" b="1" dirty="0">
+              <a:rPr lang="en-US" sz="1050" b="1" dirty="0">
                 <a:solidFill>
                   <a:srgbClr val="E2E8F0"/>
                 </a:solidFill>
@@ -5277,7 +5696,7 @@
               </a:rPr>
               <a:t>sounddevice mic</a:t>
             </a:r>
-            <a:endParaRPr lang="en-US" sz="1100" dirty="0"/>
+            <a:endParaRPr lang="en-US" sz="1050" dirty="0"/>
           </a:p>
         </p:txBody>
       </p:sp>
@@ -5289,8 +5708,8 @@
         </p:nvSpPr>
         <p:spPr>
           <a:xfrm>
-            <a:off x="594360" y="3639312"/>
-            <a:ext cx="2286000" cy="201168"/>
+            <a:off x="585216" y="3557016"/>
+            <a:ext cx="2331720" cy="201168"/>
           </a:xfrm>
           <a:prstGeom prst="rect">
             <a:avLst/>
@@ -5314,7 +5733,7 @@
                 <a:ea typeface="Calibri" pitchFamily="34" charset="-122"/>
                 <a:cs typeface="Calibri" pitchFamily="34" charset="-120"/>
               </a:rPr>
-              <a:t>RMS → dB SPL, background thread</a:t>
+              <a:t>RMS→dB, background thread</a:t>
             </a:r>
             <a:endParaRPr lang="en-US" sz="900" dirty="0"/>
           </a:p>
@@ -5328,8 +5747,8 @@
         </p:nvSpPr>
         <p:spPr>
           <a:xfrm>
-            <a:off x="457200" y="3995928"/>
-            <a:ext cx="2560320" cy="576072"/>
+            <a:off x="457200" y="3913632"/>
+            <a:ext cx="2606040" cy="566928"/>
           </a:xfrm>
           <a:prstGeom prst="rect">
             <a:avLst/>
@@ -5353,8 +5772,8 @@
         </p:nvSpPr>
         <p:spPr>
           <a:xfrm>
-            <a:off x="457200" y="3995928"/>
-            <a:ext cx="2560320" cy="45720"/>
+            <a:off x="457200" y="3913632"/>
+            <a:ext cx="2606040" cy="45720"/>
           </a:xfrm>
           <a:prstGeom prst="rect">
             <a:avLst/>
@@ -5378,8 +5797,8 @@
         </p:nvSpPr>
         <p:spPr>
           <a:xfrm>
-            <a:off x="594360" y="4059936"/>
-            <a:ext cx="2286000" cy="256032"/>
+            <a:off x="585216" y="3977640"/>
+            <a:ext cx="2331720" cy="246888"/>
           </a:xfrm>
           <a:prstGeom prst="rect">
             <a:avLst/>
@@ -5395,7 +5814,7 @@
               <a:buNone/>
             </a:pPr>
             <a:r>
-              <a:rPr lang="en-US" sz="1100" b="1" dirty="0">
+              <a:rPr lang="en-US" sz="1050" b="1" dirty="0">
                 <a:solidFill>
                   <a:srgbClr val="E2E8F0"/>
                 </a:solidFill>
@@ -5405,7 +5824,7 @@
               </a:rPr>
               <a:t>AppKit NSWorkspace</a:t>
             </a:r>
-            <a:endParaRPr lang="en-US" sz="1100" dirty="0"/>
+            <a:endParaRPr lang="en-US" sz="1050" dirty="0"/>
           </a:p>
         </p:txBody>
       </p:sp>
@@ -5417,8 +5836,8 @@
         </p:nvSpPr>
         <p:spPr>
           <a:xfrm>
-            <a:off x="594360" y="4306824"/>
-            <a:ext cx="2286000" cy="201168"/>
+            <a:off x="585216" y="4215384"/>
+            <a:ext cx="2331720" cy="201168"/>
           </a:xfrm>
           <a:prstGeom prst="rect">
             <a:avLst/>
@@ -5442,7 +5861,7 @@
                 <a:ea typeface="Calibri" pitchFamily="34" charset="-122"/>
                 <a:cs typeface="Calibri" pitchFamily="34" charset="-120"/>
               </a:rPr>
-              <a:t>Active app polled every 2s (bg thread)</a:t>
+              <a:t>Active app polled every 2s</a:t>
             </a:r>
             <a:endParaRPr lang="en-US" sz="900" dirty="0"/>
           </a:p>
@@ -5456,8 +5875,8 @@
         </p:nvSpPr>
         <p:spPr>
           <a:xfrm>
-            <a:off x="3291840" y="960120"/>
-            <a:ext cx="2743200" cy="320040"/>
+            <a:off x="3310128" y="932688"/>
+            <a:ext cx="2743200" cy="292608"/>
           </a:xfrm>
           <a:prstGeom prst="rect">
             <a:avLst/>
@@ -5473,7 +5892,7 @@
               <a:buNone/>
             </a:pPr>
             <a:r>
-              <a:rPr lang="en-US" sz="1100" b="1" spc="300" kern="0" dirty="0">
+              <a:rPr lang="en-US" sz="1000" b="1" spc="300" kern="0" dirty="0">
                 <a:solidFill>
                   <a:srgbClr val="7C3AED"/>
                 </a:solidFill>
@@ -5483,7 +5902,7 @@
               </a:rPr>
               <a:t>CORE ENGINE</a:t>
             </a:r>
-            <a:endParaRPr lang="en-US" sz="1100" dirty="0"/>
+            <a:endParaRPr lang="en-US" sz="1000" dirty="0"/>
           </a:p>
         </p:txBody>
       </p:sp>
@@ -5495,8 +5914,8 @@
         </p:nvSpPr>
         <p:spPr>
           <a:xfrm>
-            <a:off x="3291840" y="1325880"/>
-            <a:ext cx="2743200" cy="749808"/>
+            <a:off x="3310128" y="1280160"/>
+            <a:ext cx="2743200" cy="768096"/>
           </a:xfrm>
           <a:prstGeom prst="rect">
             <a:avLst/>
@@ -5520,7 +5939,7 @@
         </p:nvSpPr>
         <p:spPr>
           <a:xfrm>
-            <a:off x="3291840" y="1325880"/>
+            <a:off x="3310128" y="1280160"/>
             <a:ext cx="2743200" cy="45720"/>
           </a:xfrm>
           <a:prstGeom prst="rect">
@@ -5545,8 +5964,8 @@
         </p:nvSpPr>
         <p:spPr>
           <a:xfrm>
-            <a:off x="3429000" y="1389888"/>
-            <a:ext cx="2468880" cy="256032"/>
+            <a:off x="3438144" y="1344168"/>
+            <a:ext cx="2468880" cy="246888"/>
           </a:xfrm>
           <a:prstGeom prst="rect">
             <a:avLst/>
@@ -5562,7 +5981,7 @@
               <a:buNone/>
             </a:pPr>
             <a:r>
-              <a:rPr lang="en-US" sz="1100" b="1" dirty="0">
+              <a:rPr lang="en-US" sz="1050" b="1" dirty="0">
                 <a:solidFill>
                   <a:srgbClr val="E2E8F0"/>
                 </a:solidFill>
@@ -5572,7 +5991,7 @@
               </a:rPr>
               <a:t>session_manager.py</a:t>
             </a:r>
-            <a:endParaRPr lang="en-US" sz="1100" dirty="0"/>
+            <a:endParaRPr lang="en-US" sz="1050" dirty="0"/>
           </a:p>
         </p:txBody>
       </p:sp>
@@ -5584,8 +6003,8 @@
         </p:nvSpPr>
         <p:spPr>
           <a:xfrm>
-            <a:off x="3429000" y="1636776"/>
-            <a:ext cx="2468880" cy="274320"/>
+            <a:off x="3438144" y="1591056"/>
+            <a:ext cx="2468880" cy="347472"/>
           </a:xfrm>
           <a:prstGeom prst="rect">
             <a:avLst/>
@@ -5609,7 +6028,7 @@
                 <a:ea typeface="Calibri" pitchFamily="34" charset="-122"/>
                 <a:cs typeface="Calibri" pitchFamily="34" charset="-120"/>
               </a:rPr>
-              <a:t>Focus score (weighted), intervention rules, timer_history log</a:t>
+              <a:t>Focus score, intervention rules, timer_history log</a:t>
             </a:r>
             <a:endParaRPr lang="en-US" sz="900" dirty="0"/>
           </a:p>
@@ -5623,8 +6042,8 @@
         </p:nvSpPr>
         <p:spPr>
           <a:xfrm>
-            <a:off x="3291840" y="2185416"/>
-            <a:ext cx="2743200" cy="749808"/>
+            <a:off x="3310128" y="2157984"/>
+            <a:ext cx="2743200" cy="768096"/>
           </a:xfrm>
           <a:prstGeom prst="rect">
             <a:avLst/>
@@ -5648,7 +6067,7 @@
         </p:nvSpPr>
         <p:spPr>
           <a:xfrm>
-            <a:off x="3291840" y="2185416"/>
+            <a:off x="3310128" y="2157984"/>
             <a:ext cx="2743200" cy="45720"/>
           </a:xfrm>
           <a:prstGeom prst="rect">
@@ -5673,8 +6092,8 @@
         </p:nvSpPr>
         <p:spPr>
           <a:xfrm>
-            <a:off x="3429000" y="2249424"/>
-            <a:ext cx="2468880" cy="256032"/>
+            <a:off x="3438144" y="2221992"/>
+            <a:ext cx="2468880" cy="246888"/>
           </a:xfrm>
           <a:prstGeom prst="rect">
             <a:avLst/>
@@ -5690,7 +6109,7 @@
               <a:buNone/>
             </a:pPr>
             <a:r>
-              <a:rPr lang="en-US" sz="1100" b="1" dirty="0">
+              <a:rPr lang="en-US" sz="1050" b="1" dirty="0">
                 <a:solidFill>
                   <a:srgbClr val="E2E8F0"/>
                 </a:solidFill>
@@ -5698,9 +6117,9 @@
                 <a:ea typeface="Calibri" pitchFamily="34" charset="-122"/>
                 <a:cs typeface="Calibri" pitchFamily="34" charset="-120"/>
               </a:rPr>
-              <a:t>tracker.py (main loop)</a:t>
-            </a:r>
-            <a:endParaRPr lang="en-US" sz="1100" dirty="0"/>
+              <a:t>tracker.py</a:t>
+            </a:r>
+            <a:endParaRPr lang="en-US" sz="1050" dirty="0"/>
           </a:p>
         </p:txBody>
       </p:sp>
@@ -5712,8 +6131,8 @@
         </p:nvSpPr>
         <p:spPr>
           <a:xfrm>
-            <a:off x="3429000" y="2496312"/>
-            <a:ext cx="2468880" cy="274320"/>
+            <a:off x="3438144" y="2468880"/>
+            <a:ext cx="2468880" cy="347472"/>
           </a:xfrm>
           <a:prstGeom prst="rect">
             <a:avLst/>
@@ -5737,7 +6156,7 @@
                 <a:ea typeface="Calibri" pitchFamily="34" charset="-122"/>
                 <a:cs typeface="Calibri" pitchFamily="34" charset="-120"/>
               </a:rPr>
-              <a:t>30fps CV loop, calibration, phone detection, HUD rendering</a:t>
+              <a:t>30fps CV main loop, calibration, HUD rendering</a:t>
             </a:r>
             <a:endParaRPr lang="en-US" sz="900" dirty="0"/>
           </a:p>
@@ -5751,8 +6170,8 @@
         </p:nvSpPr>
         <p:spPr>
           <a:xfrm>
-            <a:off x="3291840" y="3044952"/>
-            <a:ext cx="2743200" cy="749808"/>
+            <a:off x="3310128" y="3035808"/>
+            <a:ext cx="2743200" cy="768096"/>
           </a:xfrm>
           <a:prstGeom prst="rect">
             <a:avLst/>
@@ -5776,7 +6195,7 @@
         </p:nvSpPr>
         <p:spPr>
           <a:xfrm>
-            <a:off x="3291840" y="3044952"/>
+            <a:off x="3310128" y="3035808"/>
             <a:ext cx="2743200" cy="45720"/>
           </a:xfrm>
           <a:prstGeom prst="rect">
@@ -5801,8 +6220,8 @@
         </p:nvSpPr>
         <p:spPr>
           <a:xfrm>
-            <a:off x="3429000" y="3108960"/>
-            <a:ext cx="2468880" cy="256032"/>
+            <a:off x="3438144" y="3099816"/>
+            <a:ext cx="2468880" cy="246888"/>
           </a:xfrm>
           <a:prstGeom prst="rect">
             <a:avLst/>
@@ -5818,7 +6237,7 @@
               <a:buNone/>
             </a:pPr>
             <a:r>
-              <a:rPr lang="en-US" sz="1100" b="1" dirty="0">
+              <a:rPr lang="en-US" sz="1050" b="1" dirty="0">
                 <a:solidFill>
                   <a:srgbClr val="E2E8F0"/>
                 </a:solidFill>
@@ -5828,7 +6247,7 @@
               </a:rPr>
               <a:t>llm_coach.py</a:t>
             </a:r>
-            <a:endParaRPr lang="en-US" sz="1100" dirty="0"/>
+            <a:endParaRPr lang="en-US" sz="1050" dirty="0"/>
           </a:p>
         </p:txBody>
       </p:sp>
@@ -5840,8 +6259,8 @@
         </p:nvSpPr>
         <p:spPr>
           <a:xfrm>
-            <a:off x="3429000" y="3355848"/>
-            <a:ext cx="2468880" cy="274320"/>
+            <a:off x="3438144" y="3346704"/>
+            <a:ext cx="2468880" cy="347472"/>
           </a:xfrm>
           <a:prstGeom prst="rect">
             <a:avLst/>
@@ -5865,7 +6284,7 @@
                 <a:ea typeface="Calibri" pitchFamily="34" charset="-122"/>
                 <a:cs typeface="Calibri" pitchFamily="34" charset="-120"/>
               </a:rPr>
-              <a:t>Gemini 2.5 Flash via google-genai, async daemon threads</a:t>
+              <a:t>Gemini 2.5 Flash via google-genai, async threads</a:t>
             </a:r>
             <a:endParaRPr lang="en-US" sz="900" dirty="0"/>
           </a:p>
@@ -5879,8 +6298,8 @@
         </p:nvSpPr>
         <p:spPr>
           <a:xfrm>
-            <a:off x="3291840" y="3904488"/>
-            <a:ext cx="2743200" cy="749808"/>
+            <a:off x="3310128" y="3913632"/>
+            <a:ext cx="2743200" cy="768096"/>
           </a:xfrm>
           <a:prstGeom prst="rect">
             <a:avLst/>
@@ -5904,7 +6323,7 @@
         </p:nvSpPr>
         <p:spPr>
           <a:xfrm>
-            <a:off x="3291840" y="3904488"/>
+            <a:off x="3310128" y="3913632"/>
             <a:ext cx="2743200" cy="45720"/>
           </a:xfrm>
           <a:prstGeom prst="rect">
@@ -5929,8 +6348,8 @@
         </p:nvSpPr>
         <p:spPr>
           <a:xfrm>
-            <a:off x="3429000" y="3968496"/>
-            <a:ext cx="2468880" cy="256032"/>
+            <a:off x="3438144" y="3977640"/>
+            <a:ext cx="2468880" cy="246888"/>
           </a:xfrm>
           <a:prstGeom prst="rect">
             <a:avLst/>
@@ -5946,7 +6365,7 @@
               <a:buNone/>
             </a:pPr>
             <a:r>
-              <a:rPr lang="en-US" sz="1100" b="1" dirty="0">
+              <a:rPr lang="en-US" sz="1050" b="1" dirty="0">
                 <a:solidFill>
                   <a:srgbClr val="E2E8F0"/>
                 </a:solidFill>
@@ -5956,7 +6375,7 @@
               </a:rPr>
               <a:t>noise_detector.py</a:t>
             </a:r>
-            <a:endParaRPr lang="en-US" sz="1100" dirty="0"/>
+            <a:endParaRPr lang="en-US" sz="1050" dirty="0"/>
           </a:p>
         </p:txBody>
       </p:sp>
@@ -5968,8 +6387,8 @@
         </p:nvSpPr>
         <p:spPr>
           <a:xfrm>
-            <a:off x="3429000" y="4215384"/>
-            <a:ext cx="2468880" cy="274320"/>
+            <a:off x="3438144" y="4224528"/>
+            <a:ext cx="2468880" cy="347472"/>
           </a:xfrm>
           <a:prstGeom prst="rect">
             <a:avLst/>
@@ -5993,7 +6412,7 @@
                 <a:ea typeface="Calibri" pitchFamily="34" charset="-122"/>
                 <a:cs typeface="Calibri" pitchFamily="34" charset="-120"/>
               </a:rPr>
-              <a:t>sounddevice InputStream, mutex-protected RMS cache</a:t>
+              <a:t>sounddevice InputStream, mutex-protected cache</a:t>
             </a:r>
             <a:endParaRPr lang="en-US" sz="900" dirty="0"/>
           </a:p>
@@ -6007,8 +6426,8 @@
         </p:nvSpPr>
         <p:spPr>
           <a:xfrm>
-            <a:off x="6309360" y="960120"/>
-            <a:ext cx="2560320" cy="320040"/>
+            <a:off x="6291072" y="932688"/>
+            <a:ext cx="2560320" cy="292608"/>
           </a:xfrm>
           <a:prstGeom prst="rect">
             <a:avLst/>
@@ -6024,7 +6443,7 @@
               <a:buNone/>
             </a:pPr>
             <a:r>
-              <a:rPr lang="en-US" sz="1100" b="1" spc="300" kern="0" dirty="0">
+              <a:rPr lang="en-US" sz="1000" b="1" spc="300" kern="0" dirty="0">
                 <a:solidFill>
                   <a:srgbClr val="10B981"/>
                 </a:solidFill>
@@ -6034,7 +6453,7 @@
               </a:rPr>
               <a:t>OUTPUTS</a:t>
             </a:r>
-            <a:endParaRPr lang="en-US" sz="1100" dirty="0"/>
+            <a:endParaRPr lang="en-US" sz="1000" dirty="0"/>
           </a:p>
         </p:txBody>
       </p:sp>
@@ -6046,8 +6465,8 @@
         </p:nvSpPr>
         <p:spPr>
           <a:xfrm>
-            <a:off x="6309360" y="1325880"/>
-            <a:ext cx="2468880" cy="576072"/>
+            <a:off x="6291072" y="1280160"/>
+            <a:ext cx="2514600" cy="566928"/>
           </a:xfrm>
           <a:prstGeom prst="rect">
             <a:avLst/>
@@ -6071,8 +6490,8 @@
         </p:nvSpPr>
         <p:spPr>
           <a:xfrm>
-            <a:off x="6309360" y="1325880"/>
-            <a:ext cx="2468880" cy="45720"/>
+            <a:off x="6291072" y="1280160"/>
+            <a:ext cx="2514600" cy="45720"/>
           </a:xfrm>
           <a:prstGeom prst="rect">
             <a:avLst/>
@@ -6096,8 +6515,8 @@
         </p:nvSpPr>
         <p:spPr>
           <a:xfrm>
-            <a:off x="6446520" y="1389888"/>
-            <a:ext cx="2194560" cy="256032"/>
+            <a:off x="6419088" y="1344168"/>
+            <a:ext cx="2240280" cy="246888"/>
           </a:xfrm>
           <a:prstGeom prst="rect">
             <a:avLst/>
@@ -6113,7 +6532,7 @@
               <a:buNone/>
             </a:pPr>
             <a:r>
-              <a:rPr lang="en-US" sz="1100" b="1" dirty="0">
+              <a:rPr lang="en-US" sz="1050" b="1" dirty="0">
                 <a:solidFill>
                   <a:srgbClr val="E2E8F0"/>
                 </a:solidFill>
@@ -6123,7 +6542,7 @@
               </a:rPr>
               <a:t>Camera HUD</a:t>
             </a:r>
-            <a:endParaRPr lang="en-US" sz="1100" dirty="0"/>
+            <a:endParaRPr lang="en-US" sz="1050" dirty="0"/>
           </a:p>
         </p:txBody>
       </p:sp>
@@ -6135,8 +6554,8 @@
         </p:nvSpPr>
         <p:spPr>
           <a:xfrm>
-            <a:off x="6446520" y="1636776"/>
-            <a:ext cx="2194560" cy="201168"/>
+            <a:off x="6419088" y="1581912"/>
+            <a:ext cx="2240280" cy="201168"/>
           </a:xfrm>
           <a:prstGeom prst="rect">
             <a:avLst/>
@@ -6160,7 +6579,7 @@
                 <a:ea typeface="Calibri" pitchFamily="34" charset="-122"/>
                 <a:cs typeface="Calibri" pitchFamily="34" charset="-120"/>
               </a:rPr>
-              <a:t>Live focus%, posture, timer, coaching msgs</a:t>
+              <a:t>Live focus%, posture, timer, coaching</a:t>
             </a:r>
             <a:endParaRPr lang="en-US" sz="900" dirty="0"/>
           </a:p>
@@ -6174,8 +6593,8 @@
         </p:nvSpPr>
         <p:spPr>
           <a:xfrm>
-            <a:off x="6309360" y="1993392"/>
-            <a:ext cx="2468880" cy="576072"/>
+            <a:off x="6291072" y="1938528"/>
+            <a:ext cx="2514600" cy="566928"/>
           </a:xfrm>
           <a:prstGeom prst="rect">
             <a:avLst/>
@@ -6199,8 +6618,8 @@
         </p:nvSpPr>
         <p:spPr>
           <a:xfrm>
-            <a:off x="6309360" y="1993392"/>
-            <a:ext cx="2468880" cy="45720"/>
+            <a:off x="6291072" y="1938528"/>
+            <a:ext cx="2514600" cy="45720"/>
           </a:xfrm>
           <a:prstGeom prst="rect">
             <a:avLst/>
@@ -6224,8 +6643,8 @@
         </p:nvSpPr>
         <p:spPr>
           <a:xfrm>
-            <a:off x="6446520" y="2057400"/>
-            <a:ext cx="2194560" cy="256032"/>
+            <a:off x="6419088" y="2002536"/>
+            <a:ext cx="2240280" cy="246888"/>
           </a:xfrm>
           <a:prstGeom prst="rect">
             <a:avLst/>
@@ -6241,7 +6660,7 @@
               <a:buNone/>
             </a:pPr>
             <a:r>
-              <a:rPr lang="en-US" sz="1100" b="1" dirty="0">
+              <a:rPr lang="en-US" sz="1050" b="1" dirty="0">
                 <a:solidFill>
                   <a:srgbClr val="E2E8F0"/>
                 </a:solidFill>
@@ -6251,7 +6670,7 @@
               </a:rPr>
               <a:t>macOS Notifications</a:t>
             </a:r>
-            <a:endParaRPr lang="en-US" sz="1100" dirty="0"/>
+            <a:endParaRPr lang="en-US" sz="1050" dirty="0"/>
           </a:p>
         </p:txBody>
       </p:sp>
@@ -6263,8 +6682,8 @@
         </p:nvSpPr>
         <p:spPr>
           <a:xfrm>
-            <a:off x="6446520" y="2304288"/>
-            <a:ext cx="2194560" cy="201168"/>
+            <a:off x="6419088" y="2240280"/>
+            <a:ext cx="2240280" cy="201168"/>
           </a:xfrm>
           <a:prstGeom prst="rect">
             <a:avLst/>
@@ -6302,8 +6721,8 @@
         </p:nvSpPr>
         <p:spPr>
           <a:xfrm>
-            <a:off x="6309360" y="2660904"/>
-            <a:ext cx="2468880" cy="576072"/>
+            <a:off x="6291072" y="2596896"/>
+            <a:ext cx="2514600" cy="566928"/>
           </a:xfrm>
           <a:prstGeom prst="rect">
             <a:avLst/>
@@ -6327,8 +6746,8 @@
         </p:nvSpPr>
         <p:spPr>
           <a:xfrm>
-            <a:off x="6309360" y="2660904"/>
-            <a:ext cx="2468880" cy="45720"/>
+            <a:off x="6291072" y="2596896"/>
+            <a:ext cx="2514600" cy="45720"/>
           </a:xfrm>
           <a:prstGeom prst="rect">
             <a:avLst/>
@@ -6352,8 +6771,8 @@
         </p:nvSpPr>
         <p:spPr>
           <a:xfrm>
-            <a:off x="6446520" y="2724912"/>
-            <a:ext cx="2194560" cy="256032"/>
+            <a:off x="6419088" y="2660904"/>
+            <a:ext cx="2240280" cy="246888"/>
           </a:xfrm>
           <a:prstGeom prst="rect">
             <a:avLst/>
@@ -6369,7 +6788,7 @@
               <a:buNone/>
             </a:pPr>
             <a:r>
-              <a:rPr lang="en-US" sz="1100" b="1" dirty="0">
+              <a:rPr lang="en-US" sz="1050" b="1" dirty="0">
                 <a:solidFill>
                   <a:srgbClr val="E2E8F0"/>
                 </a:solidFill>
@@ -6379,7 +6798,7 @@
               </a:rPr>
               <a:t>Floating Overlay</a:t>
             </a:r>
-            <a:endParaRPr lang="en-US" sz="1100" dirty="0"/>
+            <a:endParaRPr lang="en-US" sz="1050" dirty="0"/>
           </a:p>
         </p:txBody>
       </p:sp>
@@ -6391,8 +6810,8 @@
         </p:nvSpPr>
         <p:spPr>
           <a:xfrm>
-            <a:off x="6446520" y="2971800"/>
-            <a:ext cx="2194560" cy="201168"/>
+            <a:off x="6419088" y="2898648"/>
+            <a:ext cx="2240280" cy="201168"/>
           </a:xfrm>
           <a:prstGeom prst="rect">
             <a:avLst/>
@@ -6430,8 +6849,8 @@
         </p:nvSpPr>
         <p:spPr>
           <a:xfrm>
-            <a:off x="6309360" y="3328416"/>
-            <a:ext cx="2468880" cy="576072"/>
+            <a:off x="6291072" y="3255264"/>
+            <a:ext cx="2514600" cy="566928"/>
           </a:xfrm>
           <a:prstGeom prst="rect">
             <a:avLst/>
@@ -6455,8 +6874,8 @@
         </p:nvSpPr>
         <p:spPr>
           <a:xfrm>
-            <a:off x="6309360" y="3328416"/>
-            <a:ext cx="2468880" cy="45720"/>
+            <a:off x="6291072" y="3255264"/>
+            <a:ext cx="2514600" cy="45720"/>
           </a:xfrm>
           <a:prstGeom prst="rect">
             <a:avLst/>
@@ -6480,8 +6899,8 @@
         </p:nvSpPr>
         <p:spPr>
           <a:xfrm>
-            <a:off x="6446520" y="3392424"/>
-            <a:ext cx="2194560" cy="256032"/>
+            <a:off x="6419088" y="3319272"/>
+            <a:ext cx="2240280" cy="246888"/>
           </a:xfrm>
           <a:prstGeom prst="rect">
             <a:avLst/>
@@ -6497,7 +6916,7 @@
               <a:buNone/>
             </a:pPr>
             <a:r>
-              <a:rPr lang="en-US" sz="1100" b="1" dirty="0">
+              <a:rPr lang="en-US" sz="1050" b="1" dirty="0">
                 <a:solidFill>
                   <a:srgbClr val="E2E8F0"/>
                 </a:solidFill>
@@ -6507,7 +6926,7 @@
               </a:rPr>
               <a:t>Web Dashboard</a:t>
             </a:r>
-            <a:endParaRPr lang="en-US" sz="1100" dirty="0"/>
+            <a:endParaRPr lang="en-US" sz="1050" dirty="0"/>
           </a:p>
         </p:txBody>
       </p:sp>
@@ -6519,8 +6938,8 @@
         </p:nvSpPr>
         <p:spPr>
           <a:xfrm>
-            <a:off x="6446520" y="3639312"/>
-            <a:ext cx="2194560" cy="201168"/>
+            <a:off x="6419088" y="3557016"/>
+            <a:ext cx="2240280" cy="201168"/>
           </a:xfrm>
           <a:prstGeom prst="rect">
             <a:avLst/>
@@ -6544,7 +6963,7 @@
                 <a:ea typeface="Calibri" pitchFamily="34" charset="-122"/>
                 <a:cs typeface="Calibri" pitchFamily="34" charset="-120"/>
               </a:rPr>
-              <a:t>Flask + Chart.js, localhost:5050</a:t>
+              <a:t>Flask + Chart.js at localhost:5050</a:t>
             </a:r>
             <a:endParaRPr lang="en-US" sz="900" dirty="0"/>
           </a:p>
@@ -6558,8 +6977,8 @@
         </p:nvSpPr>
         <p:spPr>
           <a:xfrm>
-            <a:off x="6309360" y="3995928"/>
-            <a:ext cx="2468880" cy="576072"/>
+            <a:off x="6291072" y="3913632"/>
+            <a:ext cx="2514600" cy="566928"/>
           </a:xfrm>
           <a:prstGeom prst="rect">
             <a:avLst/>
@@ -6583,8 +7002,8 @@
         </p:nvSpPr>
         <p:spPr>
           <a:xfrm>
-            <a:off x="6309360" y="3995928"/>
-            <a:ext cx="2468880" cy="45720"/>
+            <a:off x="6291072" y="3913632"/>
+            <a:ext cx="2514600" cy="45720"/>
           </a:xfrm>
           <a:prstGeom prst="rect">
             <a:avLst/>
@@ -6608,8 +7027,8 @@
         </p:nvSpPr>
         <p:spPr>
           <a:xfrm>
-            <a:off x="6446520" y="4059936"/>
-            <a:ext cx="2194560" cy="256032"/>
+            <a:off x="6419088" y="3977640"/>
+            <a:ext cx="2240280" cy="246888"/>
           </a:xfrm>
           <a:prstGeom prst="rect">
             <a:avLst/>
@@ -6625,7 +7044,7 @@
               <a:buNone/>
             </a:pPr>
             <a:r>
-              <a:rPr lang="en-US" sz="1100" b="1" dirty="0">
+              <a:rPr lang="en-US" sz="1050" b="1" dirty="0">
                 <a:solidFill>
                   <a:srgbClr val="E2E8F0"/>
                 </a:solidFill>
@@ -6633,9 +7052,9 @@
                 <a:ea typeface="Calibri" pitchFamily="34" charset="-122"/>
                 <a:cs typeface="Calibri" pitchFamily="34" charset="-120"/>
               </a:rPr>
-              <a:t>Session JSON</a:t>
-            </a:r>
-            <a:endParaRPr lang="en-US" sz="1100" dirty="0"/>
+              <a:t>session_*.json</a:t>
+            </a:r>
+            <a:endParaRPr lang="en-US" sz="1050" dirty="0"/>
           </a:p>
         </p:txBody>
       </p:sp>
@@ -6647,8 +7066,8 @@
         </p:nvSpPr>
         <p:spPr>
           <a:xfrm>
-            <a:off x="6446520" y="4306824"/>
-            <a:ext cx="2194560" cy="201168"/>
+            <a:off x="6419088" y="4215384"/>
+            <a:ext cx="2240280" cy="201168"/>
           </a:xfrm>
           <a:prstGeom prst="rect">
             <a:avLst/>
@@ -6718,8 +7137,8 @@
         </p:nvSpPr>
         <p:spPr>
           <a:xfrm>
-            <a:off x="457200" y="256032"/>
-            <a:ext cx="8229600" cy="548640"/>
+            <a:off x="457200" y="228600"/>
+            <a:ext cx="8229600" cy="502920"/>
           </a:xfrm>
           <a:prstGeom prst="rect">
             <a:avLst/>
@@ -6743,7 +7162,7 @@
                 <a:ea typeface="Arial Black" pitchFamily="34" charset="-122"/>
                 <a:cs typeface="Arial Black" pitchFamily="34" charset="-120"/>
               </a:rPr>
-              <a:t>Adaptive Timer — Dynamic Work/Break</a:t>
+              <a:t>Adaptive Timer: Decision Engine</a:t>
             </a:r>
             <a:endParaRPr lang="en-US" sz="3000" dirty="0"/>
           </a:p>
@@ -6751,14 +7170,53 @@
       </p:sp>
       <p:sp>
         <p:nvSpPr>
-          <p:cNvPr id="3" name="Shape 1"/>
-          <p:cNvSpPr/>
-          <p:nvPr/>
-        </p:nvSpPr>
-        <p:spPr>
-          <a:xfrm>
-            <a:off x="457200" y="960120"/>
-            <a:ext cx="3749040" cy="3977640"/>
+          <p:cNvPr id="3" name="Text 1"/>
+          <p:cNvSpPr/>
+          <p:nvPr/>
+        </p:nvSpPr>
+        <p:spPr>
+          <a:xfrm>
+            <a:off x="457200" y="758952"/>
+            <a:ext cx="8229600" cy="347472"/>
+          </a:xfrm>
+          <a:prstGeom prst="rect">
+            <a:avLst/>
+          </a:prstGeom>
+          <a:noFill/>
+          <a:ln/>
+        </p:spPr>
+        <p:txBody>
+          <a:bodyPr wrap="square" rtlCol="0" anchor="ctr"/>
+          <a:lstStyle/>
+          <a:p>
+            <a:pPr indent="0" marL="0">
+              <a:buNone/>
+            </a:pPr>
+            <a:r>
+              <a:rPr lang="en-US" sz="1250" dirty="0">
+                <a:solidFill>
+                  <a:srgbClr val="94A3B8"/>
+                </a:solidFill>
+                <a:latin typeface="Calibri" pitchFamily="34" charset="0"/>
+                <a:ea typeface="Calibri" pitchFamily="34" charset="-122"/>
+                <a:cs typeface="Calibri" pitchFamily="34" charset="-120"/>
+              </a:rPr>
+              <a:t>Three rules evaluate your state every 3 seconds during work blocks. All changes are logged with reason + focus score.</a:t>
+            </a:r>
+            <a:endParaRPr lang="en-US" sz="1250" dirty="0"/>
+          </a:p>
+        </p:txBody>
+      </p:sp>
+      <p:sp>
+        <p:nvSpPr>
+          <p:cNvPr id="4" name="Shape 2"/>
+          <p:cNvSpPr/>
+          <p:nvPr/>
+        </p:nvSpPr>
+        <p:spPr>
+          <a:xfrm>
+            <a:off x="457200" y="1261872"/>
+            <a:ext cx="3977640" cy="1572768"/>
           </a:xfrm>
           <a:prstGeom prst="rect">
             <a:avLst/>
@@ -6776,14 +7234,14 @@
       </p:sp>
       <p:sp>
         <p:nvSpPr>
-          <p:cNvPr id="4" name="Shape 2"/>
-          <p:cNvSpPr/>
-          <p:nvPr/>
-        </p:nvSpPr>
-        <p:spPr>
-          <a:xfrm>
-            <a:off x="457200" y="960120"/>
-            <a:ext cx="3749040" cy="45720"/>
+          <p:cNvPr id="5" name="Shape 3"/>
+          <p:cNvSpPr/>
+          <p:nvPr/>
+        </p:nvSpPr>
+        <p:spPr>
+          <a:xfrm>
+            <a:off x="457200" y="1261872"/>
+            <a:ext cx="3977640" cy="45720"/>
           </a:xfrm>
           <a:prstGeom prst="rect">
             <a:avLst/>
@@ -6801,70 +7259,108 @@
       </p:sp>
       <p:sp>
         <p:nvSpPr>
-          <p:cNvPr id="5" name="Text 3"/>
-          <p:cNvSpPr/>
-          <p:nvPr/>
-        </p:nvSpPr>
-        <p:spPr>
-          <a:xfrm>
-            <a:off x="594360" y="1115568"/>
-            <a:ext cx="3474720" cy="365760"/>
-          </a:xfrm>
-          <a:prstGeom prst="rect">
-            <a:avLst/>
-          </a:prstGeom>
-          <a:noFill/>
-          <a:ln/>
-        </p:spPr>
-        <p:txBody>
-          <a:bodyPr wrap="square" rtlCol="0" anchor="ctr"/>
-          <a:lstStyle/>
-          <a:p>
-            <a:pPr indent="0" marL="0">
-              <a:buNone/>
-            </a:pPr>
-            <a:r>
-              <a:rPr lang="en-US" sz="1400" b="1" dirty="0">
+          <p:cNvPr id="6" name="Text 4"/>
+          <p:cNvSpPr/>
+          <p:nvPr/>
+        </p:nvSpPr>
+        <p:spPr>
+          <a:xfrm>
+            <a:off x="621792" y="1371600"/>
+            <a:ext cx="3611880" cy="320040"/>
+          </a:xfrm>
+          <a:prstGeom prst="rect">
+            <a:avLst/>
+          </a:prstGeom>
+          <a:noFill/>
+          <a:ln/>
+        </p:spPr>
+        <p:txBody>
+          <a:bodyPr wrap="square" lIns="0" tIns="0" rIns="0" bIns="0" rtlCol="0" anchor="ctr"/>
+          <a:lstStyle/>
+          <a:p>
+            <a:pPr indent="0" marL="0">
+              <a:buNone/>
+            </a:pPr>
+            <a:r>
+              <a:rPr lang="en-US" sz="1300" b="1" dirty="0">
                 <a:solidFill>
                   <a:srgbClr val="EF4444"/>
                 </a:solidFill>
-                <a:latin typeface="Calibri" pitchFamily="34" charset="0"/>
-                <a:ea typeface="Calibri" pitchFamily="34" charset="-122"/>
-                <a:cs typeface="Calibri" pitchFamily="34" charset="-120"/>
-              </a:rPr>
-              <a:t>❌  Traditional Pomodoro</a:t>
-            </a:r>
-            <a:endParaRPr lang="en-US" sz="1400" dirty="0"/>
-          </a:p>
-        </p:txBody>
-      </p:sp>
-      <p:sp>
-        <p:nvSpPr>
-          <p:cNvPr id="6" name="Text 4"/>
-          <p:cNvSpPr/>
-          <p:nvPr/>
-        </p:nvSpPr>
-        <p:spPr>
-          <a:xfrm>
-            <a:off x="594360" y="1572768"/>
-            <a:ext cx="3474720" cy="3017520"/>
-          </a:xfrm>
-          <a:prstGeom prst="rect">
-            <a:avLst/>
-          </a:prstGeom>
-          <a:noFill/>
-          <a:ln/>
-        </p:spPr>
-        <p:txBody>
-          <a:bodyPr wrap="square" rtlCol="0" anchor="ctr"/>
-          <a:lstStyle/>
-          <a:p>
-            <a:pPr marL="342900" indent="-342900">
-              <a:buSzPct val="100000"/>
-              <a:buChar char="•"/>
-            </a:pPr>
-            <a:r>
-              <a:rPr lang="en-US" sz="1200" dirty="0">
+                <a:latin typeface="Arial Black" pitchFamily="34" charset="0"/>
+                <a:ea typeface="Arial Black" pitchFamily="34" charset="-122"/>
+                <a:cs typeface="Arial Black" pitchFamily="34" charset="-120"/>
+              </a:rPr>
+              <a:t>⚡  EARLY BREAK</a:t>
+            </a:r>
+            <a:endParaRPr lang="en-US" sz="1300" dirty="0"/>
+          </a:p>
+        </p:txBody>
+      </p:sp>
+      <p:sp>
+        <p:nvSpPr>
+          <p:cNvPr id="7" name="Text 5"/>
+          <p:cNvSpPr/>
+          <p:nvPr/>
+        </p:nvSpPr>
+        <p:spPr>
+          <a:xfrm>
+            <a:off x="621792" y="1719072"/>
+            <a:ext cx="3611880" cy="256032"/>
+          </a:xfrm>
+          <a:prstGeom prst="rect">
+            <a:avLst/>
+          </a:prstGeom>
+          <a:noFill/>
+          <a:ln/>
+        </p:spPr>
+        <p:txBody>
+          <a:bodyPr wrap="square" lIns="0" tIns="0" rIns="0" bIns="0" rtlCol="0" anchor="ctr"/>
+          <a:lstStyle/>
+          <a:p>
+            <a:pPr indent="0" marL="0">
+              <a:buNone/>
+            </a:pPr>
+            <a:r>
+              <a:rPr lang="en-US" sz="1050" dirty="0">
+                <a:solidFill>
+                  <a:srgbClr val="E2E8F0"/>
+                </a:solidFill>
+                <a:latin typeface="Calibri" pitchFamily="34" charset="0"/>
+                <a:ea typeface="Calibri" pitchFamily="34" charset="-122"/>
+                <a:cs typeface="Calibri" pitchFamily="34" charset="-120"/>
+              </a:rPr>
+              <a:t>Trigger: focus &lt; 35%  AND  elapsed &gt; 50% of block</a:t>
+            </a:r>
+            <a:endParaRPr lang="en-US" sz="1050" dirty="0"/>
+          </a:p>
+        </p:txBody>
+      </p:sp>
+      <p:sp>
+        <p:nvSpPr>
+          <p:cNvPr id="8" name="Text 6"/>
+          <p:cNvSpPr/>
+          <p:nvPr/>
+        </p:nvSpPr>
+        <p:spPr>
+          <a:xfrm>
+            <a:off x="621792" y="1993392"/>
+            <a:ext cx="3611880" cy="320040"/>
+          </a:xfrm>
+          <a:prstGeom prst="rect">
+            <a:avLst/>
+          </a:prstGeom>
+          <a:noFill/>
+          <a:ln/>
+        </p:spPr>
+        <p:txBody>
+          <a:bodyPr wrap="square" lIns="0" tIns="0" rIns="0" bIns="0" rtlCol="0" anchor="ctr"/>
+          <a:lstStyle/>
+          <a:p>
+            <a:pPr indent="0" marL="0">
+              <a:buNone/>
+            </a:pPr>
+            <a:r>
+              <a:rPr lang="en-US" sz="1050" dirty="0">
                 <a:solidFill>
                   <a:srgbClr val="94A3B8"/>
                 </a:solidFill>
@@ -6872,94 +7368,61 @@
                 <a:ea typeface="Calibri" pitchFamily="34" charset="-122"/>
                 <a:cs typeface="Calibri" pitchFamily="34" charset="-120"/>
               </a:rPr>
-              <a:t>Always 25 min work, 5 min break</a:t>
-            </a:r>
-            <a:endParaRPr lang="en-US" sz="1200" dirty="0"/>
-          </a:p>
-          <a:p>
-            <a:pPr marL="342900" indent="-342900">
-              <a:buSzPct val="100000"/>
-              <a:buChar char="•"/>
-            </a:pPr>
-            <a:r>
-              <a:rPr lang="en-US" sz="1200" dirty="0">
-                <a:solidFill>
-                  <a:srgbClr val="94A3B8"/>
-                </a:solidFill>
-                <a:latin typeface="Calibri" pitchFamily="34" charset="0"/>
-                <a:ea typeface="Calibri" pitchFamily="34" charset="-122"/>
-                <a:cs typeface="Calibri" pitchFamily="34" charset="-120"/>
-              </a:rPr>
-              <a:t>No awareness of actual focus level</a:t>
-            </a:r>
-            <a:endParaRPr lang="en-US" sz="1200" dirty="0"/>
-          </a:p>
-          <a:p>
-            <a:pPr marL="342900" indent="-342900">
-              <a:buSzPct val="100000"/>
-              <a:buChar char="•"/>
-            </a:pPr>
-            <a:r>
-              <a:rPr lang="en-US" sz="1200" dirty="0">
-                <a:solidFill>
-                  <a:srgbClr val="94A3B8"/>
-                </a:solidFill>
-                <a:latin typeface="Calibri" pitchFamily="34" charset="0"/>
-                <a:ea typeface="Calibri" pitchFamily="34" charset="-122"/>
-                <a:cs typeface="Calibri" pitchFamily="34" charset="-120"/>
-              </a:rPr>
-              <a:t>Interrupts deep flow states</a:t>
-            </a:r>
-            <a:endParaRPr lang="en-US" sz="1200" dirty="0"/>
-          </a:p>
-          <a:p>
-            <a:pPr marL="342900" indent="-342900">
-              <a:buSzPct val="100000"/>
-              <a:buChar char="•"/>
-            </a:pPr>
-            <a:r>
-              <a:rPr lang="en-US" sz="1200" dirty="0">
-                <a:solidFill>
-                  <a:srgbClr val="94A3B8"/>
-                </a:solidFill>
-                <a:latin typeface="Calibri" pitchFamily="34" charset="0"/>
-                <a:ea typeface="Calibri" pitchFamily="34" charset="-122"/>
-                <a:cs typeface="Calibri" pitchFamily="34" charset="-120"/>
-              </a:rPr>
-              <a:t>No break when genuinely exhausted</a:t>
-            </a:r>
-            <a:endParaRPr lang="en-US" sz="1200" dirty="0"/>
-          </a:p>
-          <a:p>
-            <a:pPr marL="342900" indent="-342900">
-              <a:buSzPct val="100000"/>
-              <a:buChar char="•"/>
-            </a:pPr>
-            <a:r>
-              <a:rPr lang="en-US" sz="1200" dirty="0">
-                <a:solidFill>
-                  <a:srgbClr val="94A3B8"/>
-                </a:solidFill>
-                <a:latin typeface="Calibri" pitchFamily="34" charset="0"/>
-                <a:ea typeface="Calibri" pitchFamily="34" charset="-122"/>
-                <a:cs typeface="Calibri" pitchFamily="34" charset="-120"/>
-              </a:rPr>
-              <a:t>Same for everyone, every day</a:t>
-            </a:r>
-            <a:endParaRPr lang="en-US" sz="1200" dirty="0"/>
-          </a:p>
-        </p:txBody>
-      </p:sp>
-      <p:sp>
-        <p:nvSpPr>
-          <p:cNvPr id="7" name="Shape 5"/>
-          <p:cNvSpPr/>
-          <p:nvPr/>
-        </p:nvSpPr>
-        <p:spPr>
-          <a:xfrm>
-            <a:off x="4572000" y="960120"/>
-            <a:ext cx="4206240" cy="3977640"/>
+              <a:t>Result: Immediate break triggered. LLM coaching message explaining why.</a:t>
+            </a:r>
+            <a:endParaRPr lang="en-US" sz="1050" dirty="0"/>
+          </a:p>
+        </p:txBody>
+      </p:sp>
+      <p:sp>
+        <p:nvSpPr>
+          <p:cNvPr id="9" name="Text 7"/>
+          <p:cNvSpPr/>
+          <p:nvPr/>
+        </p:nvSpPr>
+        <p:spPr>
+          <a:xfrm>
+            <a:off x="621792" y="2377440"/>
+            <a:ext cx="3611880" cy="274320"/>
+          </a:xfrm>
+          <a:prstGeom prst="rect">
+            <a:avLst/>
+          </a:prstGeom>
+          <a:noFill/>
+          <a:ln/>
+        </p:spPr>
+        <p:txBody>
+          <a:bodyPr wrap="square" lIns="0" tIns="0" rIns="0" bIns="0" rtlCol="0" anchor="ctr"/>
+          <a:lstStyle/>
+          <a:p>
+            <a:pPr indent="0" marL="0">
+              <a:buNone/>
+            </a:pPr>
+            <a:r>
+              <a:rPr lang="en-US" sz="950" i="1" dirty="0">
+                <a:solidFill>
+                  <a:srgbClr val="EF4444"/>
+                </a:solidFill>
+                <a:latin typeface="Calibri" pitchFamily="34" charset="0"/>
+                <a:ea typeface="Calibri" pitchFamily="34" charset="-122"/>
+                <a:cs typeface="Calibri" pitchFamily="34" charset="-120"/>
+              </a:rPr>
+              <a:t>"Early break at 14m (focus=28%, was 25m block)"</a:t>
+            </a:r>
+            <a:endParaRPr lang="en-US" sz="950" dirty="0"/>
+          </a:p>
+        </p:txBody>
+      </p:sp>
+      <p:sp>
+        <p:nvSpPr>
+          <p:cNvPr id="10" name="Shape 8"/>
+          <p:cNvSpPr/>
+          <p:nvPr/>
+        </p:nvSpPr>
+        <p:spPr>
+          <a:xfrm>
+            <a:off x="4800600" y="1261872"/>
+            <a:ext cx="3977640" cy="1572768"/>
           </a:xfrm>
           <a:prstGeom prst="rect">
             <a:avLst/>
@@ -6977,14 +7440,14 @@
       </p:sp>
       <p:sp>
         <p:nvSpPr>
-          <p:cNvPr id="8" name="Shape 6"/>
-          <p:cNvSpPr/>
-          <p:nvPr/>
-        </p:nvSpPr>
-        <p:spPr>
-          <a:xfrm>
-            <a:off x="4572000" y="960120"/>
-            <a:ext cx="4206240" cy="45720"/>
+          <p:cNvPr id="11" name="Shape 9"/>
+          <p:cNvSpPr/>
+          <p:nvPr/>
+        </p:nvSpPr>
+        <p:spPr>
+          <a:xfrm>
+            <a:off x="4800600" y="1261872"/>
+            <a:ext cx="3977640" cy="45720"/>
           </a:xfrm>
           <a:prstGeom prst="rect">
             <a:avLst/>
@@ -7002,89 +7465,275 @@
       </p:sp>
       <p:sp>
         <p:nvSpPr>
-          <p:cNvPr id="9" name="Text 7"/>
-          <p:cNvSpPr/>
-          <p:nvPr/>
-        </p:nvSpPr>
-        <p:spPr>
-          <a:xfrm>
-            <a:off x="4709160" y="1115568"/>
-            <a:ext cx="3931920" cy="365760"/>
-          </a:xfrm>
-          <a:prstGeom prst="rect">
-            <a:avLst/>
-          </a:prstGeom>
-          <a:noFill/>
-          <a:ln/>
-        </p:spPr>
-        <p:txBody>
-          <a:bodyPr wrap="square" rtlCol="0" anchor="ctr"/>
-          <a:lstStyle/>
-          <a:p>
-            <a:pPr indent="0" marL="0">
-              <a:buNone/>
-            </a:pPr>
-            <a:r>
-              <a:rPr lang="en-US" sz="1400" b="1" dirty="0">
+          <p:cNvPr id="12" name="Text 10"/>
+          <p:cNvSpPr/>
+          <p:nvPr/>
+        </p:nvSpPr>
+        <p:spPr>
+          <a:xfrm>
+            <a:off x="4965192" y="1371600"/>
+            <a:ext cx="3611880" cy="320040"/>
+          </a:xfrm>
+          <a:prstGeom prst="rect">
+            <a:avLst/>
+          </a:prstGeom>
+          <a:noFill/>
+          <a:ln/>
+        </p:spPr>
+        <p:txBody>
+          <a:bodyPr wrap="square" lIns="0" tIns="0" rIns="0" bIns="0" rtlCol="0" anchor="ctr"/>
+          <a:lstStyle/>
+          <a:p>
+            <a:pPr indent="0" marL="0">
+              <a:buNone/>
+            </a:pPr>
+            <a:r>
+              <a:rPr lang="en-US" sz="1300" b="1" dirty="0">
                 <a:solidFill>
                   <a:srgbClr val="10B981"/>
                 </a:solidFill>
-                <a:latin typeface="Calibri" pitchFamily="34" charset="0"/>
-                <a:ea typeface="Calibri" pitchFamily="34" charset="-122"/>
-                <a:cs typeface="Calibri" pitchFamily="34" charset="-120"/>
-              </a:rPr>
-              <a:t>✓  Adaptive Cognitive Timer</a:t>
-            </a:r>
-            <a:endParaRPr lang="en-US" sz="1400" dirty="0"/>
-          </a:p>
-        </p:txBody>
-      </p:sp>
-      <p:sp>
-        <p:nvSpPr>
-          <p:cNvPr id="10" name="Shape 8"/>
-          <p:cNvSpPr/>
-          <p:nvPr/>
-        </p:nvSpPr>
-        <p:spPr>
-          <a:xfrm>
-            <a:off x="4754880" y="1673352"/>
-            <a:ext cx="91440" cy="91440"/>
-          </a:xfrm>
-          <a:prstGeom prst="ellipse">
+                <a:latin typeface="Arial Black" pitchFamily="34" charset="0"/>
+                <a:ea typeface="Arial Black" pitchFamily="34" charset="-122"/>
+                <a:cs typeface="Arial Black" pitchFamily="34" charset="-120"/>
+              </a:rPr>
+              <a:t>🔥  FLOW EXTENSION</a:t>
+            </a:r>
+            <a:endParaRPr lang="en-US" sz="1300" dirty="0"/>
+          </a:p>
+        </p:txBody>
+      </p:sp>
+      <p:sp>
+        <p:nvSpPr>
+          <p:cNvPr id="13" name="Text 11"/>
+          <p:cNvSpPr/>
+          <p:nvPr/>
+        </p:nvSpPr>
+        <p:spPr>
+          <a:xfrm>
+            <a:off x="4965192" y="1719072"/>
+            <a:ext cx="3611880" cy="256032"/>
+          </a:xfrm>
+          <a:prstGeom prst="rect">
+            <a:avLst/>
+          </a:prstGeom>
+          <a:noFill/>
+          <a:ln/>
+        </p:spPr>
+        <p:txBody>
+          <a:bodyPr wrap="square" lIns="0" tIns="0" rIns="0" bIns="0" rtlCol="0" anchor="ctr"/>
+          <a:lstStyle/>
+          <a:p>
+            <a:pPr indent="0" marL="0">
+              <a:buNone/>
+            </a:pPr>
+            <a:r>
+              <a:rPr lang="en-US" sz="1050" dirty="0">
+                <a:solidFill>
+                  <a:srgbClr val="E2E8F0"/>
+                </a:solidFill>
+                <a:latin typeface="Calibri" pitchFamily="34" charset="0"/>
+                <a:ea typeface="Calibri" pitchFamily="34" charset="-122"/>
+                <a:cs typeface="Calibri" pitchFamily="34" charset="-120"/>
+              </a:rPr>
+              <a:t>Trigger: focus ≥ 80%  AND  time remaining ≤ 30s</a:t>
+            </a:r>
+            <a:endParaRPr lang="en-US" sz="1050" dirty="0"/>
+          </a:p>
+        </p:txBody>
+      </p:sp>
+      <p:sp>
+        <p:nvSpPr>
+          <p:cNvPr id="14" name="Text 12"/>
+          <p:cNvSpPr/>
+          <p:nvPr/>
+        </p:nvSpPr>
+        <p:spPr>
+          <a:xfrm>
+            <a:off x="4965192" y="1993392"/>
+            <a:ext cx="3611880" cy="320040"/>
+          </a:xfrm>
+          <a:prstGeom prst="rect">
+            <a:avLst/>
+          </a:prstGeom>
+          <a:noFill/>
+          <a:ln/>
+        </p:spPr>
+        <p:txBody>
+          <a:bodyPr wrap="square" lIns="0" tIns="0" rIns="0" bIns="0" rtlCol="0" anchor="ctr"/>
+          <a:lstStyle/>
+          <a:p>
+            <a:pPr indent="0" marL="0">
+              <a:buNone/>
+            </a:pPr>
+            <a:r>
+              <a:rPr lang="en-US" sz="1050" dirty="0">
+                <a:solidFill>
+                  <a:srgbClr val="94A3B8"/>
+                </a:solidFill>
+                <a:latin typeface="Calibri" pitchFamily="34" charset="0"/>
+                <a:ea typeface="Calibri" pitchFamily="34" charset="-122"/>
+                <a:cs typeface="Calibri" pitchFamily="34" charset="-120"/>
+              </a:rPr>
+              <a:t>Result: +5 minutes added to work block. Can stack multiple times.</a:t>
+            </a:r>
+            <a:endParaRPr lang="en-US" sz="1050" dirty="0"/>
+          </a:p>
+        </p:txBody>
+      </p:sp>
+      <p:sp>
+        <p:nvSpPr>
+          <p:cNvPr id="15" name="Text 13"/>
+          <p:cNvSpPr/>
+          <p:nvPr/>
+        </p:nvSpPr>
+        <p:spPr>
+          <a:xfrm>
+            <a:off x="4965192" y="2377440"/>
+            <a:ext cx="3611880" cy="274320"/>
+          </a:xfrm>
+          <a:prstGeom prst="rect">
+            <a:avLst/>
+          </a:prstGeom>
+          <a:noFill/>
+          <a:ln/>
+        </p:spPr>
+        <p:txBody>
+          <a:bodyPr wrap="square" lIns="0" tIns="0" rIns="0" bIns="0" rtlCol="0" anchor="ctr"/>
+          <a:lstStyle/>
+          <a:p>
+            <a:pPr indent="0" marL="0">
+              <a:buNone/>
+            </a:pPr>
+            <a:r>
+              <a:rPr lang="en-US" sz="950" i="1" dirty="0">
+                <a:solidFill>
+                  <a:srgbClr val="10B981"/>
+                </a:solidFill>
+                <a:latin typeface="Calibri" pitchFamily="34" charset="0"/>
+                <a:ea typeface="Calibri" pitchFamily="34" charset="-122"/>
+                <a:cs typeface="Calibri" pitchFamily="34" charset="-120"/>
+              </a:rPr>
+              <a:t>"Flow extension 25m→30m (focus=83%)"</a:t>
+            </a:r>
+            <a:endParaRPr lang="en-US" sz="950" dirty="0"/>
+          </a:p>
+        </p:txBody>
+      </p:sp>
+      <p:sp>
+        <p:nvSpPr>
+          <p:cNvPr id="16" name="Shape 14"/>
+          <p:cNvSpPr/>
+          <p:nvPr/>
+        </p:nvSpPr>
+        <p:spPr>
+          <a:xfrm>
+            <a:off x="457200" y="2980944"/>
+            <a:ext cx="3977640" cy="1572768"/>
+          </a:xfrm>
+          <a:prstGeom prst="rect">
+            <a:avLst/>
+          </a:prstGeom>
+          <a:solidFill>
+            <a:srgbClr val="13132A"/>
+          </a:solidFill>
+          <a:ln w="12700">
+            <a:solidFill>
+              <a:srgbClr val="1E1E40"/>
+            </a:solidFill>
+            <a:prstDash val="solid"/>
+          </a:ln>
+        </p:spPr>
+      </p:sp>
+      <p:sp>
+        <p:nvSpPr>
+          <p:cNvPr id="17" name="Shape 15"/>
+          <p:cNvSpPr/>
+          <p:nvPr/>
+        </p:nvSpPr>
+        <p:spPr>
+          <a:xfrm>
+            <a:off x="457200" y="2980944"/>
+            <a:ext cx="3977640" cy="45720"/>
+          </a:xfrm>
+          <a:prstGeom prst="rect">
             <a:avLst/>
           </a:prstGeom>
           <a:solidFill>
             <a:srgbClr val="F59E0B"/>
           </a:solidFill>
-          <a:ln/>
-        </p:spPr>
-      </p:sp>
-      <p:sp>
-        <p:nvSpPr>
-          <p:cNvPr id="11" name="Text 9"/>
-          <p:cNvSpPr/>
-          <p:nvPr/>
-        </p:nvSpPr>
-        <p:spPr>
-          <a:xfrm>
-            <a:off x="4919472" y="1618488"/>
-            <a:ext cx="3749040" cy="457200"/>
-          </a:xfrm>
-          <a:prstGeom prst="rect">
-            <a:avLst/>
-          </a:prstGeom>
-          <a:noFill/>
-          <a:ln/>
-        </p:spPr>
-        <p:txBody>
-          <a:bodyPr wrap="square" rtlCol="0" anchor="ctr"/>
-          <a:lstStyle/>
-          <a:p>
-            <a:pPr indent="0" marL="0">
-              <a:buNone/>
-            </a:pPr>
-            <a:r>
-              <a:rPr lang="en-US" sz="1150" dirty="0">
+          <a:ln w="12700">
+            <a:solidFill>
+              <a:srgbClr val="F59E0B"/>
+            </a:solidFill>
+            <a:prstDash val="solid"/>
+          </a:ln>
+        </p:spPr>
+      </p:sp>
+      <p:sp>
+        <p:nvSpPr>
+          <p:cNvPr id="18" name="Text 16"/>
+          <p:cNvSpPr/>
+          <p:nvPr/>
+        </p:nvSpPr>
+        <p:spPr>
+          <a:xfrm>
+            <a:off x="621792" y="3090672"/>
+            <a:ext cx="3611880" cy="320040"/>
+          </a:xfrm>
+          <a:prstGeom prst="rect">
+            <a:avLst/>
+          </a:prstGeom>
+          <a:noFill/>
+          <a:ln/>
+        </p:spPr>
+        <p:txBody>
+          <a:bodyPr wrap="square" lIns="0" tIns="0" rIns="0" bIns="0" rtlCol="0" anchor="ctr"/>
+          <a:lstStyle/>
+          <a:p>
+            <a:pPr indent="0" marL="0">
+              <a:buNone/>
+            </a:pPr>
+            <a:r>
+              <a:rPr lang="en-US" sz="1300" b="1" dirty="0">
+                <a:solidFill>
+                  <a:srgbClr val="F59E0B"/>
+                </a:solidFill>
+                <a:latin typeface="Arial Black" pitchFamily="34" charset="0"/>
+                <a:ea typeface="Arial Black" pitchFamily="34" charset="-122"/>
+                <a:cs typeface="Arial Black" pitchFamily="34" charset="-120"/>
+              </a:rPr>
+              <a:t>🧍  POSTURE NUDGE</a:t>
+            </a:r>
+            <a:endParaRPr lang="en-US" sz="1300" dirty="0"/>
+          </a:p>
+        </p:txBody>
+      </p:sp>
+      <p:sp>
+        <p:nvSpPr>
+          <p:cNvPr id="19" name="Text 17"/>
+          <p:cNvSpPr/>
+          <p:nvPr/>
+        </p:nvSpPr>
+        <p:spPr>
+          <a:xfrm>
+            <a:off x="621792" y="3438144"/>
+            <a:ext cx="3611880" cy="256032"/>
+          </a:xfrm>
+          <a:prstGeom prst="rect">
+            <a:avLst/>
+          </a:prstGeom>
+          <a:noFill/>
+          <a:ln/>
+        </p:spPr>
+        <p:txBody>
+          <a:bodyPr wrap="square" lIns="0" tIns="0" rIns="0" bIns="0" rtlCol="0" anchor="ctr"/>
+          <a:lstStyle/>
+          <a:p>
+            <a:pPr indent="0" marL="0">
+              <a:buNone/>
+            </a:pPr>
+            <a:r>
+              <a:rPr lang="en-US" sz="1050" dirty="0">
                 <a:solidFill>
                   <a:srgbClr val="E2E8F0"/>
                 </a:solidFill>
@@ -7092,58 +7741,205 @@
                 <a:ea typeface="Calibri" pitchFamily="34" charset="-122"/>
                 <a:cs typeface="Calibri" pitchFamily="34" charset="-120"/>
               </a:rPr>
-              <a:t>Early break at 14 min  →  focus dropped to 28%</a:t>
-            </a:r>
-            <a:endParaRPr lang="en-US" sz="1150" dirty="0"/>
-          </a:p>
-        </p:txBody>
-      </p:sp>
-      <p:sp>
-        <p:nvSpPr>
-          <p:cNvPr id="12" name="Shape 10"/>
-          <p:cNvSpPr/>
-          <p:nvPr/>
-        </p:nvSpPr>
-        <p:spPr>
-          <a:xfrm>
-            <a:off x="4754880" y="2258568"/>
-            <a:ext cx="91440" cy="91440"/>
-          </a:xfrm>
-          <a:prstGeom prst="ellipse">
-            <a:avLst/>
-          </a:prstGeom>
-          <a:solidFill>
-            <a:srgbClr val="10B981"/>
-          </a:solidFill>
-          <a:ln/>
-        </p:spPr>
-      </p:sp>
-      <p:sp>
-        <p:nvSpPr>
-          <p:cNvPr id="13" name="Text 11"/>
-          <p:cNvSpPr/>
-          <p:nvPr/>
-        </p:nvSpPr>
-        <p:spPr>
-          <a:xfrm>
-            <a:off x="4919472" y="2203704"/>
-            <a:ext cx="3749040" cy="457200"/>
-          </a:xfrm>
-          <a:prstGeom prst="rect">
-            <a:avLst/>
-          </a:prstGeom>
-          <a:noFill/>
-          <a:ln/>
-        </p:spPr>
-        <p:txBody>
-          <a:bodyPr wrap="square" rtlCol="0" anchor="ctr"/>
-          <a:lstStyle/>
-          <a:p>
-            <a:pPr indent="0" marL="0">
-              <a:buNone/>
-            </a:pPr>
-            <a:r>
-              <a:rPr lang="en-US" sz="1150" dirty="0">
+              <a:t>Trigger: slouching &gt; 70% of last 30s  (2-min cooldown)</a:t>
+            </a:r>
+            <a:endParaRPr lang="en-US" sz="1050" dirty="0"/>
+          </a:p>
+        </p:txBody>
+      </p:sp>
+      <p:sp>
+        <p:nvSpPr>
+          <p:cNvPr id="20" name="Text 18"/>
+          <p:cNvSpPr/>
+          <p:nvPr/>
+        </p:nvSpPr>
+        <p:spPr>
+          <a:xfrm>
+            <a:off x="621792" y="3712464"/>
+            <a:ext cx="3611880" cy="320040"/>
+          </a:xfrm>
+          <a:prstGeom prst="rect">
+            <a:avLst/>
+          </a:prstGeom>
+          <a:noFill/>
+          <a:ln/>
+        </p:spPr>
+        <p:txBody>
+          <a:bodyPr wrap="square" lIns="0" tIns="0" rIns="0" bIns="0" rtlCol="0" anchor="ctr"/>
+          <a:lstStyle/>
+          <a:p>
+            <a:pPr indent="0" marL="0">
+              <a:buNone/>
+            </a:pPr>
+            <a:r>
+              <a:rPr lang="en-US" sz="1050" dirty="0">
+                <a:solidFill>
+                  <a:srgbClr val="94A3B8"/>
+                </a:solidFill>
+                <a:latin typeface="Calibri" pitchFamily="34" charset="0"/>
+                <a:ea typeface="Calibri" pitchFamily="34" charset="-122"/>
+                <a:cs typeface="Calibri" pitchFamily="34" charset="-120"/>
+              </a:rPr>
+              <a:t>Result: LLM coaching message. Calibrated to your personal baseline.</a:t>
+            </a:r>
+            <a:endParaRPr lang="en-US" sz="1050" dirty="0"/>
+          </a:p>
+        </p:txBody>
+      </p:sp>
+      <p:sp>
+        <p:nvSpPr>
+          <p:cNvPr id="21" name="Text 19"/>
+          <p:cNvSpPr/>
+          <p:nvPr/>
+        </p:nvSpPr>
+        <p:spPr>
+          <a:xfrm>
+            <a:off x="621792" y="4096512"/>
+            <a:ext cx="3611880" cy="274320"/>
+          </a:xfrm>
+          <a:prstGeom prst="rect">
+            <a:avLst/>
+          </a:prstGeom>
+          <a:noFill/>
+          <a:ln/>
+        </p:spPr>
+        <p:txBody>
+          <a:bodyPr wrap="square" lIns="0" tIns="0" rIns="0" bIns="0" rtlCol="0" anchor="ctr"/>
+          <a:lstStyle/>
+          <a:p>
+            <a:pPr indent="0" marL="0">
+              <a:buNone/>
+            </a:pPr>
+            <a:r>
+              <a:rPr lang="en-US" sz="950" i="1" dirty="0">
+                <a:solidFill>
+                  <a:srgbClr val="F59E0B"/>
+                </a:solidFill>
+                <a:latin typeface="Calibri" pitchFamily="34" charset="0"/>
+                <a:ea typeface="Calibri" pitchFamily="34" charset="-122"/>
+                <a:cs typeface="Calibri" pitchFamily="34" charset="-120"/>
+              </a:rPr>
+              <a:t>"Posture nudge — 72% slouch rate last 30 sec"</a:t>
+            </a:r>
+            <a:endParaRPr lang="en-US" sz="950" dirty="0"/>
+          </a:p>
+        </p:txBody>
+      </p:sp>
+      <p:sp>
+        <p:nvSpPr>
+          <p:cNvPr id="22" name="Shape 20"/>
+          <p:cNvSpPr/>
+          <p:nvPr/>
+        </p:nvSpPr>
+        <p:spPr>
+          <a:xfrm>
+            <a:off x="4800600" y="2980944"/>
+            <a:ext cx="3977640" cy="1572768"/>
+          </a:xfrm>
+          <a:prstGeom prst="rect">
+            <a:avLst/>
+          </a:prstGeom>
+          <a:solidFill>
+            <a:srgbClr val="13132A"/>
+          </a:solidFill>
+          <a:ln w="12700">
+            <a:solidFill>
+              <a:srgbClr val="1E1E40"/>
+            </a:solidFill>
+            <a:prstDash val="solid"/>
+          </a:ln>
+        </p:spPr>
+      </p:sp>
+      <p:sp>
+        <p:nvSpPr>
+          <p:cNvPr id="23" name="Shape 21"/>
+          <p:cNvSpPr/>
+          <p:nvPr/>
+        </p:nvSpPr>
+        <p:spPr>
+          <a:xfrm>
+            <a:off x="4800600" y="2980944"/>
+            <a:ext cx="3977640" cy="45720"/>
+          </a:xfrm>
+          <a:prstGeom prst="rect">
+            <a:avLst/>
+          </a:prstGeom>
+          <a:solidFill>
+            <a:srgbClr val="7C3AED"/>
+          </a:solidFill>
+          <a:ln w="12700">
+            <a:solidFill>
+              <a:srgbClr val="7C3AED"/>
+            </a:solidFill>
+            <a:prstDash val="solid"/>
+          </a:ln>
+        </p:spPr>
+      </p:sp>
+      <p:sp>
+        <p:nvSpPr>
+          <p:cNvPr id="24" name="Text 22"/>
+          <p:cNvSpPr/>
+          <p:nvPr/>
+        </p:nvSpPr>
+        <p:spPr>
+          <a:xfrm>
+            <a:off x="4965192" y="3090672"/>
+            <a:ext cx="3611880" cy="320040"/>
+          </a:xfrm>
+          <a:prstGeom prst="rect">
+            <a:avLst/>
+          </a:prstGeom>
+          <a:noFill/>
+          <a:ln/>
+        </p:spPr>
+        <p:txBody>
+          <a:bodyPr wrap="square" lIns="0" tIns="0" rIns="0" bIns="0" rtlCol="0" anchor="ctr"/>
+          <a:lstStyle/>
+          <a:p>
+            <a:pPr indent="0" marL="0">
+              <a:buNone/>
+            </a:pPr>
+            <a:r>
+              <a:rPr lang="en-US" sz="1300" b="1" dirty="0">
+                <a:solidFill>
+                  <a:srgbClr val="7C3AED"/>
+                </a:solidFill>
+                <a:latin typeface="Arial Black" pitchFamily="34" charset="0"/>
+                <a:ea typeface="Arial Black" pitchFamily="34" charset="-122"/>
+                <a:cs typeface="Arial Black" pitchFamily="34" charset="-120"/>
+              </a:rPr>
+              <a:t>📱  PHONE DETECTED</a:t>
+            </a:r>
+            <a:endParaRPr lang="en-US" sz="1300" dirty="0"/>
+          </a:p>
+        </p:txBody>
+      </p:sp>
+      <p:sp>
+        <p:nvSpPr>
+          <p:cNvPr id="25" name="Text 23"/>
+          <p:cNvSpPr/>
+          <p:nvPr/>
+        </p:nvSpPr>
+        <p:spPr>
+          <a:xfrm>
+            <a:off x="4965192" y="3438144"/>
+            <a:ext cx="3611880" cy="256032"/>
+          </a:xfrm>
+          <a:prstGeom prst="rect">
+            <a:avLst/>
+          </a:prstGeom>
+          <a:noFill/>
+          <a:ln/>
+        </p:spPr>
+        <p:txBody>
+          <a:bodyPr wrap="square" lIns="0" tIns="0" rIns="0" bIns="0" rtlCol="0" anchor="ctr"/>
+          <a:lstStyle/>
+          <a:p>
+            <a:pPr indent="0" marL="0">
+              <a:buNone/>
+            </a:pPr>
+            <a:r>
+              <a:rPr lang="en-US" sz="1050" dirty="0">
                 <a:solidFill>
                   <a:srgbClr val="E2E8F0"/>
                 </a:solidFill>
@@ -7151,192 +7947,93 @@
                 <a:ea typeface="Calibri" pitchFamily="34" charset="-122"/>
                 <a:cs typeface="Calibri" pitchFamily="34" charset="-120"/>
               </a:rPr>
-              <a:t>Flow extension 25→30 min  →  focus was 83%</a:t>
-            </a:r>
-            <a:endParaRPr lang="en-US" sz="1150" dirty="0"/>
-          </a:p>
-        </p:txBody>
-      </p:sp>
-      <p:sp>
-        <p:nvSpPr>
-          <p:cNvPr id="14" name="Shape 12"/>
-          <p:cNvSpPr/>
-          <p:nvPr/>
-        </p:nvSpPr>
-        <p:spPr>
-          <a:xfrm>
-            <a:off x="4754880" y="2843784"/>
-            <a:ext cx="91440" cy="91440"/>
-          </a:xfrm>
-          <a:prstGeom prst="ellipse">
-            <a:avLst/>
-          </a:prstGeom>
-          <a:solidFill>
-            <a:srgbClr val="06B6D4"/>
-          </a:solidFill>
-          <a:ln/>
-        </p:spPr>
-      </p:sp>
-      <p:sp>
-        <p:nvSpPr>
-          <p:cNvPr id="15" name="Text 13"/>
-          <p:cNvSpPr/>
-          <p:nvPr/>
-        </p:nvSpPr>
-        <p:spPr>
-          <a:xfrm>
-            <a:off x="4919472" y="2788920"/>
-            <a:ext cx="3749040" cy="457200"/>
-          </a:xfrm>
-          <a:prstGeom prst="rect">
-            <a:avLst/>
-          </a:prstGeom>
-          <a:noFill/>
-          <a:ln/>
-        </p:spPr>
-        <p:txBody>
-          <a:bodyPr wrap="square" rtlCol="0" anchor="ctr"/>
-          <a:lstStyle/>
-          <a:p>
-            <a:pPr indent="0" marL="0">
-              <a:buNone/>
-            </a:pPr>
-            <a:r>
-              <a:rPr lang="en-US" sz="1150" dirty="0">
-                <a:solidFill>
-                  <a:srgbClr val="E2E8F0"/>
-                </a:solidFill>
-                <a:latin typeface="Calibri" pitchFamily="34" charset="0"/>
-                <a:ea typeface="Calibri" pitchFamily="34" charset="-122"/>
-                <a:cs typeface="Calibri" pitchFamily="34" charset="-120"/>
-              </a:rPr>
-              <a:t>Posture nudge after 70%+ slouching (2 min cooldown)</a:t>
-            </a:r>
-            <a:endParaRPr lang="en-US" sz="1150" dirty="0"/>
-          </a:p>
-        </p:txBody>
-      </p:sp>
-      <p:sp>
-        <p:nvSpPr>
-          <p:cNvPr id="16" name="Shape 14"/>
-          <p:cNvSpPr/>
-          <p:nvPr/>
-        </p:nvSpPr>
-        <p:spPr>
-          <a:xfrm>
-            <a:off x="4754880" y="3429000"/>
-            <a:ext cx="91440" cy="91440"/>
-          </a:xfrm>
-          <a:prstGeom prst="ellipse">
-            <a:avLst/>
-          </a:prstGeom>
-          <a:solidFill>
-            <a:srgbClr val="EF4444"/>
-          </a:solidFill>
-          <a:ln/>
-        </p:spPr>
-      </p:sp>
-      <p:sp>
-        <p:nvSpPr>
-          <p:cNvPr id="17" name="Text 15"/>
-          <p:cNvSpPr/>
-          <p:nvPr/>
-        </p:nvSpPr>
-        <p:spPr>
-          <a:xfrm>
-            <a:off x="4919472" y="3374136"/>
-            <a:ext cx="3749040" cy="457200"/>
-          </a:xfrm>
-          <a:prstGeom prst="rect">
-            <a:avLst/>
-          </a:prstGeom>
-          <a:noFill/>
-          <a:ln/>
-        </p:spPr>
-        <p:txBody>
-          <a:bodyPr wrap="square" rtlCol="0" anchor="ctr"/>
-          <a:lstStyle/>
-          <a:p>
-            <a:pPr indent="0" marL="0">
-              <a:buNone/>
-            </a:pPr>
-            <a:r>
-              <a:rPr lang="en-US" sz="1150" dirty="0">
-                <a:solidFill>
-                  <a:srgbClr val="E2E8F0"/>
-                </a:solidFill>
-                <a:latin typeface="Calibri" pitchFamily="34" charset="0"/>
-                <a:ea typeface="Calibri" pitchFamily="34" charset="-122"/>
-                <a:cs typeface="Calibri" pitchFamily="34" charset="-120"/>
-              </a:rPr>
-              <a:t>Phone detected: hand visible 3s+ during work block</a:t>
-            </a:r>
-            <a:endParaRPr lang="en-US" sz="1150" dirty="0"/>
-          </a:p>
-        </p:txBody>
-      </p:sp>
-      <p:sp>
-        <p:nvSpPr>
-          <p:cNvPr id="18" name="Shape 16"/>
-          <p:cNvSpPr/>
-          <p:nvPr/>
-        </p:nvSpPr>
-        <p:spPr>
-          <a:xfrm>
-            <a:off x="4754880" y="4014216"/>
-            <a:ext cx="91440" cy="91440"/>
-          </a:xfrm>
-          <a:prstGeom prst="ellipse">
-            <a:avLst/>
-          </a:prstGeom>
-          <a:solidFill>
-            <a:srgbClr val="7C3AED"/>
-          </a:solidFill>
-          <a:ln/>
-        </p:spPr>
-      </p:sp>
-      <p:sp>
-        <p:nvSpPr>
-          <p:cNvPr id="19" name="Text 17"/>
-          <p:cNvSpPr/>
-          <p:nvPr/>
-        </p:nvSpPr>
-        <p:spPr>
-          <a:xfrm>
-            <a:off x="4919472" y="3959352"/>
-            <a:ext cx="3749040" cy="457200"/>
-          </a:xfrm>
-          <a:prstGeom prst="rect">
-            <a:avLst/>
-          </a:prstGeom>
-          <a:noFill/>
-          <a:ln/>
-        </p:spPr>
-        <p:txBody>
-          <a:bodyPr wrap="square" rtlCol="0" anchor="ctr"/>
-          <a:lstStyle/>
-          <a:p>
-            <a:pPr indent="0" marL="0">
-              <a:buNone/>
-            </a:pPr>
-            <a:r>
-              <a:rPr lang="en-US" sz="1150" dirty="0">
-                <a:solidFill>
-                  <a:srgbClr val="E2E8F0"/>
-                </a:solidFill>
-                <a:latin typeface="Calibri" pitchFamily="34" charset="0"/>
-                <a:ea typeface="Calibri" pitchFamily="34" charset="-122"/>
-                <a:cs typeface="Calibri" pitchFamily="34" charset="-120"/>
-              </a:rPr>
-              <a:t>All changes timestamped in timer_history log</a:t>
-            </a:r>
-            <a:endParaRPr lang="en-US" sz="1150" dirty="0"/>
-          </a:p>
-        </p:txBody>
-      </p:sp>
-      <p:sp>
-        <p:nvSpPr>
-          <p:cNvPr id="20" name="Text 18"/>
+              <a:t>Trigger: hand visible ≥ 3 continuous seconds during work</a:t>
+            </a:r>
+            <a:endParaRPr lang="en-US" sz="1050" dirty="0"/>
+          </a:p>
+        </p:txBody>
+      </p:sp>
+      <p:sp>
+        <p:nvSpPr>
+          <p:cNvPr id="26" name="Text 24"/>
+          <p:cNvSpPr/>
+          <p:nvPr/>
+        </p:nvSpPr>
+        <p:spPr>
+          <a:xfrm>
+            <a:off x="4965192" y="3712464"/>
+            <a:ext cx="3611880" cy="320040"/>
+          </a:xfrm>
+          <a:prstGeom prst="rect">
+            <a:avLst/>
+          </a:prstGeom>
+          <a:noFill/>
+          <a:ln/>
+        </p:spPr>
+        <p:txBody>
+          <a:bodyPr wrap="square" lIns="0" tIns="0" rIns="0" bIns="0" rtlCol="0" anchor="ctr"/>
+          <a:lstStyle/>
+          <a:p>
+            <a:pPr indent="0" marL="0">
+              <a:buNone/>
+            </a:pPr>
+            <a:r>
+              <a:rPr lang="en-US" sz="1050" dirty="0">
+                <a:solidFill>
+                  <a:srgbClr val="94A3B8"/>
+                </a:solidFill>
+                <a:latin typeface="Calibri" pitchFamily="34" charset="0"/>
+                <a:ea typeface="Calibri" pitchFamily="34" charset="-122"/>
+                <a:cs typeface="Calibri" pitchFamily="34" charset="-120"/>
+              </a:rPr>
+              <a:t>Result: LLM coaching message. 5-second hold to avoid false positives.</a:t>
+            </a:r>
+            <a:endParaRPr lang="en-US" sz="1050" dirty="0"/>
+          </a:p>
+        </p:txBody>
+      </p:sp>
+      <p:sp>
+        <p:nvSpPr>
+          <p:cNvPr id="27" name="Text 25"/>
+          <p:cNvSpPr/>
+          <p:nvPr/>
+        </p:nvSpPr>
+        <p:spPr>
+          <a:xfrm>
+            <a:off x="4965192" y="4096512"/>
+            <a:ext cx="3611880" cy="274320"/>
+          </a:xfrm>
+          <a:prstGeom prst="rect">
+            <a:avLst/>
+          </a:prstGeom>
+          <a:noFill/>
+          <a:ln/>
+        </p:spPr>
+        <p:txBody>
+          <a:bodyPr wrap="square" lIns="0" tIns="0" rIns="0" bIns="0" rtlCol="0" anchor="ctr"/>
+          <a:lstStyle/>
+          <a:p>
+            <a:pPr indent="0" marL="0">
+              <a:buNone/>
+            </a:pPr>
+            <a:r>
+              <a:rPr lang="en-US" sz="950" i="1" dirty="0">
+                <a:solidFill>
+                  <a:srgbClr val="7C3AED"/>
+                </a:solidFill>
+                <a:latin typeface="Calibri" pitchFamily="34" charset="0"/>
+                <a:ea typeface="Calibri" pitchFamily="34" charset="-122"/>
+                <a:cs typeface="Calibri" pitchFamily="34" charset="-120"/>
+              </a:rPr>
+              <a:t>"Hand detected 4s, gaze away — phone likely in use"</a:t>
+            </a:r>
+            <a:endParaRPr lang="en-US" sz="950" dirty="0"/>
+          </a:p>
+        </p:txBody>
+      </p:sp>
+      <p:sp>
+        <p:nvSpPr>
+          <p:cNvPr id="28" name="Text 26"/>
           <p:cNvSpPr/>
           <p:nvPr/>
         </p:nvSpPr>
@@ -7359,15 +8056,15 @@
               <a:buNone/>
             </a:pPr>
             <a:r>
-              <a:rPr lang="en-US" sz="1050" i="1" dirty="0">
-                <a:solidFill>
-                  <a:srgbClr val="7C3AED"/>
-                </a:solidFill>
-                <a:latin typeface="Calibri" pitchFamily="34" charset="0"/>
-                <a:ea typeface="Calibri" pitchFamily="34" charset="-122"/>
-                <a:cs typeface="Calibri" pitchFamily="34" charset="-120"/>
-              </a:rPr>
-              <a:t>"Early break at 3m (focus=30%, was 5m block)"  —  actual log entry from real session</a:t>
+              <a:rPr lang="en-US" sz="1050" dirty="0">
+                <a:solidFill>
+                  <a:srgbClr val="06B6D4"/>
+                </a:solidFill>
+                <a:latin typeface="Calibri" pitchFamily="34" charset="0"/>
+                <a:ea typeface="Calibri" pitchFamily="34" charset="-122"/>
+                <a:cs typeface="Calibri" pitchFamily="34" charset="-120"/>
+              </a:rPr>
+              <a:t>Manual: Press [E] at any time during a work block or transition to add +5 min and stay in flow.</a:t>
             </a:r>
             <a:endParaRPr lang="en-US" sz="1050" dirty="0"/>
           </a:p>
@@ -7413,8 +8110,8 @@
         </p:nvSpPr>
         <p:spPr>
           <a:xfrm>
-            <a:off x="457200" y="256032"/>
-            <a:ext cx="8229600" cy="548640"/>
+            <a:off x="457200" y="228600"/>
+            <a:ext cx="8229600" cy="502920"/>
           </a:xfrm>
           <a:prstGeom prst="rect">
             <a:avLst/>
@@ -7452,7 +8149,7 @@
         </p:nvSpPr>
         <p:spPr>
           <a:xfrm>
-            <a:off x="457200" y="804672"/>
+            <a:off x="457200" y="758952"/>
             <a:ext cx="8229600" cy="347472"/>
           </a:xfrm>
           <a:prstGeom prst="rect">
@@ -7469,7 +8166,7 @@
               <a:buNone/>
             </a:pPr>
             <a:r>
-              <a:rPr lang="en-US" sz="1300" dirty="0">
+              <a:rPr lang="en-US" sz="1250" dirty="0">
                 <a:solidFill>
                   <a:srgbClr val="94A3B8"/>
                 </a:solidFill>
@@ -7477,9 +8174,9 @@
                 <a:ea typeface="Calibri" pitchFamily="34" charset="-122"/>
                 <a:cs typeface="Calibri" pitchFamily="34" charset="-120"/>
               </a:rPr>
-              <a:t>Every intervention triggers an async Gemini 2.5 Flash call with your real-time sensor context.</a:t>
-            </a:r>
-            <a:endParaRPr lang="en-US" sz="1300" dirty="0"/>
+              <a:t>Every rule trigger fires an async Gemini 2.5 Flash call with your exact sensor context. Responses arrive in &lt; 2 seconds.</a:t>
+            </a:r>
+            <a:endParaRPr lang="en-US" sz="1250" dirty="0"/>
           </a:p>
         </p:txBody>
       </p:sp>
@@ -7491,8 +8188,8 @@
         </p:nvSpPr>
         <p:spPr>
           <a:xfrm>
-            <a:off x="457200" y="1298448"/>
-            <a:ext cx="4160520" cy="1627632"/>
+            <a:off x="457200" y="1280160"/>
+            <a:ext cx="4160520" cy="1664208"/>
           </a:xfrm>
           <a:prstGeom prst="rect">
             <a:avLst/>
@@ -7516,7 +8213,7 @@
         </p:nvSpPr>
         <p:spPr>
           <a:xfrm>
-            <a:off x="457200" y="1298448"/>
+            <a:off x="457200" y="1280160"/>
             <a:ext cx="4160520" cy="45720"/>
           </a:xfrm>
           <a:prstGeom prst="rect">
@@ -7541,17 +8238,17 @@
         </p:nvSpPr>
         <p:spPr>
           <a:xfrm>
-            <a:off x="594360" y="1417320"/>
-            <a:ext cx="1673352" cy="274320"/>
+            <a:off x="594360" y="1371600"/>
+            <a:ext cx="1645920" cy="256032"/>
           </a:xfrm>
           <a:prstGeom prst="roundRect">
             <a:avLst>
-              <a:gd name="adj" fmla="val 16667"/>
+              <a:gd name="adj" fmla="val 14286"/>
             </a:avLst>
           </a:prstGeom>
           <a:solidFill>
             <a:srgbClr val="F59E0B">
-              <a:alpha val="30000"/>
+              <a:alpha val="28000"/>
             </a:srgbClr>
           </a:solidFill>
           <a:ln w="12700">
@@ -7570,8 +8267,8 @@
         </p:nvSpPr>
         <p:spPr>
           <a:xfrm>
-            <a:off x="594360" y="1417320"/>
-            <a:ext cx="1673352" cy="274320"/>
+            <a:off x="594360" y="1371600"/>
+            <a:ext cx="1645920" cy="256032"/>
           </a:xfrm>
           <a:prstGeom prst="rect">
             <a:avLst/>
@@ -7587,27 +8284,66 @@
               <a:buNone/>
             </a:pPr>
             <a:r>
-              <a:rPr lang="en-US" sz="900" b="1" dirty="0">
+              <a:rPr lang="en-US" sz="850" b="1" dirty="0">
                 <a:solidFill>
                   <a:srgbClr val="F59E0B"/>
                 </a:solidFill>
               </a:rPr>
               <a:t>POSTURE_NUDGE</a:t>
             </a:r>
+            <a:endParaRPr lang="en-US" sz="850" dirty="0"/>
+          </a:p>
+        </p:txBody>
+      </p:sp>
+      <p:sp>
+        <p:nvSpPr>
+          <p:cNvPr id="8" name="Text 6"/>
+          <p:cNvSpPr/>
+          <p:nvPr/>
+        </p:nvSpPr>
+        <p:spPr>
+          <a:xfrm>
+            <a:off x="594360" y="1700784"/>
+            <a:ext cx="3913632" cy="237744"/>
+          </a:xfrm>
+          <a:prstGeom prst="rect">
+            <a:avLst/>
+          </a:prstGeom>
+          <a:noFill/>
+          <a:ln/>
+        </p:spPr>
+        <p:txBody>
+          <a:bodyPr wrap="square" rtlCol="0" anchor="ctr"/>
+          <a:lstStyle/>
+          <a:p>
+            <a:pPr indent="0" marL="0">
+              <a:buNone/>
+            </a:pPr>
+            <a:r>
+              <a:rPr lang="en-US" sz="900" i="1" dirty="0">
+                <a:solidFill>
+                  <a:srgbClr val="94A3B8"/>
+                </a:solidFill>
+                <a:latin typeface="Calibri" pitchFamily="34" charset="0"/>
+                <a:ea typeface="Calibri" pitchFamily="34" charset="-122"/>
+                <a:cs typeface="Calibri" pitchFamily="34" charset="-120"/>
+              </a:rPr>
+              <a:t>Context: focus=65%, slouch=72% of last 30s, blink=8/min</a:t>
+            </a:r>
             <a:endParaRPr lang="en-US" sz="900" dirty="0"/>
           </a:p>
         </p:txBody>
       </p:sp>
       <p:sp>
         <p:nvSpPr>
-          <p:cNvPr id="8" name="Text 6"/>
-          <p:cNvSpPr/>
-          <p:nvPr/>
-        </p:nvSpPr>
-        <p:spPr>
-          <a:xfrm>
-            <a:off x="594360" y="1737360"/>
-            <a:ext cx="3886200" cy="228600"/>
+          <p:cNvPr id="9" name="Text 7"/>
+          <p:cNvSpPr/>
+          <p:nvPr/>
+        </p:nvSpPr>
+        <p:spPr>
+          <a:xfrm>
+            <a:off x="594360" y="1975104"/>
+            <a:ext cx="3913632" cy="822960"/>
           </a:xfrm>
           <a:prstGeom prst="rect">
             <a:avLst/>
@@ -7623,45 +8359,6 @@
               <a:buNone/>
             </a:pPr>
             <a:r>
-              <a:rPr lang="en-US" sz="900" i="1" dirty="0">
-                <a:solidFill>
-                  <a:srgbClr val="94A3B8"/>
-                </a:solidFill>
-                <a:latin typeface="Calibri" pitchFamily="34" charset="0"/>
-                <a:ea typeface="Calibri" pitchFamily="34" charset="-122"/>
-                <a:cs typeface="Calibri" pitchFamily="34" charset="-120"/>
-              </a:rPr>
-              <a:t>Context: focus=65%, slouch=72% of last 30s, blink=8/min</a:t>
-            </a:r>
-            <a:endParaRPr lang="en-US" sz="900" dirty="0"/>
-          </a:p>
-        </p:txBody>
-      </p:sp>
-      <p:sp>
-        <p:nvSpPr>
-          <p:cNvPr id="9" name="Text 7"/>
-          <p:cNvSpPr/>
-          <p:nvPr/>
-        </p:nvSpPr>
-        <p:spPr>
-          <a:xfrm>
-            <a:off x="594360" y="2011680"/>
-            <a:ext cx="3886200" cy="804672"/>
-          </a:xfrm>
-          <a:prstGeom prst="rect">
-            <a:avLst/>
-          </a:prstGeom>
-          <a:noFill/>
-          <a:ln/>
-        </p:spPr>
-        <p:txBody>
-          <a:bodyPr wrap="square" rtlCol="0" anchor="ctr"/>
-          <a:lstStyle/>
-          <a:p>
-            <a:pPr indent="0" marL="0">
-              <a:buNone/>
-            </a:pPr>
-            <a:r>
               <a:rPr lang="en-US" sz="1050" dirty="0">
                 <a:solidFill>
                   <a:srgbClr val="E2E8F0"/>
@@ -7701,8 +8398,8 @@
         </p:nvSpPr>
         <p:spPr>
           <a:xfrm>
-            <a:off x="4846320" y="1298448"/>
-            <a:ext cx="4160520" cy="1627632"/>
+            <a:off x="4864608" y="1280160"/>
+            <a:ext cx="4160520" cy="1664208"/>
           </a:xfrm>
           <a:prstGeom prst="rect">
             <a:avLst/>
@@ -7726,7 +8423,7 @@
         </p:nvSpPr>
         <p:spPr>
           <a:xfrm>
-            <a:off x="4846320" y="1298448"/>
+            <a:off x="4864608" y="1280160"/>
             <a:ext cx="4160520" cy="45720"/>
           </a:xfrm>
           <a:prstGeom prst="rect">
@@ -7751,17 +8448,17 @@
         </p:nvSpPr>
         <p:spPr>
           <a:xfrm>
-            <a:off x="4983480" y="1417320"/>
-            <a:ext cx="1472184" cy="274320"/>
+            <a:off x="5001768" y="1371600"/>
+            <a:ext cx="1463040" cy="256032"/>
           </a:xfrm>
           <a:prstGeom prst="roundRect">
             <a:avLst>
-              <a:gd name="adj" fmla="val 16667"/>
+              <a:gd name="adj" fmla="val 14286"/>
             </a:avLst>
           </a:prstGeom>
           <a:solidFill>
             <a:srgbClr val="EF4444">
-              <a:alpha val="30000"/>
+              <a:alpha val="28000"/>
             </a:srgbClr>
           </a:solidFill>
           <a:ln w="12700">
@@ -7780,8 +8477,8 @@
         </p:nvSpPr>
         <p:spPr>
           <a:xfrm>
-            <a:off x="4983480" y="1417320"/>
-            <a:ext cx="1472184" cy="274320"/>
+            <a:off x="5001768" y="1371600"/>
+            <a:ext cx="1463040" cy="256032"/>
           </a:xfrm>
           <a:prstGeom prst="rect">
             <a:avLst/>
@@ -7797,27 +8494,66 @@
               <a:buNone/>
             </a:pPr>
             <a:r>
-              <a:rPr lang="en-US" sz="900" b="1" dirty="0">
+              <a:rPr lang="en-US" sz="850" b="1" dirty="0">
                 <a:solidFill>
                   <a:srgbClr val="EF4444"/>
                 </a:solidFill>
               </a:rPr>
               <a:t>EARLY_BREAK</a:t>
             </a:r>
+            <a:endParaRPr lang="en-US" sz="850" dirty="0"/>
+          </a:p>
+        </p:txBody>
+      </p:sp>
+      <p:sp>
+        <p:nvSpPr>
+          <p:cNvPr id="14" name="Text 12"/>
+          <p:cNvSpPr/>
+          <p:nvPr/>
+        </p:nvSpPr>
+        <p:spPr>
+          <a:xfrm>
+            <a:off x="5001768" y="1700784"/>
+            <a:ext cx="3913632" cy="237744"/>
+          </a:xfrm>
+          <a:prstGeom prst="rect">
+            <a:avLst/>
+          </a:prstGeom>
+          <a:noFill/>
+          <a:ln/>
+        </p:spPr>
+        <p:txBody>
+          <a:bodyPr wrap="square" rtlCol="0" anchor="ctr"/>
+          <a:lstStyle/>
+          <a:p>
+            <a:pPr indent="0" marL="0">
+              <a:buNone/>
+            </a:pPr>
+            <a:r>
+              <a:rPr lang="en-US" sz="900" i="1" dirty="0">
+                <a:solidFill>
+                  <a:srgbClr val="94A3B8"/>
+                </a:solidFill>
+                <a:latin typeface="Calibri" pitchFamily="34" charset="0"/>
+                <a:ea typeface="Calibri" pitchFamily="34" charset="-122"/>
+                <a:cs typeface="Calibri" pitchFamily="34" charset="-120"/>
+              </a:rPr>
+              <a:t>Context: focus=28%, elapsed=14min, noise=61dB</a:t>
+            </a:r>
             <a:endParaRPr lang="en-US" sz="900" dirty="0"/>
           </a:p>
         </p:txBody>
       </p:sp>
       <p:sp>
         <p:nvSpPr>
-          <p:cNvPr id="14" name="Text 12"/>
-          <p:cNvSpPr/>
-          <p:nvPr/>
-        </p:nvSpPr>
-        <p:spPr>
-          <a:xfrm>
-            <a:off x="4983480" y="1737360"/>
-            <a:ext cx="3886200" cy="228600"/>
+          <p:cNvPr id="15" name="Text 13"/>
+          <p:cNvSpPr/>
+          <p:nvPr/>
+        </p:nvSpPr>
+        <p:spPr>
+          <a:xfrm>
+            <a:off x="5001768" y="1975104"/>
+            <a:ext cx="3913632" cy="822960"/>
           </a:xfrm>
           <a:prstGeom prst="rect">
             <a:avLst/>
@@ -7833,45 +8569,6 @@
               <a:buNone/>
             </a:pPr>
             <a:r>
-              <a:rPr lang="en-US" sz="900" i="1" dirty="0">
-                <a:solidFill>
-                  <a:srgbClr val="94A3B8"/>
-                </a:solidFill>
-                <a:latin typeface="Calibri" pitchFamily="34" charset="0"/>
-                <a:ea typeface="Calibri" pitchFamily="34" charset="-122"/>
-                <a:cs typeface="Calibri" pitchFamily="34" charset="-120"/>
-              </a:rPr>
-              <a:t>Context: focus=28%, elapsed=14min, noise=61dB</a:t>
-            </a:r>
-            <a:endParaRPr lang="en-US" sz="900" dirty="0"/>
-          </a:p>
-        </p:txBody>
-      </p:sp>
-      <p:sp>
-        <p:nvSpPr>
-          <p:cNvPr id="15" name="Text 13"/>
-          <p:cNvSpPr/>
-          <p:nvPr/>
-        </p:nvSpPr>
-        <p:spPr>
-          <a:xfrm>
-            <a:off x="4983480" y="2011680"/>
-            <a:ext cx="3886200" cy="804672"/>
-          </a:xfrm>
-          <a:prstGeom prst="rect">
-            <a:avLst/>
-          </a:prstGeom>
-          <a:noFill/>
-          <a:ln/>
-        </p:spPr>
-        <p:txBody>
-          <a:bodyPr wrap="square" rtlCol="0" anchor="ctr"/>
-          <a:lstStyle/>
-          <a:p>
-            <a:pPr indent="0" marL="0">
-              <a:buNone/>
-            </a:pPr>
-            <a:r>
               <a:rPr lang="en-US" sz="1050" dirty="0">
                 <a:solidFill>
                   <a:srgbClr val="E2E8F0"/>
@@ -7880,7 +8577,7 @@
                 <a:ea typeface="Calibri" pitchFamily="34" charset="-122"/>
                 <a:cs typeface="Calibri" pitchFamily="34" charset="-120"/>
               </a:rPr>
-              <a:t>• Focus dropped sharply — your brain needs a real reset.</a:t>
+              <a:t>• Focus dropped sharply — your brain needs a real reset now.</a:t>
             </a:r>
             <a:endParaRPr lang="en-US" sz="1050" dirty="0"/>
           </a:p>
@@ -7897,7 +8594,7 @@
                 <a:ea typeface="Calibri" pitchFamily="34" charset="-122"/>
                 <a:cs typeface="Calibri" pitchFamily="34" charset="-120"/>
               </a:rPr>
-              <a:t>• Step away from the screen; even 5 minutes will help significantly.</a:t>
+              <a:t>• Step away from the screen; even 5 minutes will help.</a:t>
             </a:r>
             <a:endParaRPr lang="en-US" sz="1050" dirty="0"/>
           </a:p>
@@ -7911,8 +8608,8 @@
         </p:nvSpPr>
         <p:spPr>
           <a:xfrm>
-            <a:off x="457200" y="3127248"/>
-            <a:ext cx="4160520" cy="1627632"/>
+            <a:off x="457200" y="3063240"/>
+            <a:ext cx="4160520" cy="1664208"/>
           </a:xfrm>
           <a:prstGeom prst="rect">
             <a:avLst/>
@@ -7936,7 +8633,7 @@
         </p:nvSpPr>
         <p:spPr>
           <a:xfrm>
-            <a:off x="457200" y="3127248"/>
+            <a:off x="457200" y="3063240"/>
             <a:ext cx="4160520" cy="45720"/>
           </a:xfrm>
           <a:prstGeom prst="rect">
@@ -7961,17 +8658,17 @@
         </p:nvSpPr>
         <p:spPr>
           <a:xfrm>
-            <a:off x="594360" y="3246120"/>
-            <a:ext cx="1773936" cy="274320"/>
+            <a:off x="594360" y="3154680"/>
+            <a:ext cx="1737360" cy="256032"/>
           </a:xfrm>
           <a:prstGeom prst="roundRect">
             <a:avLst>
-              <a:gd name="adj" fmla="val 16667"/>
+              <a:gd name="adj" fmla="val 14286"/>
             </a:avLst>
           </a:prstGeom>
           <a:solidFill>
             <a:srgbClr val="7C3AED">
-              <a:alpha val="30000"/>
+              <a:alpha val="28000"/>
             </a:srgbClr>
           </a:solidFill>
           <a:ln w="12700">
@@ -7990,8 +8687,8 @@
         </p:nvSpPr>
         <p:spPr>
           <a:xfrm>
-            <a:off x="594360" y="3246120"/>
-            <a:ext cx="1773936" cy="274320"/>
+            <a:off x="594360" y="3154680"/>
+            <a:ext cx="1737360" cy="256032"/>
           </a:xfrm>
           <a:prstGeom prst="rect">
             <a:avLst/>
@@ -8007,27 +8704,66 @@
               <a:buNone/>
             </a:pPr>
             <a:r>
-              <a:rPr lang="en-US" sz="900" b="1" dirty="0">
+              <a:rPr lang="en-US" sz="850" b="1" dirty="0">
                 <a:solidFill>
                   <a:srgbClr val="7C3AED"/>
                 </a:solidFill>
               </a:rPr>
               <a:t>PHONE_DETECTED</a:t>
             </a:r>
+            <a:endParaRPr lang="en-US" sz="850" dirty="0"/>
+          </a:p>
+        </p:txBody>
+      </p:sp>
+      <p:sp>
+        <p:nvSpPr>
+          <p:cNvPr id="20" name="Text 18"/>
+          <p:cNvSpPr/>
+          <p:nvPr/>
+        </p:nvSpPr>
+        <p:spPr>
+          <a:xfrm>
+            <a:off x="594360" y="3483864"/>
+            <a:ext cx="3913632" cy="237744"/>
+          </a:xfrm>
+          <a:prstGeom prst="rect">
+            <a:avLst/>
+          </a:prstGeom>
+          <a:noFill/>
+          <a:ln/>
+        </p:spPr>
+        <p:txBody>
+          <a:bodyPr wrap="square" rtlCol="0" anchor="ctr"/>
+          <a:lstStyle/>
+          <a:p>
+            <a:pPr indent="0" marL="0">
+              <a:buNone/>
+            </a:pPr>
+            <a:r>
+              <a:rPr lang="en-US" sz="900" i="1" dirty="0">
+                <a:solidFill>
+                  <a:srgbClr val="94A3B8"/>
+                </a:solidFill>
+                <a:latin typeface="Calibri" pitchFamily="34" charset="0"/>
+                <a:ea typeface="Calibri" pitchFamily="34" charset="-122"/>
+                <a:cs typeface="Calibri" pitchFamily="34" charset="-120"/>
+              </a:rPr>
+              <a:t>Context: hand visible 4s, gaze away, during work block</a:t>
+            </a:r>
             <a:endParaRPr lang="en-US" sz="900" dirty="0"/>
           </a:p>
         </p:txBody>
       </p:sp>
       <p:sp>
         <p:nvSpPr>
-          <p:cNvPr id="20" name="Text 18"/>
-          <p:cNvSpPr/>
-          <p:nvPr/>
-        </p:nvSpPr>
-        <p:spPr>
-          <a:xfrm>
-            <a:off x="594360" y="3566160"/>
-            <a:ext cx="3886200" cy="228600"/>
+          <p:cNvPr id="21" name="Text 19"/>
+          <p:cNvSpPr/>
+          <p:nvPr/>
+        </p:nvSpPr>
+        <p:spPr>
+          <a:xfrm>
+            <a:off x="594360" y="3758184"/>
+            <a:ext cx="3913632" cy="822960"/>
           </a:xfrm>
           <a:prstGeom prst="rect">
             <a:avLst/>
@@ -8043,45 +8779,6 @@
               <a:buNone/>
             </a:pPr>
             <a:r>
-              <a:rPr lang="en-US" sz="900" i="1" dirty="0">
-                <a:solidFill>
-                  <a:srgbClr val="94A3B8"/>
-                </a:solidFill>
-                <a:latin typeface="Calibri" pitchFamily="34" charset="0"/>
-                <a:ea typeface="Calibri" pitchFamily="34" charset="-122"/>
-                <a:cs typeface="Calibri" pitchFamily="34" charset="-120"/>
-              </a:rPr>
-              <a:t>Context: hand visible 4s, gaze away, during work block</a:t>
-            </a:r>
-            <a:endParaRPr lang="en-US" sz="900" dirty="0"/>
-          </a:p>
-        </p:txBody>
-      </p:sp>
-      <p:sp>
-        <p:nvSpPr>
-          <p:cNvPr id="21" name="Text 19"/>
-          <p:cNvSpPr/>
-          <p:nvPr/>
-        </p:nvSpPr>
-        <p:spPr>
-          <a:xfrm>
-            <a:off x="594360" y="3840480"/>
-            <a:ext cx="3886200" cy="804672"/>
-          </a:xfrm>
-          <a:prstGeom prst="rect">
-            <a:avLst/>
-          </a:prstGeom>
-          <a:noFill/>
-          <a:ln/>
-        </p:spPr>
-        <p:txBody>
-          <a:bodyPr wrap="square" rtlCol="0" anchor="ctr"/>
-          <a:lstStyle/>
-          <a:p>
-            <a:pPr indent="0" marL="0">
-              <a:buNone/>
-            </a:pPr>
-            <a:r>
               <a:rPr lang="en-US" sz="1050" dirty="0">
                 <a:solidFill>
                   <a:srgbClr val="E2E8F0"/>
@@ -8121,8 +8818,8 @@
         </p:nvSpPr>
         <p:spPr>
           <a:xfrm>
-            <a:off x="4846320" y="3127248"/>
-            <a:ext cx="4160520" cy="1627632"/>
+            <a:off x="4864608" y="3063240"/>
+            <a:ext cx="4160520" cy="1664208"/>
           </a:xfrm>
           <a:prstGeom prst="rect">
             <a:avLst/>
@@ -8146,7 +8843,7 @@
         </p:nvSpPr>
         <p:spPr>
           <a:xfrm>
-            <a:off x="4846320" y="3127248"/>
+            <a:off x="4864608" y="3063240"/>
             <a:ext cx="4160520" cy="45720"/>
           </a:xfrm>
           <a:prstGeom prst="rect">
@@ -8171,17 +8868,17 @@
         </p:nvSpPr>
         <p:spPr>
           <a:xfrm>
-            <a:off x="4983480" y="3246120"/>
-            <a:ext cx="1472184" cy="274320"/>
+            <a:off x="5001768" y="3154680"/>
+            <a:ext cx="1463040" cy="256032"/>
           </a:xfrm>
           <a:prstGeom prst="roundRect">
             <a:avLst>
-              <a:gd name="adj" fmla="val 16667"/>
+              <a:gd name="adj" fmla="val 14286"/>
             </a:avLst>
           </a:prstGeom>
           <a:solidFill>
             <a:srgbClr val="10B981">
-              <a:alpha val="30000"/>
+              <a:alpha val="28000"/>
             </a:srgbClr>
           </a:solidFill>
           <a:ln w="12700">
@@ -8200,8 +8897,8 @@
         </p:nvSpPr>
         <p:spPr>
           <a:xfrm>
-            <a:off x="4983480" y="3246120"/>
-            <a:ext cx="1472184" cy="274320"/>
+            <a:off x="5001768" y="3154680"/>
+            <a:ext cx="1463040" cy="256032"/>
           </a:xfrm>
           <a:prstGeom prst="rect">
             <a:avLst/>
@@ -8217,27 +8914,66 @@
               <a:buNone/>
             </a:pPr>
             <a:r>
-              <a:rPr lang="en-US" sz="900" b="1" dirty="0">
+              <a:rPr lang="en-US" sz="850" b="1" dirty="0">
                 <a:solidFill>
                   <a:srgbClr val="10B981"/>
                 </a:solidFill>
               </a:rPr>
               <a:t>SESSION_END</a:t>
             </a:r>
+            <a:endParaRPr lang="en-US" sz="850" dirty="0"/>
+          </a:p>
+        </p:txBody>
+      </p:sp>
+      <p:sp>
+        <p:nvSpPr>
+          <p:cNvPr id="26" name="Text 24"/>
+          <p:cNvSpPr/>
+          <p:nvPr/>
+        </p:nvSpPr>
+        <p:spPr>
+          <a:xfrm>
+            <a:off x="5001768" y="3483864"/>
+            <a:ext cx="3913632" cy="237744"/>
+          </a:xfrm>
+          <a:prstGeom prst="rect">
+            <a:avLst/>
+          </a:prstGeom>
+          <a:noFill/>
+          <a:ln/>
+        </p:spPr>
+        <p:txBody>
+          <a:bodyPr wrap="square" rtlCol="0" anchor="ctr"/>
+          <a:lstStyle/>
+          <a:p>
+            <a:pPr indent="0" marL="0">
+              <a:buNone/>
+            </a:pPr>
+            <a:r>
+              <a:rPr lang="en-US" sz="900" i="1" dirty="0">
+                <a:solidFill>
+                  <a:srgbClr val="94A3B8"/>
+                </a:solidFill>
+                <a:latin typeface="Calibri" pitchFamily="34" charset="0"/>
+                <a:ea typeface="Calibri" pitchFamily="34" charset="-122"/>
+                <a:cs typeface="Calibri" pitchFamily="34" charset="-120"/>
+              </a:rPr>
+              <a:t>Context: focus=72%, 25min session, top_app=Claude</a:t>
+            </a:r>
             <a:endParaRPr lang="en-US" sz="900" dirty="0"/>
           </a:p>
         </p:txBody>
       </p:sp>
       <p:sp>
         <p:nvSpPr>
-          <p:cNvPr id="26" name="Text 24"/>
-          <p:cNvSpPr/>
-          <p:nvPr/>
-        </p:nvSpPr>
-        <p:spPr>
-          <a:xfrm>
-            <a:off x="4983480" y="3566160"/>
-            <a:ext cx="3886200" cy="228600"/>
+          <p:cNvPr id="27" name="Text 25"/>
+          <p:cNvSpPr/>
+          <p:nvPr/>
+        </p:nvSpPr>
+        <p:spPr>
+          <a:xfrm>
+            <a:off x="5001768" y="3758184"/>
+            <a:ext cx="3913632" cy="822960"/>
           </a:xfrm>
           <a:prstGeom prst="rect">
             <a:avLst/>
@@ -8253,30 +8989,47 @@
               <a:buNone/>
             </a:pPr>
             <a:r>
-              <a:rPr lang="en-US" sz="900" i="1" dirty="0">
-                <a:solidFill>
-                  <a:srgbClr val="94A3B8"/>
-                </a:solidFill>
-                <a:latin typeface="Calibri" pitchFamily="34" charset="0"/>
-                <a:ea typeface="Calibri" pitchFamily="34" charset="-122"/>
-                <a:cs typeface="Calibri" pitchFamily="34" charset="-120"/>
-              </a:rPr>
-              <a:t>Context: focus=72%, 25min, top_app=Claude</a:t>
-            </a:r>
-            <a:endParaRPr lang="en-US" sz="900" dirty="0"/>
-          </a:p>
-        </p:txBody>
-      </p:sp>
-      <p:sp>
-        <p:nvSpPr>
-          <p:cNvPr id="27" name="Text 25"/>
-          <p:cNvSpPr/>
-          <p:nvPr/>
-        </p:nvSpPr>
-        <p:spPr>
-          <a:xfrm>
-            <a:off x="4983480" y="3840480"/>
-            <a:ext cx="3886200" cy="804672"/>
+              <a:rPr lang="en-US" sz="1050" dirty="0">
+                <a:solidFill>
+                  <a:srgbClr val="E2E8F0"/>
+                </a:solidFill>
+                <a:latin typeface="Calibri" pitchFamily="34" charset="0"/>
+                <a:ea typeface="Calibri" pitchFamily="34" charset="-122"/>
+                <a:cs typeface="Calibri" pitchFamily="34" charset="-120"/>
+              </a:rPr>
+              <a:t>• Great session — 72% focus is above your personal average.</a:t>
+            </a:r>
+            <a:endParaRPr lang="en-US" sz="1050" dirty="0"/>
+          </a:p>
+          <a:p>
+            <a:pPr indent="0" marL="0">
+              <a:buNone/>
+            </a:pPr>
+            <a:r>
+              <a:rPr lang="en-US" sz="1050" dirty="0">
+                <a:solidFill>
+                  <a:srgbClr val="E2E8F0"/>
+                </a:solidFill>
+                <a:latin typeface="Calibri" pitchFamily="34" charset="0"/>
+                <a:ea typeface="Calibri" pitchFamily="34" charset="-122"/>
+                <a:cs typeface="Calibri" pitchFamily="34" charset="-120"/>
+              </a:rPr>
+              <a:t>• Your peak hour is 5 PM; protect that time tomorrow.</a:t>
+            </a:r>
+            <a:endParaRPr lang="en-US" sz="1050" dirty="0"/>
+          </a:p>
+        </p:txBody>
+      </p:sp>
+      <p:sp>
+        <p:nvSpPr>
+          <p:cNvPr id="28" name="Text 26"/>
+          <p:cNvSpPr/>
+          <p:nvPr/>
+        </p:nvSpPr>
+        <p:spPr>
+          <a:xfrm>
+            <a:off x="457200" y="4791456"/>
+            <a:ext cx="8229600" cy="228600"/>
           </a:xfrm>
           <a:prstGeom prst="rect">
             <a:avLst/>
@@ -8288,67 +9041,11 @@
           <a:bodyPr wrap="square" rtlCol="0" anchor="ctr"/>
           <a:lstStyle/>
           <a:p>
-            <a:pPr indent="0" marL="0">
-              <a:buNone/>
-            </a:pPr>
-            <a:r>
-              <a:rPr lang="en-US" sz="1050" dirty="0">
-                <a:solidFill>
-                  <a:srgbClr val="E2E8F0"/>
-                </a:solidFill>
-                <a:latin typeface="Calibri" pitchFamily="34" charset="0"/>
-                <a:ea typeface="Calibri" pitchFamily="34" charset="-122"/>
-                <a:cs typeface="Calibri" pitchFamily="34" charset="-120"/>
-              </a:rPr>
-              <a:t>• Great session — 72% focus is above your average.</a:t>
-            </a:r>
-            <a:endParaRPr lang="en-US" sz="1050" dirty="0"/>
-          </a:p>
-          <a:p>
-            <a:pPr indent="0" marL="0">
-              <a:buNone/>
-            </a:pPr>
-            <a:r>
-              <a:rPr lang="en-US" sz="1050" dirty="0">
-                <a:solidFill>
-                  <a:srgbClr val="E2E8F0"/>
-                </a:solidFill>
-                <a:latin typeface="Calibri" pitchFamily="34" charset="0"/>
-                <a:ea typeface="Calibri" pitchFamily="34" charset="-122"/>
-                <a:cs typeface="Calibri" pitchFamily="34" charset="-120"/>
-              </a:rPr>
-              <a:t>• Your best hour is 5 PM; prioritize hard work then.</a:t>
-            </a:r>
-            <a:endParaRPr lang="en-US" sz="1050" dirty="0"/>
-          </a:p>
-        </p:txBody>
-      </p:sp>
-      <p:sp>
-        <p:nvSpPr>
-          <p:cNvPr id="28" name="Text 26"/>
-          <p:cNvSpPr/>
-          <p:nvPr/>
-        </p:nvSpPr>
-        <p:spPr>
-          <a:xfrm>
-            <a:off x="457200" y="4800600"/>
-            <a:ext cx="8229600" cy="228600"/>
-          </a:xfrm>
-          <a:prstGeom prst="rect">
-            <a:avLst/>
-          </a:prstGeom>
-          <a:noFill/>
-          <a:ln/>
-        </p:spPr>
-        <p:txBody>
-          <a:bodyPr wrap="square" rtlCol="0" anchor="ctr"/>
-          <a:lstStyle/>
-          <a:p>
             <a:pPr algn="ctr" indent="0" marL="0">
               <a:buNone/>
             </a:pPr>
             <a:r>
-              <a:rPr lang="en-US" sz="1050" i="1" dirty="0">
+              <a:rPr lang="en-US" sz="1000" i="1" dirty="0">
                 <a:solidFill>
                   <a:srgbClr val="4B5563"/>
                 </a:solidFill>
@@ -8356,9 +9053,9 @@
                 <a:ea typeface="Calibri" pitchFamily="34" charset="-122"/>
                 <a:cs typeface="Calibri" pitchFamily="34" charset="-120"/>
               </a:rPr>
-              <a:t>All calls run in daemon threads — zero blocking of the 30fps video loop</a:t>
-            </a:r>
-            <a:endParaRPr lang="en-US" sz="1050" dirty="0"/>
+              <a:t>All calls run in daemon threads — zero blocking of the 30fps OpenCV video loop</a:t>
+            </a:r>
+            <a:endParaRPr lang="en-US" sz="1000" dirty="0"/>
           </a:p>
         </p:txBody>
       </p:sp>
@@ -8402,8 +9099,8 @@
         </p:nvSpPr>
         <p:spPr>
           <a:xfrm>
-            <a:off x="457200" y="256032"/>
-            <a:ext cx="8229600" cy="548640"/>
+            <a:off x="457200" y="228600"/>
+            <a:ext cx="8229600" cy="502920"/>
           </a:xfrm>
           <a:prstGeom prst="rect">
             <a:avLst/>
@@ -8441,7 +9138,7 @@
         </p:nvSpPr>
         <p:spPr>
           <a:xfrm>
-            <a:off x="457200" y="804672"/>
+            <a:off x="457200" y="758952"/>
             <a:ext cx="8229600" cy="347472"/>
           </a:xfrm>
           <a:prstGeom prst="rect">
@@ -8458,7 +9155,7 @@
               <a:buNone/>
             </a:pPr>
             <a:r>
-              <a:rPr lang="en-US" sz="1300" dirty="0">
+              <a:rPr lang="en-US" sz="1250" dirty="0">
                 <a:solidFill>
                   <a:srgbClr val="94A3B8"/>
                 </a:solidFill>
@@ -8466,9 +9163,9 @@
                 <a:ea typeface="Calibri" pitchFamily="34" charset="-122"/>
                 <a:cs typeface="Calibri" pitchFamily="34" charset="-120"/>
               </a:rPr>
-              <a:t>Flask + Chart.js at localhost:5050. Auto-refreshes every 60s. Access from any browser tab.</a:t>
-            </a:r>
-            <a:endParaRPr lang="en-US" sz="1300" dirty="0"/>
+              <a:t>Flask + Chart.js at localhost:5050. Run in any browser. Auto-refreshes every 60 seconds.</a:t>
+            </a:r>
+            <a:endParaRPr lang="en-US" sz="1250" dirty="0"/>
           </a:p>
         </p:txBody>
       </p:sp>
@@ -8480,8 +9177,8 @@
         </p:nvSpPr>
         <p:spPr>
           <a:xfrm>
-            <a:off x="457200" y="1325880"/>
-            <a:ext cx="2743200" cy="1536192"/>
+            <a:off x="457200" y="1298448"/>
+            <a:ext cx="2761488" cy="1572768"/>
           </a:xfrm>
           <a:prstGeom prst="rect">
             <a:avLst/>
@@ -8505,8 +9202,8 @@
         </p:nvSpPr>
         <p:spPr>
           <a:xfrm>
-            <a:off x="457200" y="1325880"/>
-            <a:ext cx="2743200" cy="45720"/>
+            <a:off x="457200" y="1298448"/>
+            <a:ext cx="2761488" cy="45720"/>
           </a:xfrm>
           <a:prstGeom prst="rect">
             <a:avLst/>
@@ -8530,8 +9227,8 @@
         </p:nvSpPr>
         <p:spPr>
           <a:xfrm>
-            <a:off x="594360" y="1463040"/>
-            <a:ext cx="2468880" cy="384048"/>
+            <a:off x="594360" y="1426464"/>
+            <a:ext cx="2487168" cy="365760"/>
           </a:xfrm>
           <a:prstGeom prst="rect">
             <a:avLst/>
@@ -8547,7 +9244,7 @@
               <a:buNone/>
             </a:pPr>
             <a:r>
-              <a:rPr lang="en-US" sz="1300" b="1" dirty="0">
+              <a:rPr lang="en-US" sz="1250" b="1" dirty="0">
                 <a:solidFill>
                   <a:srgbClr val="7C3AED"/>
                 </a:solidFill>
@@ -8557,7 +9254,7 @@
               </a:rPr>
               <a:t>📈  Focus Trend Line</a:t>
             </a:r>
-            <a:endParaRPr lang="en-US" sz="1300" dirty="0"/>
+            <a:endParaRPr lang="en-US" sz="1250" dirty="0"/>
           </a:p>
         </p:txBody>
       </p:sp>
@@ -8569,8 +9266,8 @@
         </p:nvSpPr>
         <p:spPr>
           <a:xfrm>
-            <a:off x="594360" y="1874520"/>
-            <a:ext cx="2468880" cy="868680"/>
+            <a:off x="594360" y="1828800"/>
+            <a:ext cx="2487168" cy="914400"/>
           </a:xfrm>
           <a:prstGeom prst="rect">
             <a:avLst/>
@@ -8594,7 +9291,7 @@
                 <a:ea typeface="Calibri" pitchFamily="34" charset="-122"/>
                 <a:cs typeface="Calibri" pitchFamily="34" charset="-120"/>
               </a:rPr>
-              <a:t>Per-session focus % plotted chronologically. See if you're improving over time.</a:t>
+              <a:t>Per-session focus % over time. See if you're getting better.</a:t>
             </a:r>
             <a:endParaRPr lang="en-US" sz="1050" dirty="0"/>
           </a:p>
@@ -8608,8 +9305,8 @@
         </p:nvSpPr>
         <p:spPr>
           <a:xfrm>
-            <a:off x="3337560" y="1325880"/>
-            <a:ext cx="2743200" cy="1536192"/>
+            <a:off x="3355848" y="1298448"/>
+            <a:ext cx="2761488" cy="1572768"/>
           </a:xfrm>
           <a:prstGeom prst="rect">
             <a:avLst/>
@@ -8633,8 +9330,8 @@
         </p:nvSpPr>
         <p:spPr>
           <a:xfrm>
-            <a:off x="3337560" y="1325880"/>
-            <a:ext cx="2743200" cy="45720"/>
+            <a:off x="3355848" y="1298448"/>
+            <a:ext cx="2761488" cy="45720"/>
           </a:xfrm>
           <a:prstGeom prst="rect">
             <a:avLst/>
@@ -8658,8 +9355,8 @@
         </p:nvSpPr>
         <p:spPr>
           <a:xfrm>
-            <a:off x="3474720" y="1463040"/>
-            <a:ext cx="2468880" cy="384048"/>
+            <a:off x="3493008" y="1426464"/>
+            <a:ext cx="2487168" cy="365760"/>
           </a:xfrm>
           <a:prstGeom prst="rect">
             <a:avLst/>
@@ -8675,7 +9372,7 @@
               <a:buNone/>
             </a:pPr>
             <a:r>
-              <a:rPr lang="en-US" sz="1300" b="1" dirty="0">
+              <a:rPr lang="en-US" sz="1250" b="1" dirty="0">
                 <a:solidFill>
                   <a:srgbClr val="06B6D4"/>
                 </a:solidFill>
@@ -8685,7 +9382,7 @@
               </a:rPr>
               <a:t>🕐  Hourly Productivity</a:t>
             </a:r>
-            <a:endParaRPr lang="en-US" sz="1300" dirty="0"/>
+            <a:endParaRPr lang="en-US" sz="1250" dirty="0"/>
           </a:p>
         </p:txBody>
       </p:sp>
@@ -8697,8 +9394,8 @@
         </p:nvSpPr>
         <p:spPr>
           <a:xfrm>
-            <a:off x="3474720" y="1874520"/>
-            <a:ext cx="2468880" cy="868680"/>
+            <a:off x="3493008" y="1828800"/>
+            <a:ext cx="2487168" cy="914400"/>
           </a:xfrm>
           <a:prstGeom prst="rect">
             <a:avLst/>
@@ -8722,7 +9419,7 @@
                 <a:ea typeface="Calibri" pitchFamily="34" charset="-122"/>
                 <a:cs typeface="Calibri" pitchFamily="34" charset="-120"/>
               </a:rPr>
-              <a:t>Bar chart of avg focus by hour of day. Identifies your personal peak hours.</a:t>
+              <a:t>Avg focus by time of day — reveals your personal peak hours.</a:t>
             </a:r>
             <a:endParaRPr lang="en-US" sz="1050" dirty="0"/>
           </a:p>
@@ -8736,8 +9433,8 @@
         </p:nvSpPr>
         <p:spPr>
           <a:xfrm>
-            <a:off x="6217920" y="1325880"/>
-            <a:ext cx="2743200" cy="1536192"/>
+            <a:off x="6254496" y="1298448"/>
+            <a:ext cx="2761488" cy="1572768"/>
           </a:xfrm>
           <a:prstGeom prst="rect">
             <a:avLst/>
@@ -8761,8 +9458,8 @@
         </p:nvSpPr>
         <p:spPr>
           <a:xfrm>
-            <a:off x="6217920" y="1325880"/>
-            <a:ext cx="2743200" cy="45720"/>
+            <a:off x="6254496" y="1298448"/>
+            <a:ext cx="2761488" cy="45720"/>
           </a:xfrm>
           <a:prstGeom prst="rect">
             <a:avLst/>
@@ -8786,8 +9483,8 @@
         </p:nvSpPr>
         <p:spPr>
           <a:xfrm>
-            <a:off x="6355080" y="1463040"/>
-            <a:ext cx="2468880" cy="384048"/>
+            <a:off x="6391656" y="1426464"/>
+            <a:ext cx="2487168" cy="365760"/>
           </a:xfrm>
           <a:prstGeom prst="rect">
             <a:avLst/>
@@ -8803,7 +9500,7 @@
               <a:buNone/>
             </a:pPr>
             <a:r>
-              <a:rPr lang="en-US" sz="1300" b="1" dirty="0">
+              <a:rPr lang="en-US" sz="1250" b="1" dirty="0">
                 <a:solidFill>
                   <a:srgbClr val="10B981"/>
                 </a:solidFill>
@@ -8813,7 +9510,7 @@
               </a:rPr>
               <a:t>🍩  App Usage Breakdown</a:t>
             </a:r>
-            <a:endParaRPr lang="en-US" sz="1300" dirty="0"/>
+            <a:endParaRPr lang="en-US" sz="1250" dirty="0"/>
           </a:p>
         </p:txBody>
       </p:sp>
@@ -8825,8 +9522,8 @@
         </p:nvSpPr>
         <p:spPr>
           <a:xfrm>
-            <a:off x="6355080" y="1874520"/>
-            <a:ext cx="2468880" cy="868680"/>
+            <a:off x="6391656" y="1828800"/>
+            <a:ext cx="2487168" cy="914400"/>
           </a:xfrm>
           <a:prstGeom prst="rect">
             <a:avLst/>
@@ -8850,7 +9547,7 @@
                 <a:ea typeface="Calibri" pitchFamily="34" charset="-122"/>
                 <a:cs typeface="Calibri" pitchFamily="34" charset="-120"/>
               </a:rPr>
-              <a:t>Doughnut chart: which apps dominate your study sessions.</a:t>
+              <a:t>Which apps dominate your sessions. Productive vs. distracting.</a:t>
             </a:r>
             <a:endParaRPr lang="en-US" sz="1050" dirty="0"/>
           </a:p>
@@ -8865,7 +9562,7 @@
         <p:spPr>
           <a:xfrm>
             <a:off x="457200" y="3017520"/>
-            <a:ext cx="2743200" cy="1536192"/>
+            <a:ext cx="2761488" cy="1572768"/>
           </a:xfrm>
           <a:prstGeom prst="rect">
             <a:avLst/>
@@ -8890,7 +9587,7 @@
         <p:spPr>
           <a:xfrm>
             <a:off x="457200" y="3017520"/>
-            <a:ext cx="2743200" cy="45720"/>
+            <a:ext cx="2761488" cy="45720"/>
           </a:xfrm>
           <a:prstGeom prst="rect">
             <a:avLst/>
@@ -8914,8 +9611,8 @@
         </p:nvSpPr>
         <p:spPr>
           <a:xfrm>
-            <a:off x="594360" y="3154680"/>
-            <a:ext cx="2468880" cy="384048"/>
+            <a:off x="594360" y="3145536"/>
+            <a:ext cx="2487168" cy="365760"/>
           </a:xfrm>
           <a:prstGeom prst="rect">
             <a:avLst/>
@@ -8931,7 +9628,7 @@
               <a:buNone/>
             </a:pPr>
             <a:r>
-              <a:rPr lang="en-US" sz="1300" b="1" dirty="0">
+              <a:rPr lang="en-US" sz="1250" b="1" dirty="0">
                 <a:solidFill>
                   <a:srgbClr val="F59E0B"/>
                 </a:solidFill>
@@ -8941,7 +9638,7 @@
               </a:rPr>
               <a:t>📊  Session Comparison</a:t>
             </a:r>
-            <a:endParaRPr lang="en-US" sz="1300" dirty="0"/>
+            <a:endParaRPr lang="en-US" sz="1250" dirty="0"/>
           </a:p>
         </p:txBody>
       </p:sp>
@@ -8953,8 +9650,8 @@
         </p:nvSpPr>
         <p:spPr>
           <a:xfrm>
-            <a:off x="594360" y="3566160"/>
-            <a:ext cx="2468880" cy="868680"/>
+            <a:off x="594360" y="3547872"/>
+            <a:ext cx="2487168" cy="914400"/>
           </a:xfrm>
           <a:prstGeom prst="rect">
             <a:avLst/>
@@ -8978,7 +9675,7 @@
                 <a:ea typeface="Calibri" pitchFamily="34" charset="-122"/>
                 <a:cs typeface="Calibri" pitchFamily="34" charset="-120"/>
               </a:rPr>
-              <a:t>Grouped bar: focus% vs posture% per session. Spot patterns.</a:t>
+              <a:t>Focus% vs posture% per session. Spot patterns across days.</a:t>
             </a:r>
             <a:endParaRPr lang="en-US" sz="1050" dirty="0"/>
           </a:p>
@@ -8992,8 +9689,8 @@
         </p:nvSpPr>
         <p:spPr>
           <a:xfrm>
-            <a:off x="3337560" y="3017520"/>
-            <a:ext cx="2743200" cy="1536192"/>
+            <a:off x="3355848" y="3017520"/>
+            <a:ext cx="2761488" cy="1572768"/>
           </a:xfrm>
           <a:prstGeom prst="rect">
             <a:avLst/>
@@ -9017,8 +9714,8 @@
         </p:nvSpPr>
         <p:spPr>
           <a:xfrm>
-            <a:off x="3337560" y="3017520"/>
-            <a:ext cx="2743200" cy="45720"/>
+            <a:off x="3355848" y="3017520"/>
+            <a:ext cx="2761488" cy="45720"/>
           </a:xfrm>
           <a:prstGeom prst="rect">
             <a:avLst/>
@@ -9042,8 +9739,8 @@
         </p:nvSpPr>
         <p:spPr>
           <a:xfrm>
-            <a:off x="3474720" y="3154680"/>
-            <a:ext cx="2468880" cy="384048"/>
+            <a:off x="3493008" y="3145536"/>
+            <a:ext cx="2487168" cy="365760"/>
           </a:xfrm>
           <a:prstGeom prst="rect">
             <a:avLst/>
@@ -9059,7 +9756,7 @@
               <a:buNone/>
             </a:pPr>
             <a:r>
-              <a:rPr lang="en-US" sz="1300" b="1" dirty="0">
+              <a:rPr lang="en-US" sz="1250" b="1" dirty="0">
                 <a:solidFill>
                   <a:srgbClr val="EF4444"/>
                 </a:solidFill>
@@ -9069,7 +9766,7 @@
               </a:rPr>
               <a:t>⚡  Adaptive Timer Log</a:t>
             </a:r>
-            <a:endParaRPr lang="en-US" sz="1300" dirty="0"/>
+            <a:endParaRPr lang="en-US" sz="1250" dirty="0"/>
           </a:p>
         </p:txBody>
       </p:sp>
@@ -9081,8 +9778,8 @@
         </p:nvSpPr>
         <p:spPr>
           <a:xfrm>
-            <a:off x="3474720" y="3566160"/>
-            <a:ext cx="2468880" cy="868680"/>
+            <a:off x="3493008" y="3547872"/>
+            <a:ext cx="2487168" cy="914400"/>
           </a:xfrm>
           <a:prstGeom prst="rect">
             <a:avLst/>
@@ -9106,7 +9803,7 @@
                 <a:ea typeface="Calibri" pitchFamily="34" charset="-122"/>
                 <a:cs typeface="Calibri" pitchFamily="34" charset="-120"/>
               </a:rPr>
-              <a:t>Every timer change with timestamp, reason, and focus score. Proof of adaptation.</a:t>
+              <a:t>Every timer change timestamped with reason + focus score — proof of adaptation.</a:t>
             </a:r>
             <a:endParaRPr lang="en-US" sz="1050" dirty="0"/>
           </a:p>
@@ -9120,8 +9817,8 @@
         </p:nvSpPr>
         <p:spPr>
           <a:xfrm>
-            <a:off x="6217920" y="3017520"/>
-            <a:ext cx="2743200" cy="1536192"/>
+            <a:off x="6254496" y="3017520"/>
+            <a:ext cx="2761488" cy="1572768"/>
           </a:xfrm>
           <a:prstGeom prst="rect">
             <a:avLst/>
@@ -9145,8 +9842,8 @@
         </p:nvSpPr>
         <p:spPr>
           <a:xfrm>
-            <a:off x="6217920" y="3017520"/>
-            <a:ext cx="2743200" cy="45720"/>
+            <a:off x="6254496" y="3017520"/>
+            <a:ext cx="2761488" cy="45720"/>
           </a:xfrm>
           <a:prstGeom prst="rect">
             <a:avLst/>
@@ -9170,8 +9867,8 @@
         </p:nvSpPr>
         <p:spPr>
           <a:xfrm>
-            <a:off x="6355080" y="3154680"/>
-            <a:ext cx="2468880" cy="384048"/>
+            <a:off x="6391656" y="3145536"/>
+            <a:ext cx="2487168" cy="365760"/>
           </a:xfrm>
           <a:prstGeom prst="rect">
             <a:avLst/>
@@ -9187,7 +9884,7 @@
               <a:buNone/>
             </a:pPr>
             <a:r>
-              <a:rPr lang="en-US" sz="1300" b="1" dirty="0">
+              <a:rPr lang="en-US" sz="1250" b="1" dirty="0">
                 <a:solidFill>
                   <a:srgbClr val="7C3AED"/>
                 </a:solidFill>
@@ -9197,7 +9894,7 @@
               </a:rPr>
               <a:t>✦  AI Personalized Advice</a:t>
             </a:r>
-            <a:endParaRPr lang="en-US" sz="1300" dirty="0"/>
+            <a:endParaRPr lang="en-US" sz="1250" dirty="0"/>
           </a:p>
         </p:txBody>
       </p:sp>
@@ -9209,8 +9906,8 @@
         </p:nvSpPr>
         <p:spPr>
           <a:xfrm>
-            <a:off x="6355080" y="3566160"/>
-            <a:ext cx="2468880" cy="868680"/>
+            <a:off x="6391656" y="3547872"/>
+            <a:ext cx="2487168" cy="914400"/>
           </a:xfrm>
           <a:prstGeom prst="rect">
             <a:avLst/>
@@ -9280,7 +9977,7 @@
         </p:nvSpPr>
         <p:spPr>
           <a:xfrm>
-            <a:off x="457200" y="256032"/>
+            <a:off x="457200" y="228600"/>
             <a:ext cx="8229600" cy="502920"/>
           </a:xfrm>
           <a:prstGeom prst="rect">
@@ -9319,8 +10016,8 @@
         </p:nvSpPr>
         <p:spPr>
           <a:xfrm>
-            <a:off x="457200" y="914400"/>
-            <a:ext cx="1920240" cy="1554480"/>
+            <a:off x="457200" y="932688"/>
+            <a:ext cx="1993392" cy="1572768"/>
           </a:xfrm>
           <a:prstGeom prst="rect">
             <a:avLst/>
@@ -9344,8 +10041,8 @@
         </p:nvSpPr>
         <p:spPr>
           <a:xfrm>
-            <a:off x="457200" y="914400"/>
-            <a:ext cx="1920240" cy="45720"/>
+            <a:off x="457200" y="932688"/>
+            <a:ext cx="1993392" cy="45720"/>
           </a:xfrm>
           <a:prstGeom prst="rect">
             <a:avLst/>
@@ -9369,8 +10066,8 @@
         </p:nvSpPr>
         <p:spPr>
           <a:xfrm>
-            <a:off x="548640" y="987552"/>
-            <a:ext cx="1737360" cy="594360"/>
+            <a:off x="548640" y="1005840"/>
+            <a:ext cx="1810512" cy="594360"/>
           </a:xfrm>
           <a:prstGeom prst="rect">
             <a:avLst/>
@@ -9386,7 +10083,7 @@
               <a:buNone/>
             </a:pPr>
             <a:r>
-              <a:rPr lang="en-US" sz="3000" b="1" dirty="0">
+              <a:rPr lang="en-US" sz="2800" b="1" dirty="0">
                 <a:solidFill>
                   <a:srgbClr val="10B981"/>
                 </a:solidFill>
@@ -9396,7 +10093,7 @@
               </a:rPr>
               <a:t>48%</a:t>
             </a:r>
-            <a:endParaRPr lang="en-US" sz="3000" dirty="0"/>
+            <a:endParaRPr lang="en-US" sz="2800" dirty="0"/>
           </a:p>
         </p:txBody>
       </p:sp>
@@ -9408,8 +10105,8 @@
         </p:nvSpPr>
         <p:spPr>
           <a:xfrm>
-            <a:off x="548640" y="1664208"/>
-            <a:ext cx="1737360" cy="292608"/>
+            <a:off x="548640" y="1682496"/>
+            <a:ext cx="1810512" cy="274320"/>
           </a:xfrm>
           <a:prstGeom prst="rect">
             <a:avLst/>
@@ -9433,7 +10130,7 @@
                 <a:ea typeface="Calibri" pitchFamily="34" charset="-122"/>
                 <a:cs typeface="Calibri" pitchFamily="34" charset="-120"/>
               </a:rPr>
-              <a:t>Peak focus score</a:t>
+              <a:t>Peak focus</a:t>
             </a:r>
             <a:endParaRPr lang="en-US" sz="950" dirty="0"/>
           </a:p>
@@ -9448,7 +10145,7 @@
         <p:spPr>
           <a:xfrm>
             <a:off x="548640" y="2011680"/>
-            <a:ext cx="1737360" cy="256032"/>
+            <a:ext cx="1810512" cy="256032"/>
           </a:xfrm>
           <a:prstGeom prst="rect">
             <a:avLst/>
@@ -9486,8 +10183,8 @@
         </p:nvSpPr>
         <p:spPr>
           <a:xfrm>
-            <a:off x="2560320" y="914400"/>
-            <a:ext cx="1920240" cy="1554480"/>
+            <a:off x="2578608" y="932688"/>
+            <a:ext cx="1993392" cy="1572768"/>
           </a:xfrm>
           <a:prstGeom prst="rect">
             <a:avLst/>
@@ -9511,8 +10208,8 @@
         </p:nvSpPr>
         <p:spPr>
           <a:xfrm>
-            <a:off x="2560320" y="914400"/>
-            <a:ext cx="1920240" cy="45720"/>
+            <a:off x="2578608" y="932688"/>
+            <a:ext cx="1993392" cy="45720"/>
           </a:xfrm>
           <a:prstGeom prst="rect">
             <a:avLst/>
@@ -9536,8 +10233,8 @@
         </p:nvSpPr>
         <p:spPr>
           <a:xfrm>
-            <a:off x="2651760" y="987552"/>
-            <a:ext cx="1737360" cy="594360"/>
+            <a:off x="2670048" y="1005840"/>
+            <a:ext cx="1810512" cy="594360"/>
           </a:xfrm>
           <a:prstGeom prst="rect">
             <a:avLst/>
@@ -9553,7 +10250,7 @@
               <a:buNone/>
             </a:pPr>
             <a:r>
-              <a:rPr lang="en-US" sz="3000" b="1" dirty="0">
+              <a:rPr lang="en-US" sz="2800" b="1" dirty="0">
                 <a:solidFill>
                   <a:srgbClr val="06B6D4"/>
                 </a:solidFill>
@@ -9563,7 +10260,7 @@
               </a:rPr>
               <a:t>97%</a:t>
             </a:r>
-            <a:endParaRPr lang="en-US" sz="3000" dirty="0"/>
+            <a:endParaRPr lang="en-US" sz="2800" dirty="0"/>
           </a:p>
         </p:txBody>
       </p:sp>
@@ -9575,8 +10272,8 @@
         </p:nvSpPr>
         <p:spPr>
           <a:xfrm>
-            <a:off x="2651760" y="1664208"/>
-            <a:ext cx="1737360" cy="292608"/>
+            <a:off x="2670048" y="1682496"/>
+            <a:ext cx="1810512" cy="274320"/>
           </a:xfrm>
           <a:prstGeom prst="rect">
             <a:avLst/>
@@ -9614,8 +10311,8 @@
         </p:nvSpPr>
         <p:spPr>
           <a:xfrm>
-            <a:off x="2651760" y="2011680"/>
-            <a:ext cx="1737360" cy="256032"/>
+            <a:off x="2670048" y="2011680"/>
+            <a:ext cx="1810512" cy="256032"/>
           </a:xfrm>
           <a:prstGeom prst="rect">
             <a:avLst/>
@@ -9639,7 +10336,7 @@
                 <a:ea typeface="Calibri" pitchFamily="34" charset="-122"/>
                 <a:cs typeface="Calibri" pitchFamily="34" charset="-120"/>
               </a:rPr>
-              <a:t>improved from 19%</a:t>
+              <a:t>up from 19% baseline</a:t>
             </a:r>
             <a:endParaRPr lang="en-US" sz="900" dirty="0"/>
           </a:p>
@@ -9653,8 +10350,8 @@
         </p:nvSpPr>
         <p:spPr>
           <a:xfrm>
-            <a:off x="4663440" y="914400"/>
-            <a:ext cx="1920240" cy="1554480"/>
+            <a:off x="4700016" y="932688"/>
+            <a:ext cx="1993392" cy="1572768"/>
           </a:xfrm>
           <a:prstGeom prst="rect">
             <a:avLst/>
@@ -9678,8 +10375,8 @@
         </p:nvSpPr>
         <p:spPr>
           <a:xfrm>
-            <a:off x="4663440" y="914400"/>
-            <a:ext cx="1920240" cy="45720"/>
+            <a:off x="4700016" y="932688"/>
+            <a:ext cx="1993392" cy="45720"/>
           </a:xfrm>
           <a:prstGeom prst="rect">
             <a:avLst/>
@@ -9703,8 +10400,8 @@
         </p:nvSpPr>
         <p:spPr>
           <a:xfrm>
-            <a:off x="4754880" y="987552"/>
-            <a:ext cx="1737360" cy="594360"/>
+            <a:off x="4791456" y="1005840"/>
+            <a:ext cx="1810512" cy="594360"/>
           </a:xfrm>
           <a:prstGeom prst="rect">
             <a:avLst/>
@@ -9720,7 +10417,7 @@
               <a:buNone/>
             </a:pPr>
             <a:r>
-              <a:rPr lang="en-US" sz="3000" b="1" dirty="0">
+              <a:rPr lang="en-US" sz="2800" b="1" dirty="0">
                 <a:solidFill>
                   <a:srgbClr val="F59E0B"/>
                 </a:solidFill>
@@ -9728,9 +10425,9 @@
                 <a:ea typeface="Arial Black" pitchFamily="34" charset="-122"/>
                 <a:cs typeface="Arial Black" pitchFamily="34" charset="-120"/>
               </a:rPr>
-              <a:t>3s</a:t>
-            </a:r>
-            <a:endParaRPr lang="en-US" sz="3000" dirty="0"/>
+              <a:t>&lt; 5%</a:t>
+            </a:r>
+            <a:endParaRPr lang="en-US" sz="2800" dirty="0"/>
           </a:p>
         </p:txBody>
       </p:sp>
@@ -9742,8 +10439,8 @@
         </p:nvSpPr>
         <p:spPr>
           <a:xfrm>
-            <a:off x="4754880" y="1664208"/>
-            <a:ext cx="1737360" cy="292608"/>
+            <a:off x="4791456" y="1682496"/>
+            <a:ext cx="1810512" cy="274320"/>
           </a:xfrm>
           <a:prstGeom prst="rect">
             <a:avLst/>
@@ -9767,7 +10464,7 @@
                 <a:ea typeface="Calibri" pitchFamily="34" charset="-122"/>
                 <a:cs typeface="Calibri" pitchFamily="34" charset="-120"/>
               </a:rPr>
-              <a:t>Phone detection</a:t>
+              <a:t>Phone false-pos.</a:t>
             </a:r>
             <a:endParaRPr lang="en-US" sz="950" dirty="0"/>
           </a:p>
@@ -9781,8 +10478,8 @@
         </p:nvSpPr>
         <p:spPr>
           <a:xfrm>
-            <a:off x="4754880" y="2011680"/>
-            <a:ext cx="1737360" cy="256032"/>
+            <a:off x="4791456" y="2011680"/>
+            <a:ext cx="1810512" cy="256032"/>
           </a:xfrm>
           <a:prstGeom prst="rect">
             <a:avLst/>
@@ -9806,7 +10503,7 @@
                 <a:ea typeface="Calibri" pitchFamily="34" charset="-122"/>
                 <a:cs typeface="Calibri" pitchFamily="34" charset="-120"/>
               </a:rPr>
-              <a:t>sustained hand visibility</a:t>
+              <a:t>3s hold vs 40% with old</a:t>
             </a:r>
             <a:endParaRPr lang="en-US" sz="900" dirty="0"/>
           </a:p>
@@ -9820,8 +10517,8 @@
         </p:nvSpPr>
         <p:spPr>
           <a:xfrm>
-            <a:off x="6766560" y="914400"/>
-            <a:ext cx="1920240" cy="1554480"/>
+            <a:off x="6821424" y="932688"/>
+            <a:ext cx="1993392" cy="1572768"/>
           </a:xfrm>
           <a:prstGeom prst="rect">
             <a:avLst/>
@@ -9845,8 +10542,8 @@
         </p:nvSpPr>
         <p:spPr>
           <a:xfrm>
-            <a:off x="6766560" y="914400"/>
-            <a:ext cx="1920240" cy="45720"/>
+            <a:off x="6821424" y="932688"/>
+            <a:ext cx="1993392" cy="45720"/>
           </a:xfrm>
           <a:prstGeom prst="rect">
             <a:avLst/>
@@ -9870,8 +10567,8 @@
         </p:nvSpPr>
         <p:spPr>
           <a:xfrm>
-            <a:off x="6858000" y="987552"/>
-            <a:ext cx="1737360" cy="594360"/>
+            <a:off x="6912864" y="1005840"/>
+            <a:ext cx="1810512" cy="594360"/>
           </a:xfrm>
           <a:prstGeom prst="rect">
             <a:avLst/>
@@ -9887,7 +10584,7 @@
               <a:buNone/>
             </a:pPr>
             <a:r>
-              <a:rPr lang="en-US" sz="3000" b="1" dirty="0">
+              <a:rPr lang="en-US" sz="2800" b="1" dirty="0">
                 <a:solidFill>
                   <a:srgbClr val="7C3AED"/>
                 </a:solidFill>
@@ -9897,7 +10594,7 @@
               </a:rPr>
               <a:t>25→30</a:t>
             </a:r>
-            <a:endParaRPr lang="en-US" sz="3000" dirty="0"/>
+            <a:endParaRPr lang="en-US" sz="2800" dirty="0"/>
           </a:p>
         </p:txBody>
       </p:sp>
@@ -9909,8 +10606,8 @@
         </p:nvSpPr>
         <p:spPr>
           <a:xfrm>
-            <a:off x="6858000" y="1664208"/>
-            <a:ext cx="1737360" cy="292608"/>
+            <a:off x="6912864" y="1682496"/>
+            <a:ext cx="1810512" cy="274320"/>
           </a:xfrm>
           <a:prstGeom prst="rect">
             <a:avLst/>
@@ -9934,7 +10631,7 @@
                 <a:ea typeface="Calibri" pitchFamily="34" charset="-122"/>
                 <a:cs typeface="Calibri" pitchFamily="34" charset="-120"/>
               </a:rPr>
-              <a:t>Flow extension (min)</a:t>
+              <a:t>Flow extension (m)</a:t>
             </a:r>
             <a:endParaRPr lang="en-US" sz="950" dirty="0"/>
           </a:p>
@@ -9948,8 +10645,8 @@
         </p:nvSpPr>
         <p:spPr>
           <a:xfrm>
-            <a:off x="6858000" y="2011680"/>
-            <a:ext cx="1737360" cy="256032"/>
+            <a:off x="6912864" y="2011680"/>
+            <a:ext cx="1810512" cy="256032"/>
           </a:xfrm>
           <a:prstGeom prst="rect">
             <a:avLst/>
@@ -9973,7 +10670,7 @@
                 <a:ea typeface="Calibri" pitchFamily="34" charset="-122"/>
                 <a:cs typeface="Calibri" pitchFamily="34" charset="-120"/>
               </a:rPr>
-              <a:t>timer adapted live</a:t>
+              <a:t>adaptive timer proof</a:t>
             </a:r>
             <a:endParaRPr lang="en-US" sz="900" dirty="0"/>
           </a:p>
@@ -9987,8 +10684,8 @@
         </p:nvSpPr>
         <p:spPr>
           <a:xfrm>
-            <a:off x="457200" y="2514600"/>
-            <a:ext cx="8229600" cy="384048"/>
+            <a:off x="457200" y="2670048"/>
+            <a:ext cx="8229600" cy="365760"/>
           </a:xfrm>
           <a:prstGeom prst="rect">
             <a:avLst/>
@@ -10004,7 +10701,7 @@
               <a:buNone/>
             </a:pPr>
             <a:r>
-              <a:rPr lang="en-US" sz="1600" b="1" dirty="0">
+              <a:rPr lang="en-US" sz="1500" b="1" dirty="0">
                 <a:solidFill>
                   <a:srgbClr val="FFFFFF"/>
                 </a:solidFill>
@@ -10014,7 +10711,7 @@
               </a:rPr>
               <a:t>How We Validated</a:t>
             </a:r>
-            <a:endParaRPr lang="en-US" sz="1600" dirty="0"/>
+            <a:endParaRPr lang="en-US" sz="1500" dirty="0"/>
           </a:p>
         </p:txBody>
       </p:sp>
@@ -10026,8 +10723,8 @@
         </p:nvSpPr>
         <p:spPr>
           <a:xfrm>
-            <a:off x="457200" y="2944368"/>
-            <a:ext cx="3931920" cy="292608"/>
+            <a:off x="457200" y="3108960"/>
+            <a:ext cx="4005072" cy="274320"/>
           </a:xfrm>
           <a:prstGeom prst="rect">
             <a:avLst/>
@@ -10043,7 +10740,7 @@
               <a:buNone/>
             </a:pPr>
             <a:r>
-              <a:rPr lang="en-US" sz="1200" b="1" dirty="0">
+              <a:rPr lang="en-US" sz="1150" b="1" dirty="0">
                 <a:solidFill>
                   <a:srgbClr val="06B6D4"/>
                 </a:solidFill>
@@ -10053,7 +10750,7 @@
               </a:rPr>
               <a:t>🔬  Session-over-session trends</a:t>
             </a:r>
-            <a:endParaRPr lang="en-US" sz="1200" dirty="0"/>
+            <a:endParaRPr lang="en-US" sz="1150" dirty="0"/>
           </a:p>
         </p:txBody>
       </p:sp>
@@ -10065,7 +10762,7 @@
         </p:nvSpPr>
         <p:spPr>
           <a:xfrm>
-            <a:off x="685800" y="3218688"/>
+            <a:off x="685800" y="3383280"/>
             <a:ext cx="3840480" cy="438912"/>
           </a:xfrm>
           <a:prstGeom prst="rect">
@@ -10082,7 +10779,7 @@
               <a:buNone/>
             </a:pPr>
             <a:r>
-              <a:rPr lang="en-US" sz="1050" dirty="0">
+              <a:rPr lang="en-US" sz="1000" dirty="0">
                 <a:solidFill>
                   <a:srgbClr val="94A3B8"/>
                 </a:solidFill>
@@ -10090,9 +10787,9 @@
                 <a:ea typeface="Calibri" pitchFamily="34" charset="-122"/>
                 <a:cs typeface="Calibri" pitchFamily="34" charset="-120"/>
               </a:rPr>
-              <a:t>Dashboard shows focus improving across sessions as the tool calibrates to the user.</a:t>
-            </a:r>
-            <a:endParaRPr lang="en-US" sz="1050" dirty="0"/>
+              <a:t>Dashboard shows focus improving as the tool calibrates to the user over multiple sessions.</a:t>
+            </a:r>
+            <a:endParaRPr lang="en-US" sz="1000" dirty="0"/>
           </a:p>
         </p:txBody>
       </p:sp>
@@ -10104,8 +10801,8 @@
         </p:nvSpPr>
         <p:spPr>
           <a:xfrm>
-            <a:off x="4754880" y="2944368"/>
-            <a:ext cx="3931920" cy="292608"/>
+            <a:off x="4828032" y="3108960"/>
+            <a:ext cx="4005072" cy="274320"/>
           </a:xfrm>
           <a:prstGeom prst="rect">
             <a:avLst/>
@@ -10121,7 +10818,7 @@
               <a:buNone/>
             </a:pPr>
             <a:r>
-              <a:rPr lang="en-US" sz="1200" b="1" dirty="0">
+              <a:rPr lang="en-US" sz="1150" b="1" dirty="0">
                 <a:solidFill>
                   <a:srgbClr val="06B6D4"/>
                 </a:solidFill>
@@ -10131,7 +10828,7 @@
               </a:rPr>
               <a:t>⚡  Timer adaptation log</a:t>
             </a:r>
-            <a:endParaRPr lang="en-US" sz="1200" dirty="0"/>
+            <a:endParaRPr lang="en-US" sz="1150" dirty="0"/>
           </a:p>
         </p:txBody>
       </p:sp>
@@ -10143,7 +10840,7 @@
         </p:nvSpPr>
         <p:spPr>
           <a:xfrm>
-            <a:off x="4983480" y="3218688"/>
+            <a:off x="5056632" y="3383280"/>
             <a:ext cx="3840480" cy="438912"/>
           </a:xfrm>
           <a:prstGeom prst="rect">
@@ -10160,7 +10857,7 @@
               <a:buNone/>
             </a:pPr>
             <a:r>
-              <a:rPr lang="en-US" sz="1050" dirty="0">
+              <a:rPr lang="en-US" sz="1000" dirty="0">
                 <a:solidFill>
                   <a:srgbClr val="94A3B8"/>
                 </a:solidFill>
@@ -10168,9 +10865,9 @@
                 <a:ea typeface="Calibri" pitchFamily="34" charset="-122"/>
                 <a:cs typeface="Calibri" pitchFamily="34" charset="-120"/>
               </a:rPr>
-              <a:t>Every early break and flow extension is timestamped with the triggering focus score — auditable proof of adaptive behavior.</a:t>
-            </a:r>
-            <a:endParaRPr lang="en-US" sz="1050" dirty="0"/>
+              <a:t>Every early break and flow extension is timestamped with the triggering focus score — auditable proof.</a:t>
+            </a:r>
+            <a:endParaRPr lang="en-US" sz="1000" dirty="0"/>
           </a:p>
         </p:txBody>
       </p:sp>
@@ -10182,8 +10879,8 @@
         </p:nvSpPr>
         <p:spPr>
           <a:xfrm>
-            <a:off x="457200" y="3767328"/>
-            <a:ext cx="3931920" cy="292608"/>
+            <a:off x="457200" y="3913632"/>
+            <a:ext cx="4005072" cy="274320"/>
           </a:xfrm>
           <a:prstGeom prst="rect">
             <a:avLst/>
@@ -10199,7 +10896,7 @@
               <a:buNone/>
             </a:pPr>
             <a:r>
-              <a:rPr lang="en-US" sz="1200" b="1" dirty="0">
+              <a:rPr lang="en-US" sz="1150" b="1" dirty="0">
                 <a:solidFill>
                   <a:srgbClr val="06B6D4"/>
                 </a:solidFill>
@@ -10207,9 +10904,9 @@
                 <a:ea typeface="Calibri" pitchFamily="34" charset="-122"/>
                 <a:cs typeface="Calibri" pitchFamily="34" charset="-120"/>
               </a:rPr>
-              <a:t>📋  Failure analysis</a:t>
-            </a:r>
-            <a:endParaRPr lang="en-US" sz="1200" dirty="0"/>
+              <a:t>📋  Failure analysis + iteration</a:t>
+            </a:r>
+            <a:endParaRPr lang="en-US" sz="1150" dirty="0"/>
           </a:p>
         </p:txBody>
       </p:sp>
@@ -10221,7 +10918,7 @@
         </p:nvSpPr>
         <p:spPr>
           <a:xfrm>
-            <a:off x="685800" y="4041648"/>
+            <a:off x="685800" y="4187952"/>
             <a:ext cx="3840480" cy="438912"/>
           </a:xfrm>
           <a:prstGeom prst="rect">
@@ -10238,7 +10935,7 @@
               <a:buNone/>
             </a:pPr>
             <a:r>
-              <a:rPr lang="en-US" sz="1050" dirty="0">
+              <a:rPr lang="en-US" sz="1000" dirty="0">
                 <a:solidFill>
                   <a:srgbClr val="94A3B8"/>
                 </a:solidFill>
@@ -10246,9 +10943,9 @@
                 <a:ea typeface="Calibri" pitchFamily="34" charset="-122"/>
                 <a:cs typeface="Calibri" pitchFamily="34" charset="-120"/>
               </a:rPr>
-              <a:t>Phone detection false-positive rate reduced from ~40% (gaze heuristic) to &lt;5% (3-second accumulator).</a:t>
-            </a:r>
-            <a:endParaRPr lang="en-US" sz="1050" dirty="0"/>
+              <a:t>Phone detection: false-positive rate cut from ~40% (instant gaze heuristic) to &lt;5% (3s accumulator).</a:t>
+            </a:r>
+            <a:endParaRPr lang="en-US" sz="1000" dirty="0"/>
           </a:p>
         </p:txBody>
       </p:sp>
@@ -10260,8 +10957,8 @@
         </p:nvSpPr>
         <p:spPr>
           <a:xfrm>
-            <a:off x="4754880" y="3767328"/>
-            <a:ext cx="3931920" cy="292608"/>
+            <a:off x="4828032" y="3913632"/>
+            <a:ext cx="4005072" cy="274320"/>
           </a:xfrm>
           <a:prstGeom prst="rect">
             <a:avLst/>
@@ -10277,7 +10974,7 @@
               <a:buNone/>
             </a:pPr>
             <a:r>
-              <a:rPr lang="en-US" sz="1200" b="1" dirty="0">
+              <a:rPr lang="en-US" sz="1150" b="1" dirty="0">
                 <a:solidFill>
                   <a:srgbClr val="06B6D4"/>
                 </a:solidFill>
@@ -10287,7 +10984,7 @@
               </a:rPr>
               <a:t>🎯  Calibrated posture baseline</a:t>
             </a:r>
-            <a:endParaRPr lang="en-US" sz="1200" dirty="0"/>
+            <a:endParaRPr lang="en-US" sz="1150" dirty="0"/>
           </a:p>
         </p:txBody>
       </p:sp>
@@ -10299,7 +10996,7 @@
         </p:nvSpPr>
         <p:spPr>
           <a:xfrm>
-            <a:off x="4983480" y="4041648"/>
+            <a:off x="5056632" y="4187952"/>
             <a:ext cx="3840480" cy="438912"/>
           </a:xfrm>
           <a:prstGeom prst="rect">
@@ -10316,7 +11013,7 @@
               <a:buNone/>
             </a:pPr>
             <a:r>
-              <a:rPr lang="en-US" sz="1050" dirty="0">
+              <a:rPr lang="en-US" sz="1000" dirty="0">
                 <a:solidFill>
                   <a:srgbClr val="94A3B8"/>
                 </a:solidFill>
@@ -10324,9 +11021,9 @@
                 <a:ea typeface="Calibri" pitchFamily="34" charset="-122"/>
                 <a:cs typeface="Calibri" pitchFamily="34" charset="-120"/>
               </a:rPr>
-              <a:t>Per-session calibration eliminated false slouch positives that plagued the fixed threshold approach.</a:t>
-            </a:r>
-            <a:endParaRPr lang="en-US" sz="1050" dirty="0"/>
+              <a:t>Per-session calibration eliminates false slouch positives from the fixed threshold approach.</a:t>
+            </a:r>
+            <a:endParaRPr lang="en-US" sz="1000" dirty="0"/>
           </a:p>
         </p:txBody>
       </p:sp>
@@ -10370,8 +11067,8 @@
         </p:nvSpPr>
         <p:spPr>
           <a:xfrm>
-            <a:off x="457200" y="256032"/>
-            <a:ext cx="5029200" cy="548640"/>
+            <a:off x="457200" y="228600"/>
+            <a:ext cx="8229600" cy="502920"/>
           </a:xfrm>
           <a:prstGeom prst="rect">
             <a:avLst/>
@@ -10395,7 +11092,7 @@
                 <a:ea typeface="Arial Black" pitchFamily="34" charset="-122"/>
                 <a:cs typeface="Arial Black" pitchFamily="34" charset="-120"/>
               </a:rPr>
-              <a:t>Future Work</a:t>
+              <a:t>Use Cases &amp; Impact</a:t>
             </a:r>
             <a:endParaRPr lang="en-US" sz="3200" dirty="0"/>
           </a:p>
@@ -10409,8 +11106,8 @@
         </p:nvSpPr>
         <p:spPr>
           <a:xfrm>
-            <a:off x="457200" y="804672"/>
-            <a:ext cx="5029200" cy="347472"/>
+            <a:off x="457200" y="758952"/>
+            <a:ext cx="8229600" cy="347472"/>
           </a:xfrm>
           <a:prstGeom prst="rect">
             <a:avLst/>
@@ -10434,7 +11131,7 @@
                 <a:ea typeface="Calibri" pitchFamily="34" charset="-122"/>
                 <a:cs typeface="Calibri" pitchFamily="34" charset="-120"/>
               </a:rPr>
-              <a:t>The foundation is built. Here's what comes next.</a:t>
+              <a:t>Who benefits, and how could this scale?</a:t>
             </a:r>
             <a:endParaRPr lang="en-US" sz="1300" dirty="0"/>
           </a:p>
@@ -10448,16 +11145,167 @@
         </p:nvSpPr>
         <p:spPr>
           <a:xfrm>
-            <a:off x="457200" y="1234440"/>
-            <a:ext cx="457200" cy="548640"/>
-          </a:xfrm>
-          <a:prstGeom prst="rect">
-            <a:avLst/>
-          </a:prstGeom>
-          <a:solidFill>
-            <a:srgbClr val="7C3AED">
-              <a:alpha val="80000"/>
-            </a:srgbClr>
+            <a:off x="457200" y="1261872"/>
+            <a:ext cx="3977640" cy="1627632"/>
+          </a:xfrm>
+          <a:prstGeom prst="rect">
+            <a:avLst/>
+          </a:prstGeom>
+          <a:solidFill>
+            <a:srgbClr val="13132A"/>
+          </a:solidFill>
+          <a:ln w="12700">
+            <a:solidFill>
+              <a:srgbClr val="1E1E40"/>
+            </a:solidFill>
+            <a:prstDash val="solid"/>
+          </a:ln>
+        </p:spPr>
+      </p:sp>
+      <p:sp>
+        <p:nvSpPr>
+          <p:cNvPr id="5" name="Shape 3"/>
+          <p:cNvSpPr/>
+          <p:nvPr/>
+        </p:nvSpPr>
+        <p:spPr>
+          <a:xfrm>
+            <a:off x="457200" y="1261872"/>
+            <a:ext cx="3977640" cy="45720"/>
+          </a:xfrm>
+          <a:prstGeom prst="rect">
+            <a:avLst/>
+          </a:prstGeom>
+          <a:solidFill>
+            <a:srgbClr val="06B6D4"/>
+          </a:solidFill>
+          <a:ln w="12700">
+            <a:solidFill>
+              <a:srgbClr val="06B6D4"/>
+            </a:solidFill>
+            <a:prstDash val="solid"/>
+          </a:ln>
+        </p:spPr>
+      </p:sp>
+      <p:sp>
+        <p:nvSpPr>
+          <p:cNvPr id="6" name="Text 4"/>
+          <p:cNvSpPr/>
+          <p:nvPr/>
+        </p:nvSpPr>
+        <p:spPr>
+          <a:xfrm>
+            <a:off x="621792" y="1408176"/>
+            <a:ext cx="3611880" cy="365760"/>
+          </a:xfrm>
+          <a:prstGeom prst="rect">
+            <a:avLst/>
+          </a:prstGeom>
+          <a:noFill/>
+          <a:ln/>
+        </p:spPr>
+        <p:txBody>
+          <a:bodyPr wrap="square" rtlCol="0" anchor="ctr"/>
+          <a:lstStyle/>
+          <a:p>
+            <a:pPr indent="0" marL="0">
+              <a:buNone/>
+            </a:pPr>
+            <a:r>
+              <a:rPr lang="en-US" sz="1400" b="1" dirty="0">
+                <a:solidFill>
+                  <a:srgbClr val="06B6D4"/>
+                </a:solidFill>
+                <a:latin typeface="Calibri" pitchFamily="34" charset="0"/>
+                <a:ea typeface="Calibri" pitchFamily="34" charset="-122"/>
+                <a:cs typeface="Calibri" pitchFamily="34" charset="-120"/>
+              </a:rPr>
+              <a:t>🎓  Students</a:t>
+            </a:r>
+            <a:endParaRPr lang="en-US" sz="1400" dirty="0"/>
+          </a:p>
+        </p:txBody>
+      </p:sp>
+      <p:sp>
+        <p:nvSpPr>
+          <p:cNvPr id="7" name="Text 5"/>
+          <p:cNvSpPr/>
+          <p:nvPr/>
+        </p:nvSpPr>
+        <p:spPr>
+          <a:xfrm>
+            <a:off x="621792" y="1792224"/>
+            <a:ext cx="3611880" cy="914400"/>
+          </a:xfrm>
+          <a:prstGeom prst="rect">
+            <a:avLst/>
+          </a:prstGeom>
+          <a:noFill/>
+          <a:ln/>
+        </p:spPr>
+        <p:txBody>
+          <a:bodyPr wrap="square" rtlCol="0" anchor="t"/>
+          <a:lstStyle/>
+          <a:p>
+            <a:pPr indent="0" marL="0">
+              <a:buNone/>
+            </a:pPr>
+            <a:r>
+              <a:rPr lang="en-US" sz="1150" dirty="0">
+                <a:solidFill>
+                  <a:srgbClr val="94A3B8"/>
+                </a:solidFill>
+                <a:latin typeface="Calibri" pitchFamily="34" charset="0"/>
+                <a:ea typeface="Calibri" pitchFamily="34" charset="-122"/>
+                <a:cs typeface="Calibri" pitchFamily="34" charset="-120"/>
+              </a:rPr>
+              <a:t>Replace passive studying with sessions that actually adapt. Know exactly when you're wasting time sitting at your desk.</a:t>
+            </a:r>
+            <a:endParaRPr lang="en-US" sz="1150" dirty="0"/>
+          </a:p>
+        </p:txBody>
+      </p:sp>
+      <p:sp>
+        <p:nvSpPr>
+          <p:cNvPr id="8" name="Shape 6"/>
+          <p:cNvSpPr/>
+          <p:nvPr/>
+        </p:nvSpPr>
+        <p:spPr>
+          <a:xfrm>
+            <a:off x="4800600" y="1261872"/>
+            <a:ext cx="3977640" cy="1627632"/>
+          </a:xfrm>
+          <a:prstGeom prst="rect">
+            <a:avLst/>
+          </a:prstGeom>
+          <a:solidFill>
+            <a:srgbClr val="13132A"/>
+          </a:solidFill>
+          <a:ln w="12700">
+            <a:solidFill>
+              <a:srgbClr val="1E1E40"/>
+            </a:solidFill>
+            <a:prstDash val="solid"/>
+          </a:ln>
+        </p:spPr>
+      </p:sp>
+      <p:sp>
+        <p:nvSpPr>
+          <p:cNvPr id="9" name="Shape 7"/>
+          <p:cNvSpPr/>
+          <p:nvPr/>
+        </p:nvSpPr>
+        <p:spPr>
+          <a:xfrm>
+            <a:off x="4800600" y="1261872"/>
+            <a:ext cx="3977640" cy="45720"/>
+          </a:xfrm>
+          <a:prstGeom prst="rect">
+            <a:avLst/>
+          </a:prstGeom>
+          <a:solidFill>
+            <a:srgbClr val="7C3AED"/>
           </a:solidFill>
           <a:ln w="12700">
             <a:solidFill>
@@ -10469,14 +11317,14 @@
       </p:sp>
       <p:sp>
         <p:nvSpPr>
-          <p:cNvPr id="5" name="Text 3"/>
-          <p:cNvSpPr/>
-          <p:nvPr/>
-        </p:nvSpPr>
-        <p:spPr>
-          <a:xfrm>
-            <a:off x="457200" y="1252728"/>
-            <a:ext cx="457200" cy="530352"/>
+          <p:cNvPr id="10" name="Text 8"/>
+          <p:cNvSpPr/>
+          <p:nvPr/>
+        </p:nvSpPr>
+        <p:spPr>
+          <a:xfrm>
+            <a:off x="4965192" y="1408176"/>
+            <a:ext cx="3611880" cy="365760"/>
           </a:xfrm>
           <a:prstGeom prst="rect">
             <a:avLst/>
@@ -10488,89 +11336,50 @@
           <a:bodyPr wrap="square" rtlCol="0" anchor="ctr"/>
           <a:lstStyle/>
           <a:p>
-            <a:pPr algn="ctr" indent="0" marL="0">
-              <a:buNone/>
-            </a:pPr>
-            <a:r>
-              <a:rPr lang="en-US" sz="1300" b="1" dirty="0">
+            <a:pPr indent="0" marL="0">
+              <a:buNone/>
+            </a:pPr>
+            <a:r>
+              <a:rPr lang="en-US" sz="1400" b="1" dirty="0">
                 <a:solidFill>
                   <a:srgbClr val="7C3AED"/>
                 </a:solidFill>
-                <a:latin typeface="Arial Black" pitchFamily="34" charset="0"/>
-                <a:ea typeface="Arial Black" pitchFamily="34" charset="-122"/>
-                <a:cs typeface="Arial Black" pitchFamily="34" charset="-120"/>
-              </a:rPr>
-              <a:t>01</a:t>
-            </a:r>
-            <a:endParaRPr lang="en-US" sz="1300" dirty="0"/>
-          </a:p>
-        </p:txBody>
-      </p:sp>
-      <p:sp>
-        <p:nvSpPr>
-          <p:cNvPr id="6" name="Text 4"/>
-          <p:cNvSpPr/>
-          <p:nvPr/>
-        </p:nvSpPr>
-        <p:spPr>
-          <a:xfrm>
-            <a:off x="1051560" y="1252728"/>
-            <a:ext cx="7589520" cy="256032"/>
-          </a:xfrm>
-          <a:prstGeom prst="rect">
-            <a:avLst/>
-          </a:prstGeom>
-          <a:noFill/>
-          <a:ln/>
-        </p:spPr>
-        <p:txBody>
-          <a:bodyPr wrap="square" lIns="0" tIns="0" rIns="0" bIns="0" rtlCol="0" anchor="ctr"/>
-          <a:lstStyle/>
-          <a:p>
-            <a:pPr indent="0" marL="0">
-              <a:buNone/>
-            </a:pPr>
-            <a:r>
-              <a:rPr lang="en-US" sz="1300" b="1" dirty="0">
-                <a:solidFill>
-                  <a:srgbClr val="E2E8F0"/>
-                </a:solidFill>
-                <a:latin typeface="Calibri" pitchFamily="34" charset="0"/>
-                <a:ea typeface="Calibri" pitchFamily="34" charset="-122"/>
-                <a:cs typeface="Calibri" pitchFamily="34" charset="-120"/>
-              </a:rPr>
-              <a:t>RL-Based Adaptive Policy</a:t>
-            </a:r>
-            <a:endParaRPr lang="en-US" sz="1300" dirty="0"/>
-          </a:p>
-        </p:txBody>
-      </p:sp>
-      <p:sp>
-        <p:nvSpPr>
-          <p:cNvPr id="7" name="Text 5"/>
-          <p:cNvSpPr/>
-          <p:nvPr/>
-        </p:nvSpPr>
-        <p:spPr>
-          <a:xfrm>
-            <a:off x="1051560" y="1508760"/>
-            <a:ext cx="7589520" cy="320040"/>
-          </a:xfrm>
-          <a:prstGeom prst="rect">
-            <a:avLst/>
-          </a:prstGeom>
-          <a:noFill/>
-          <a:ln/>
-        </p:spPr>
-        <p:txBody>
-          <a:bodyPr wrap="square" lIns="0" tIns="0" rIns="0" bIns="0" rtlCol="0" anchor="ctr"/>
-          <a:lstStyle/>
-          <a:p>
-            <a:pPr indent="0" marL="0">
-              <a:buNone/>
-            </a:pPr>
-            <a:r>
-              <a:rPr lang="en-US" sz="1050" dirty="0">
+                <a:latin typeface="Calibri" pitchFamily="34" charset="0"/>
+                <a:ea typeface="Calibri" pitchFamily="34" charset="-122"/>
+                <a:cs typeface="Calibri" pitchFamily="34" charset="-120"/>
+              </a:rPr>
+              <a:t>💻  Remote Workers</a:t>
+            </a:r>
+            <a:endParaRPr lang="en-US" sz="1400" dirty="0"/>
+          </a:p>
+        </p:txBody>
+      </p:sp>
+      <p:sp>
+        <p:nvSpPr>
+          <p:cNvPr id="11" name="Text 9"/>
+          <p:cNvSpPr/>
+          <p:nvPr/>
+        </p:nvSpPr>
+        <p:spPr>
+          <a:xfrm>
+            <a:off x="4965192" y="1792224"/>
+            <a:ext cx="3611880" cy="914400"/>
+          </a:xfrm>
+          <a:prstGeom prst="rect">
+            <a:avLst/>
+          </a:prstGeom>
+          <a:noFill/>
+          <a:ln/>
+        </p:spPr>
+        <p:txBody>
+          <a:bodyPr wrap="square" rtlCol="0" anchor="t"/>
+          <a:lstStyle/>
+          <a:p>
+            <a:pPr indent="0" marL="0">
+              <a:buNone/>
+            </a:pPr>
+            <a:r>
+              <a:rPr lang="en-US" sz="1150" dirty="0">
                 <a:solidFill>
                   <a:srgbClr val="94A3B8"/>
                 </a:solidFill>
@@ -10578,34 +11387,32 @@
                 <a:ea typeface="Calibri" pitchFamily="34" charset="-122"/>
                 <a:cs typeface="Calibri" pitchFamily="34" charset="-120"/>
               </a:rPr>
-              <a:t>Replace rule-based logic with a Q-learning agent. State: (focus, blink_rate, noise, time_in_block, hour_of_day). Reward: sustained focus improvement.</a:t>
-            </a:r>
-            <a:endParaRPr lang="en-US" sz="1050" dirty="0"/>
-          </a:p>
-        </p:txBody>
-      </p:sp>
-      <p:sp>
-        <p:nvSpPr>
-          <p:cNvPr id="8" name="Shape 6"/>
-          <p:cNvSpPr/>
-          <p:nvPr/>
-        </p:nvSpPr>
-        <p:spPr>
-          <a:xfrm>
-            <a:off x="457200" y="1947672"/>
-            <a:ext cx="457200" cy="548640"/>
-          </a:xfrm>
-          <a:prstGeom prst="rect">
-            <a:avLst/>
-          </a:prstGeom>
-          <a:solidFill>
-            <a:srgbClr val="06B6D4">
-              <a:alpha val="80000"/>
-            </a:srgbClr>
+              <a:t>Detect when home office noise or phone interruptions are hurting your productivity. Get data-backed evidence.</a:t>
+            </a:r>
+            <a:endParaRPr lang="en-US" sz="1150" dirty="0"/>
+          </a:p>
+        </p:txBody>
+      </p:sp>
+      <p:sp>
+        <p:nvSpPr>
+          <p:cNvPr id="12" name="Shape 10"/>
+          <p:cNvSpPr/>
+          <p:nvPr/>
+        </p:nvSpPr>
+        <p:spPr>
+          <a:xfrm>
+            <a:off x="457200" y="3044952"/>
+            <a:ext cx="3977640" cy="1627632"/>
+          </a:xfrm>
+          <a:prstGeom prst="rect">
+            <a:avLst/>
+          </a:prstGeom>
+          <a:solidFill>
+            <a:srgbClr val="13132A"/>
           </a:solidFill>
           <a:ln w="12700">
             <a:solidFill>
-              <a:srgbClr val="06B6D4"/>
+              <a:srgbClr val="1E1E40"/>
             </a:solidFill>
             <a:prstDash val="solid"/>
           </a:ln>
@@ -10613,139 +11420,20 @@
       </p:sp>
       <p:sp>
         <p:nvSpPr>
-          <p:cNvPr id="9" name="Text 7"/>
-          <p:cNvSpPr/>
-          <p:nvPr/>
-        </p:nvSpPr>
-        <p:spPr>
-          <a:xfrm>
-            <a:off x="457200" y="1965960"/>
-            <a:ext cx="457200" cy="530352"/>
-          </a:xfrm>
-          <a:prstGeom prst="rect">
-            <a:avLst/>
-          </a:prstGeom>
-          <a:noFill/>
-          <a:ln/>
-        </p:spPr>
-        <p:txBody>
-          <a:bodyPr wrap="square" rtlCol="0" anchor="ctr"/>
-          <a:lstStyle/>
-          <a:p>
-            <a:pPr algn="ctr" indent="0" marL="0">
-              <a:buNone/>
-            </a:pPr>
-            <a:r>
-              <a:rPr lang="en-US" sz="1300" b="1" dirty="0">
-                <a:solidFill>
-                  <a:srgbClr val="06B6D4"/>
-                </a:solidFill>
-                <a:latin typeface="Arial Black" pitchFamily="34" charset="0"/>
-                <a:ea typeface="Arial Black" pitchFamily="34" charset="-122"/>
-                <a:cs typeface="Arial Black" pitchFamily="34" charset="-120"/>
-              </a:rPr>
-              <a:t>02</a:t>
-            </a:r>
-            <a:endParaRPr lang="en-US" sz="1300" dirty="0"/>
-          </a:p>
-        </p:txBody>
-      </p:sp>
-      <p:sp>
-        <p:nvSpPr>
-          <p:cNvPr id="10" name="Text 8"/>
-          <p:cNvSpPr/>
-          <p:nvPr/>
-        </p:nvSpPr>
-        <p:spPr>
-          <a:xfrm>
-            <a:off x="1051560" y="1965960"/>
-            <a:ext cx="7589520" cy="256032"/>
-          </a:xfrm>
-          <a:prstGeom prst="rect">
-            <a:avLst/>
-          </a:prstGeom>
-          <a:noFill/>
-          <a:ln/>
-        </p:spPr>
-        <p:txBody>
-          <a:bodyPr wrap="square" lIns="0" tIns="0" rIns="0" bIns="0" rtlCol="0" anchor="ctr"/>
-          <a:lstStyle/>
-          <a:p>
-            <a:pPr indent="0" marL="0">
-              <a:buNone/>
-            </a:pPr>
-            <a:r>
-              <a:rPr lang="en-US" sz="1300" b="1" dirty="0">
-                <a:solidFill>
-                  <a:srgbClr val="E2E8F0"/>
-                </a:solidFill>
-                <a:latin typeface="Calibri" pitchFamily="34" charset="0"/>
-                <a:ea typeface="Calibri" pitchFamily="34" charset="-122"/>
-                <a:cs typeface="Calibri" pitchFamily="34" charset="-120"/>
-              </a:rPr>
-              <a:t>Ambient Noise Classification</a:t>
-            </a:r>
-            <a:endParaRPr lang="en-US" sz="1300" dirty="0"/>
-          </a:p>
-        </p:txBody>
-      </p:sp>
-      <p:sp>
-        <p:nvSpPr>
-          <p:cNvPr id="11" name="Text 9"/>
-          <p:cNvSpPr/>
-          <p:nvPr/>
-        </p:nvSpPr>
-        <p:spPr>
-          <a:xfrm>
-            <a:off x="1051560" y="2221992"/>
-            <a:ext cx="7589520" cy="320040"/>
-          </a:xfrm>
-          <a:prstGeom prst="rect">
-            <a:avLst/>
-          </a:prstGeom>
-          <a:noFill/>
-          <a:ln/>
-        </p:spPr>
-        <p:txBody>
-          <a:bodyPr wrap="square" lIns="0" tIns="0" rIns="0" bIns="0" rtlCol="0" anchor="ctr"/>
-          <a:lstStyle/>
-          <a:p>
-            <a:pPr indent="0" marL="0">
-              <a:buNone/>
-            </a:pPr>
-            <a:r>
-              <a:rPr lang="en-US" sz="1050" dirty="0">
-                <a:solidFill>
-                  <a:srgbClr val="94A3B8"/>
-                </a:solidFill>
-                <a:latin typeface="Calibri" pitchFamily="34" charset="0"/>
-                <a:ea typeface="Calibri" pitchFamily="34" charset="-122"/>
-                <a:cs typeface="Calibri" pitchFamily="34" charset="-120"/>
-              </a:rPr>
-              <a:t>Distinguish speech vs. music vs. background hum using a lightweight audio CNN — smarter than raw dB alone.</a:t>
-            </a:r>
-            <a:endParaRPr lang="en-US" sz="1050" dirty="0"/>
-          </a:p>
-        </p:txBody>
-      </p:sp>
-      <p:sp>
-        <p:nvSpPr>
-          <p:cNvPr id="12" name="Shape 10"/>
-          <p:cNvSpPr/>
-          <p:nvPr/>
-        </p:nvSpPr>
-        <p:spPr>
-          <a:xfrm>
-            <a:off x="457200" y="2660904"/>
-            <a:ext cx="457200" cy="548640"/>
-          </a:xfrm>
-          <a:prstGeom prst="rect">
-            <a:avLst/>
-          </a:prstGeom>
-          <a:solidFill>
-            <a:srgbClr val="10B981">
-              <a:alpha val="80000"/>
-            </a:srgbClr>
+          <p:cNvPr id="13" name="Shape 11"/>
+          <p:cNvSpPr/>
+          <p:nvPr/>
+        </p:nvSpPr>
+        <p:spPr>
+          <a:xfrm>
+            <a:off x="457200" y="3044952"/>
+            <a:ext cx="3977640" cy="45720"/>
+          </a:xfrm>
+          <a:prstGeom prst="rect">
+            <a:avLst/>
+          </a:prstGeom>
+          <a:solidFill>
+            <a:srgbClr val="10B981"/>
           </a:solidFill>
           <a:ln w="12700">
             <a:solidFill>
@@ -10757,14 +11445,14 @@
       </p:sp>
       <p:sp>
         <p:nvSpPr>
-          <p:cNvPr id="13" name="Text 11"/>
-          <p:cNvSpPr/>
-          <p:nvPr/>
-        </p:nvSpPr>
-        <p:spPr>
-          <a:xfrm>
-            <a:off x="457200" y="2679192"/>
-            <a:ext cx="457200" cy="530352"/>
+          <p:cNvPr id="14" name="Text 12"/>
+          <p:cNvSpPr/>
+          <p:nvPr/>
+        </p:nvSpPr>
+        <p:spPr>
+          <a:xfrm>
+            <a:off x="621792" y="3191256"/>
+            <a:ext cx="3611880" cy="365760"/>
           </a:xfrm>
           <a:prstGeom prst="rect">
             <a:avLst/>
@@ -10776,60 +11464,21 @@
           <a:bodyPr wrap="square" rtlCol="0" anchor="ctr"/>
           <a:lstStyle/>
           <a:p>
-            <a:pPr algn="ctr" indent="0" marL="0">
-              <a:buNone/>
-            </a:pPr>
-            <a:r>
-              <a:rPr lang="en-US" sz="1300" b="1" dirty="0">
+            <a:pPr indent="0" marL="0">
+              <a:buNone/>
+            </a:pPr>
+            <a:r>
+              <a:rPr lang="en-US" sz="1400" b="1" dirty="0">
                 <a:solidFill>
                   <a:srgbClr val="10B981"/>
                 </a:solidFill>
-                <a:latin typeface="Arial Black" pitchFamily="34" charset="0"/>
-                <a:ea typeface="Arial Black" pitchFamily="34" charset="-122"/>
-                <a:cs typeface="Arial Black" pitchFamily="34" charset="-120"/>
-              </a:rPr>
-              <a:t>03</a:t>
-            </a:r>
-            <a:endParaRPr lang="en-US" sz="1300" dirty="0"/>
-          </a:p>
-        </p:txBody>
-      </p:sp>
-      <p:sp>
-        <p:nvSpPr>
-          <p:cNvPr id="14" name="Text 12"/>
-          <p:cNvSpPr/>
-          <p:nvPr/>
-        </p:nvSpPr>
-        <p:spPr>
-          <a:xfrm>
-            <a:off x="1051560" y="2679192"/>
-            <a:ext cx="7589520" cy="256032"/>
-          </a:xfrm>
-          <a:prstGeom prst="rect">
-            <a:avLst/>
-          </a:prstGeom>
-          <a:noFill/>
-          <a:ln/>
-        </p:spPr>
-        <p:txBody>
-          <a:bodyPr wrap="square" lIns="0" tIns="0" rIns="0" bIns="0" rtlCol="0" anchor="ctr"/>
-          <a:lstStyle/>
-          <a:p>
-            <a:pPr indent="0" marL="0">
-              <a:buNone/>
-            </a:pPr>
-            <a:r>
-              <a:rPr lang="en-US" sz="1300" b="1" dirty="0">
-                <a:solidFill>
-                  <a:srgbClr val="E2E8F0"/>
-                </a:solidFill>
-                <a:latin typeface="Calibri" pitchFamily="34" charset="0"/>
-                <a:ea typeface="Calibri" pitchFamily="34" charset="-122"/>
-                <a:cs typeface="Calibri" pitchFamily="34" charset="-120"/>
-              </a:rPr>
-              <a:t>Multi-Day Streak &amp; Gamification</a:t>
-            </a:r>
-            <a:endParaRPr lang="en-US" sz="1300" dirty="0"/>
+                <a:latin typeface="Calibri" pitchFamily="34" charset="0"/>
+                <a:ea typeface="Calibri" pitchFamily="34" charset="-122"/>
+                <a:cs typeface="Calibri" pitchFamily="34" charset="-120"/>
+              </a:rPr>
+              <a:t>🏥  Mental Health</a:t>
+            </a:r>
+            <a:endParaRPr lang="en-US" sz="1400" dirty="0"/>
           </a:p>
         </p:txBody>
       </p:sp>
@@ -10841,24 +11490,24 @@
         </p:nvSpPr>
         <p:spPr>
           <a:xfrm>
-            <a:off x="1051560" y="2935224"/>
-            <a:ext cx="7589520" cy="320040"/>
-          </a:xfrm>
-          <a:prstGeom prst="rect">
-            <a:avLst/>
-          </a:prstGeom>
-          <a:noFill/>
-          <a:ln/>
-        </p:spPr>
-        <p:txBody>
-          <a:bodyPr wrap="square" lIns="0" tIns="0" rIns="0" bIns="0" rtlCol="0" anchor="ctr"/>
-          <a:lstStyle/>
-          <a:p>
-            <a:pPr indent="0" marL="0">
-              <a:buNone/>
-            </a:pPr>
-            <a:r>
-              <a:rPr lang="en-US" sz="1050" dirty="0">
+            <a:off x="621792" y="3575304"/>
+            <a:ext cx="3611880" cy="914400"/>
+          </a:xfrm>
+          <a:prstGeom prst="rect">
+            <a:avLst/>
+          </a:prstGeom>
+          <a:noFill/>
+          <a:ln/>
+        </p:spPr>
+        <p:txBody>
+          <a:bodyPr wrap="square" rtlCol="0" anchor="t"/>
+          <a:lstStyle/>
+          <a:p>
+            <a:pPr indent="0" marL="0">
+              <a:buNone/>
+            </a:pPr>
+            <a:r>
+              <a:rPr lang="en-US" sz="1150" dirty="0">
                 <a:solidFill>
                   <a:srgbClr val="94A3B8"/>
                 </a:solidFill>
@@ -10866,9 +11515,9 @@
                 <a:ea typeface="Calibri" pitchFamily="34" charset="-122"/>
                 <a:cs typeface="Calibri" pitchFamily="34" charset="-120"/>
               </a:rPr>
-              <a:t>Track focus streaks, personal bests, and weekly summaries. Behavioral nudges to build consistent study habits.</a:t>
-            </a:r>
-            <a:endParaRPr lang="en-US" sz="1050" dirty="0"/>
+              <a:t>Long-term blink rate and posture trends may surface early fatigue or burnout indicators before they become serious.</a:t>
+            </a:r>
+            <a:endParaRPr lang="en-US" sz="1150" dirty="0"/>
           </a:p>
         </p:txBody>
       </p:sp>
@@ -10880,16 +11529,39 @@
         </p:nvSpPr>
         <p:spPr>
           <a:xfrm>
-            <a:off x="457200" y="3374136"/>
-            <a:ext cx="457200" cy="548640"/>
-          </a:xfrm>
-          <a:prstGeom prst="rect">
-            <a:avLst/>
-          </a:prstGeom>
-          <a:solidFill>
-            <a:srgbClr val="F59E0B">
-              <a:alpha val="80000"/>
-            </a:srgbClr>
+            <a:off x="4800600" y="3044952"/>
+            <a:ext cx="3977640" cy="1627632"/>
+          </a:xfrm>
+          <a:prstGeom prst="rect">
+            <a:avLst/>
+          </a:prstGeom>
+          <a:solidFill>
+            <a:srgbClr val="13132A"/>
+          </a:solidFill>
+          <a:ln w="12700">
+            <a:solidFill>
+              <a:srgbClr val="1E1E40"/>
+            </a:solidFill>
+            <a:prstDash val="solid"/>
+          </a:ln>
+        </p:spPr>
+      </p:sp>
+      <p:sp>
+        <p:nvSpPr>
+          <p:cNvPr id="17" name="Shape 15"/>
+          <p:cNvSpPr/>
+          <p:nvPr/>
+        </p:nvSpPr>
+        <p:spPr>
+          <a:xfrm>
+            <a:off x="4800600" y="3044952"/>
+            <a:ext cx="3977640" cy="45720"/>
+          </a:xfrm>
+          <a:prstGeom prst="rect">
+            <a:avLst/>
+          </a:prstGeom>
+          <a:solidFill>
+            <a:srgbClr val="F59E0B"/>
           </a:solidFill>
           <a:ln w="12700">
             <a:solidFill>
@@ -10901,14 +11573,14 @@
       </p:sp>
       <p:sp>
         <p:nvSpPr>
-          <p:cNvPr id="17" name="Text 15"/>
-          <p:cNvSpPr/>
-          <p:nvPr/>
-        </p:nvSpPr>
-        <p:spPr>
-          <a:xfrm>
-            <a:off x="457200" y="3392424"/>
-            <a:ext cx="457200" cy="530352"/>
+          <p:cNvPr id="18" name="Text 16"/>
+          <p:cNvSpPr/>
+          <p:nvPr/>
+        </p:nvSpPr>
+        <p:spPr>
+          <a:xfrm>
+            <a:off x="4965192" y="3191256"/>
+            <a:ext cx="3611880" cy="365760"/>
           </a:xfrm>
           <a:prstGeom prst="rect">
             <a:avLst/>
@@ -10920,241 +11592,97 @@
           <a:bodyPr wrap="square" rtlCol="0" anchor="ctr"/>
           <a:lstStyle/>
           <a:p>
+            <a:pPr indent="0" marL="0">
+              <a:buNone/>
+            </a:pPr>
+            <a:r>
+              <a:rPr lang="en-US" sz="1400" b="1" dirty="0">
+                <a:solidFill>
+                  <a:srgbClr val="F59E0B"/>
+                </a:solidFill>
+                <a:latin typeface="Calibri" pitchFamily="34" charset="0"/>
+                <a:ea typeface="Calibri" pitchFamily="34" charset="-122"/>
+                <a:cs typeface="Calibri" pitchFamily="34" charset="-120"/>
+              </a:rPr>
+              <a:t>🔬  Research</a:t>
+            </a:r>
+            <a:endParaRPr lang="en-US" sz="1400" dirty="0"/>
+          </a:p>
+        </p:txBody>
+      </p:sp>
+      <p:sp>
+        <p:nvSpPr>
+          <p:cNvPr id="19" name="Text 17"/>
+          <p:cNvSpPr/>
+          <p:nvPr/>
+        </p:nvSpPr>
+        <p:spPr>
+          <a:xfrm>
+            <a:off x="4965192" y="3575304"/>
+            <a:ext cx="3611880" cy="914400"/>
+          </a:xfrm>
+          <a:prstGeom prst="rect">
+            <a:avLst/>
+          </a:prstGeom>
+          <a:noFill/>
+          <a:ln/>
+        </p:spPr>
+        <p:txBody>
+          <a:bodyPr wrap="square" rtlCol="0" anchor="t"/>
+          <a:lstStyle/>
+          <a:p>
+            <a:pPr indent="0" marL="0">
+              <a:buNone/>
+            </a:pPr>
+            <a:r>
+              <a:rPr lang="en-US" sz="1150" dirty="0">
+                <a:solidFill>
+                  <a:srgbClr val="94A3B8"/>
+                </a:solidFill>
+                <a:latin typeface="Calibri" pitchFamily="34" charset="0"/>
+                <a:ea typeface="Calibri" pitchFamily="34" charset="-122"/>
+                <a:cs typeface="Calibri" pitchFamily="34" charset="-120"/>
+              </a:rPr>
+              <a:t>A non-invasive sensor platform for studying cognitive load, attention, and environmental effects on focus.</a:t>
+            </a:r>
+            <a:endParaRPr lang="en-US" sz="1150" dirty="0"/>
+          </a:p>
+        </p:txBody>
+      </p:sp>
+      <p:sp>
+        <p:nvSpPr>
+          <p:cNvPr id="20" name="Text 18"/>
+          <p:cNvSpPr/>
+          <p:nvPr/>
+        </p:nvSpPr>
+        <p:spPr>
+          <a:xfrm>
+            <a:off x="457200" y="4736592"/>
+            <a:ext cx="8229600" cy="274320"/>
+          </a:xfrm>
+          <a:prstGeom prst="rect">
+            <a:avLst/>
+          </a:prstGeom>
+          <a:noFill/>
+          <a:ln/>
+        </p:spPr>
+        <p:txBody>
+          <a:bodyPr wrap="square" rtlCol="0" anchor="ctr"/>
+          <a:lstStyle/>
+          <a:p>
             <a:pPr algn="ctr" indent="0" marL="0">
               <a:buNone/>
             </a:pPr>
             <a:r>
-              <a:rPr lang="en-US" sz="1300" b="1" dirty="0">
-                <a:solidFill>
-                  <a:srgbClr val="F59E0B"/>
-                </a:solidFill>
-                <a:latin typeface="Arial Black" pitchFamily="34" charset="0"/>
-                <a:ea typeface="Arial Black" pitchFamily="34" charset="-122"/>
-                <a:cs typeface="Arial Black" pitchFamily="34" charset="-120"/>
-              </a:rPr>
-              <a:t>04</a:t>
-            </a:r>
-            <a:endParaRPr lang="en-US" sz="1300" dirty="0"/>
-          </a:p>
-        </p:txBody>
-      </p:sp>
-      <p:sp>
-        <p:nvSpPr>
-          <p:cNvPr id="18" name="Text 16"/>
-          <p:cNvSpPr/>
-          <p:nvPr/>
-        </p:nvSpPr>
-        <p:spPr>
-          <a:xfrm>
-            <a:off x="1051560" y="3392424"/>
-            <a:ext cx="7589520" cy="256032"/>
-          </a:xfrm>
-          <a:prstGeom prst="rect">
-            <a:avLst/>
-          </a:prstGeom>
-          <a:noFill/>
-          <a:ln/>
-        </p:spPr>
-        <p:txBody>
-          <a:bodyPr wrap="square" lIns="0" tIns="0" rIns="0" bIns="0" rtlCol="0" anchor="ctr"/>
-          <a:lstStyle/>
-          <a:p>
-            <a:pPr indent="0" marL="0">
-              <a:buNone/>
-            </a:pPr>
-            <a:r>
-              <a:rPr lang="en-US" sz="1300" b="1" dirty="0">
-                <a:solidFill>
-                  <a:srgbClr val="E2E8F0"/>
-                </a:solidFill>
-                <a:latin typeface="Calibri" pitchFamily="34" charset="0"/>
-                <a:ea typeface="Calibri" pitchFamily="34" charset="-122"/>
-                <a:cs typeface="Calibri" pitchFamily="34" charset="-120"/>
-              </a:rPr>
-              <a:t>Pre-Session Goal Setting</a:t>
-            </a:r>
-            <a:endParaRPr lang="en-US" sz="1300" dirty="0"/>
-          </a:p>
-        </p:txBody>
-      </p:sp>
-      <p:sp>
-        <p:nvSpPr>
-          <p:cNvPr id="19" name="Text 17"/>
-          <p:cNvSpPr/>
-          <p:nvPr/>
-        </p:nvSpPr>
-        <p:spPr>
-          <a:xfrm>
-            <a:off x="1051560" y="3648456"/>
-            <a:ext cx="7589520" cy="320040"/>
-          </a:xfrm>
-          <a:prstGeom prst="rect">
-            <a:avLst/>
-          </a:prstGeom>
-          <a:noFill/>
-          <a:ln/>
-        </p:spPr>
-        <p:txBody>
-          <a:bodyPr wrap="square" lIns="0" tIns="0" rIns="0" bIns="0" rtlCol="0" anchor="ctr"/>
-          <a:lstStyle/>
-          <a:p>
-            <a:pPr indent="0" marL="0">
-              <a:buNone/>
-            </a:pPr>
-            <a:r>
-              <a:rPr lang="en-US" sz="1050" dirty="0">
-                <a:solidFill>
-                  <a:srgbClr val="94A3B8"/>
-                </a:solidFill>
-                <a:latin typeface="Calibri" pitchFamily="34" charset="0"/>
-                <a:ea typeface="Calibri" pitchFamily="34" charset="-122"/>
-                <a:cs typeface="Calibri" pitchFamily="34" charset="-120"/>
-              </a:rPr>
-              <a:t>User states a goal at session start. LLM checks at end: 'Did you accomplish: finish section 4?' Stored with session data.</a:t>
-            </a:r>
-            <a:endParaRPr lang="en-US" sz="1050" dirty="0"/>
-          </a:p>
-        </p:txBody>
-      </p:sp>
-      <p:sp>
-        <p:nvSpPr>
-          <p:cNvPr id="20" name="Shape 18"/>
-          <p:cNvSpPr/>
-          <p:nvPr/>
-        </p:nvSpPr>
-        <p:spPr>
-          <a:xfrm>
-            <a:off x="457200" y="4087368"/>
-            <a:ext cx="457200" cy="548640"/>
-          </a:xfrm>
-          <a:prstGeom prst="rect">
-            <a:avLst/>
-          </a:prstGeom>
-          <a:solidFill>
-            <a:srgbClr val="EF4444">
-              <a:alpha val="80000"/>
-            </a:srgbClr>
-          </a:solidFill>
-          <a:ln w="12700">
-            <a:solidFill>
-              <a:srgbClr val="EF4444"/>
-            </a:solidFill>
-            <a:prstDash val="solid"/>
-          </a:ln>
-        </p:spPr>
-      </p:sp>
-      <p:sp>
-        <p:nvSpPr>
-          <p:cNvPr id="21" name="Text 19"/>
-          <p:cNvSpPr/>
-          <p:nvPr/>
-        </p:nvSpPr>
-        <p:spPr>
-          <a:xfrm>
-            <a:off x="457200" y="4105656"/>
-            <a:ext cx="457200" cy="530352"/>
-          </a:xfrm>
-          <a:prstGeom prst="rect">
-            <a:avLst/>
-          </a:prstGeom>
-          <a:noFill/>
-          <a:ln/>
-        </p:spPr>
-        <p:txBody>
-          <a:bodyPr wrap="square" rtlCol="0" anchor="ctr"/>
-          <a:lstStyle/>
-          <a:p>
-            <a:pPr algn="ctr" indent="0" marL="0">
-              <a:buNone/>
-            </a:pPr>
-            <a:r>
-              <a:rPr lang="en-US" sz="1300" b="1" dirty="0">
-                <a:solidFill>
-                  <a:srgbClr val="EF4444"/>
-                </a:solidFill>
-                <a:latin typeface="Arial Black" pitchFamily="34" charset="0"/>
-                <a:ea typeface="Arial Black" pitchFamily="34" charset="-122"/>
-                <a:cs typeface="Arial Black" pitchFamily="34" charset="-120"/>
-              </a:rPr>
-              <a:t>05</a:t>
-            </a:r>
-            <a:endParaRPr lang="en-US" sz="1300" dirty="0"/>
-          </a:p>
-        </p:txBody>
-      </p:sp>
-      <p:sp>
-        <p:nvSpPr>
-          <p:cNvPr id="22" name="Text 20"/>
-          <p:cNvSpPr/>
-          <p:nvPr/>
-        </p:nvSpPr>
-        <p:spPr>
-          <a:xfrm>
-            <a:off x="1051560" y="4105656"/>
-            <a:ext cx="7589520" cy="256032"/>
-          </a:xfrm>
-          <a:prstGeom prst="rect">
-            <a:avLst/>
-          </a:prstGeom>
-          <a:noFill/>
-          <a:ln/>
-        </p:spPr>
-        <p:txBody>
-          <a:bodyPr wrap="square" lIns="0" tIns="0" rIns="0" bIns="0" rtlCol="0" anchor="ctr"/>
-          <a:lstStyle/>
-          <a:p>
-            <a:pPr indent="0" marL="0">
-              <a:buNone/>
-            </a:pPr>
-            <a:r>
-              <a:rPr lang="en-US" sz="1300" b="1" dirty="0">
-                <a:solidFill>
-                  <a:srgbClr val="E2E8F0"/>
-                </a:solidFill>
-                <a:latin typeface="Calibri" pitchFamily="34" charset="0"/>
-                <a:ea typeface="Calibri" pitchFamily="34" charset="-122"/>
-                <a:cs typeface="Calibri" pitchFamily="34" charset="-120"/>
-              </a:rPr>
-              <a:t>Baseline Comparison Mode</a:t>
-            </a:r>
-            <a:endParaRPr lang="en-US" sz="1300" dirty="0"/>
-          </a:p>
-        </p:txBody>
-      </p:sp>
-      <p:sp>
-        <p:nvSpPr>
-          <p:cNvPr id="23" name="Text 21"/>
-          <p:cNvSpPr/>
-          <p:nvPr/>
-        </p:nvSpPr>
-        <p:spPr>
-          <a:xfrm>
-            <a:off x="1051560" y="4361688"/>
-            <a:ext cx="7589520" cy="320040"/>
-          </a:xfrm>
-          <a:prstGeom prst="rect">
-            <a:avLst/>
-          </a:prstGeom>
-          <a:noFill/>
-          <a:ln/>
-        </p:spPr>
-        <p:txBody>
-          <a:bodyPr wrap="square" lIns="0" tIns="0" rIns="0" bIns="0" rtlCol="0" anchor="ctr"/>
-          <a:lstStyle/>
-          <a:p>
-            <a:pPr indent="0" marL="0">
-              <a:buNone/>
-            </a:pPr>
-            <a:r>
-              <a:rPr lang="en-US" sz="1050" dirty="0">
-                <a:solidFill>
-                  <a:srgbClr val="94A3B8"/>
-                </a:solidFill>
-                <a:latin typeface="Calibri" pitchFamily="34" charset="0"/>
-                <a:ea typeface="Calibri" pitchFamily="34" charset="-122"/>
-                <a:cs typeface="Calibri" pitchFamily="34" charset="-120"/>
-              </a:rPr>
-              <a:t>A/B test: run fixed 25/5 sessions vs. adaptive. Dashboard shows statistically which produces higher sustained focus.</a:t>
+              <a:rPr lang="en-US" sz="1050" i="1" dirty="0">
+                <a:solidFill>
+                  <a:srgbClr val="7C3AED"/>
+                </a:solidFill>
+                <a:latin typeface="Calibri" pitchFamily="34" charset="0"/>
+                <a:ea typeface="Calibri" pitchFamily="34" charset="-122"/>
+                <a:cs typeface="Calibri" pitchFamily="34" charset="-120"/>
+              </a:rPr>
+              <a:t>Vision: a lightweight background agent that runs all day and builds a true map of your cognitive patterns over weeks.</a:t>
             </a:r>
             <a:endParaRPr lang="en-US" sz="1050" dirty="0"/>
           </a:p>
